--- a/lab3/tactile_analysis/vr_teleop_intro_with_tactile_analysis.pptx
+++ b/lab3/tactile_analysis/vr_teleop_intro_with_tactile_analysis.pptx
@@ -1,23 +1,23 @@
 
 <file path=ppt/presentation.xml><?xml version="1.0" encoding="utf-8"?>
-<p:presentation xmlns:a="http://schemas.openxmlformats.org/drawingml/2006/main" xmlns:r="http://schemas.openxmlformats.org/officeDocument/2006/relationships" xmlns:p="http://schemas.openxmlformats.org/presentationml/2006/main" saveSubsetFonts="1" autoCompressPictures="0">
+<p:presentation xmlns:a="http://schemas.openxmlformats.org/drawingml/2006/main" xmlns:r="http://schemas.openxmlformats.org/officeDocument/2006/relationships" xmlns:p="http://schemas.openxmlformats.org/presentationml/2006/main" autoCompressPictures="0">
   <p:sldMasterIdLst>
     <p:sldMasterId id="2147483648" r:id="rId1"/>
   </p:sldMasterIdLst>
   <p:notesMasterIdLst>
-    <p:notesMasterId r:id="rId7"/>
+    <p:notesMasterId r:id="rId4"/>
   </p:notesMasterIdLst>
   <p:sldIdLst>
-    <p:sldId id="256" r:id="rId2"/>
-    <p:sldId id="257" r:id="rId3"/>
-    <p:sldId id="258" r:id="rId4"/>
-    <p:sldId id="259" r:id="rId5"/>
-    <p:sldId id="260" r:id="rId6"/>
-    <p:sldId id="261" r:id="rId12"/>
-    <p:sldId id="262" r:id="rId13"/>
-    <p:sldId id="263" r:id="rId14"/>
-    <p:sldId id="264" r:id="rId15"/>
-    <p:sldId id="265" r:id="rId16"/>
+    <p:sldId id="256" r:id="rId3"/>
+    <p:sldId id="257" r:id="rId5"/>
+    <p:sldId id="258" r:id="rId6"/>
+    <p:sldId id="259" r:id="rId7"/>
+    <p:sldId id="260" r:id="rId8"/>
+    <p:sldId id="261" r:id="rId9"/>
+    <p:sldId id="262" r:id="rId10"/>
+    <p:sldId id="263" r:id="rId11"/>
+    <p:sldId id="264" r:id="rId12"/>
+    <p:sldId id="265" r:id="rId13"/>
   </p:sldIdLst>
   <p:sldSz cx="12192000" cy="6858000"/>
   <p:notesSz cx="6858000" cy="9144000"/>
@@ -119,12 +119,12 @@
   <p:extLst>
     <p:ext uri="{EFAFB233-063F-42B5-8137-9DF3F51BA10A}">
       <p15:sldGuideLst xmlns:p15="http://schemas.microsoft.com/office/powerpoint/2012/main">
-        <p15:guide id="1" orient="horz" pos="2160">
+        <p15:guide id="1" orient="horz" pos="2160" userDrawn="1">
           <p15:clr>
             <a:srgbClr val="A4A3A4"/>
           </p15:clr>
         </p15:guide>
-        <p15:guide id="2" pos="2880">
+        <p15:guide id="2" pos="2880" userDrawn="1">
           <p15:clr>
             <a:srgbClr val="A4A3A4"/>
           </p15:clr>
@@ -377,6 +377,7 @@
               <a:rPr lang="en-US" dirty="0"/>
               <a:t>This first slide shows the closed loop at a glance. The Quest browser is the sensing and interaction surface: it provides WebXR hand tracking, wrist pose, grip state, and control buttons. Those packets travel over secure WebSockets to the relay and then to one control owner on the computer. The control owner performs relative clutch mapping, Mink planning, watchdog checks, and state transitions. From there, the same front end can drive MuJoCo for simulation or the real Diana arms and DexH13 hands. Camera and robot state return to the Quest as a separate feedback path. A key architectural boundary is that this runtime does not depend on ROS; it uses the Diana Python SDK, native hand bridges, and direct USB camera access.</a:t>
             </a:r>
+            <a:endParaRPr lang="en-US" dirty="0"/>
           </a:p>
         </p:txBody>
       </p:sp>
@@ -441,6 +442,7 @@
               <a:rPr lang="en-US" dirty="0"/>
               <a:t>The VR packet has three kinds of information. First is pose: the wrist position and quaternion plus the 25 named WebXR hand joints. Second is operator intent: grip is a clutch for relative following, while A, B, X, and Y are state events. Third is freshness: the control computer measures the age of the newest packet on its own monotonic clock. Before a packet is consumed, the system checks tracking validity, finite values, and the known button set. The wrist is converted from the OpenXR convention into the DexH13 palm frame, and the Quest local-floor axes are mapped into the robot base frame using shared calibration. The arm command is relative, so releasing grip freezes the arm and discards the reference instead of leaving an old target active.</a:t>
             </a:r>
+            <a:endParaRPr lang="en-US" dirty="0"/>
           </a:p>
         </p:txBody>
       </p:sp>
@@ -505,6 +507,7 @@
               <a:rPr lang="en-US" dirty="0"/>
               <a:t>Mink provides the constrained motion layer. The target is a relative end-effector transform, while joint limits, collision distances, and the current robot state remain constraints. The main task follows the palm or TCP. A strict null-space term can bias elbow height and joints one, three, and four toward the current Home pose, but it is only used when the arm is being followed and the configuration is sufficiently manipulable. If the solve fails or the arm becomes too close to a singularity, the safe result is the measured joint state. Motion is shaped using exact forward kinematics: normal following is capped at 0.50 meters per second and 90 degrees per second. The planner also uses a 4-centimeter and 8-degree command lead boundary for re-anchoring. Collision distances are asymmetric by design: arms keep a 5-centimeter hard minimum with an 8-centimeter detection zone, while the hand can touch the table but cannot penetrate it.</a:t>
             </a:r>
+            <a:endParaRPr lang="en-US" dirty="0"/>
           </a:p>
         </p:txBody>
       </p:sp>
@@ -569,6 +572,7 @@
               <a:rPr lang="en-US" dirty="0"/>
               <a:t>The dexterous hand pipeline starts from the same WebXR skeleton, but it is a distinct retargeting path. The wrist orientation first defines the DexH13 palm-local frame. The 25 WebXR joints are arranged into the MediaPipe-style target ordering used by DexPilot, which solves for the 13 active actuator angles. The SDK still exposes 16 logical angles because index, middle, and ring joint four are passive observations. Those values are taken from the latest measurement when a command is built; they are never treated as independent targets. The native bridge owns the serial device, keeps a HOLD heartbeat, and refuses stale command reuse. Valid tracking and a valid wrist orientation are prerequisites for sending a new hand target.</a:t>
             </a:r>
+            <a:endParaRPr lang="en-US" dirty="0"/>
           </a:p>
         </p:txBody>
       </p:sp>
@@ -628,6 +632,7 @@
               <a:rPr lang="en-US" dirty="0"/>
               <a:t>The final slide covers execution semantics. The arms can run in position mode or Cartesian impedance mode. A mode switch stops the current servo stream, changes mode once, and then resumes with the approved command timing. During normal following, servoJ_ex uses a horizon of at least 40 milliseconds and no more than the 50-millisecond planning window. Movement also requires explicit readiness: selected devices must be healthy, communication must be fresh, and the computer and VR operator must authorize the task. X latches a software stop. A communication violation, SDK failure, or controller collision keeps the system stopped. Y does not simply clear a software flag; it performs the complete hardware recovery chain before unlocking. Releasing grip or B stops refreshing commands and clears the old reference. These layers complement, but never replace, the physical emergency stop and Diana controller collision detection.</a:t>
             </a:r>
+            <a:endParaRPr lang="en-US" dirty="0"/>
           </a:p>
         </p:txBody>
       </p:sp>
@@ -673,7 +678,6 @@
           <a:p>
             <a:fld id="{5BCAD085-E8A6-8845-BD4E-CB4CCA059FC4}" type="datetimeFigureOut">
               <a:rPr lang="en-US" smtClean="0"/>
-              <a:t>10/22/26</a:t>
             </a:fld>
             <a:endParaRPr lang="en-US"/>
           </a:p>
@@ -715,7 +719,6 @@
           <a:p>
             <a:fld id="{C1FF6DA9-008F-8B48-92A6-B652298478BF}" type="slidenum">
               <a:rPr lang="en-US" smtClean="0"/>
-              <a:t>‹#›</a:t>
             </a:fld>
             <a:endParaRPr lang="en-US"/>
           </a:p>
@@ -731,7 +734,7 @@
 
 <file path=ppt/slideMasters/slideMaster1.xml><?xml version="1.0" encoding="utf-8"?>
 <p:sldMaster xmlns:a="http://schemas.openxmlformats.org/drawingml/2006/main" xmlns:r="http://schemas.openxmlformats.org/officeDocument/2006/relationships" xmlns:p="http://schemas.openxmlformats.org/presentationml/2006/main">
-  <p:cSld name="vr_teleop_intro — Master">
+  <p:cSld>
     <p:bg>
       <p:bgRef idx="1001">
         <a:schemeClr val="bg1"/>
@@ -786,7 +789,6 @@
           <a:p>
             <a:fld id="{5BCAD085-E8A6-8845-BD4E-CB4CCA059FC4}" type="datetimeFigureOut">
               <a:rPr lang="en-US" smtClean="0"/>
-              <a:t>10/22/26</a:t>
             </a:fld>
             <a:endParaRPr lang="en-US"/>
           </a:p>
@@ -864,7 +866,6 @@
           <a:p>
             <a:fld id="{C1FF6DA9-008F-8B48-92A6-B652298478BF}" type="slidenum">
               <a:rPr lang="en-US" smtClean="0"/>
-              <a:t>‹#›</a:t>
             </a:fld>
             <a:endParaRPr lang="en-US"/>
           </a:p>
@@ -874,7 +875,7 @@
   </p:cSld>
   <p:clrMap bg1="lt1" tx1="dk1" bg2="lt2" tx2="dk2" accent1="accent1" accent2="accent2" accent3="accent3" accent4="accent4" accent5="accent5" accent6="accent6" hlink="hlink" folHlink="folHlink"/>
   <p:sldLayoutIdLst>
-    <p:sldLayoutId id="2147483655" r:id="rId1"/>
+    <p:sldLayoutId id="2147483649" r:id="rId1"/>
   </p:sldLayoutIdLst>
   <p:txStyles>
     <p:titleStyle>
@@ -898,7 +899,7 @@
         <a:spcBef>
           <a:spcPct val="20000"/>
         </a:spcBef>
-        <a:buFont typeface="Arial"/>
+        <a:buFont typeface="Arial" panose="020B0604020202090204"/>
         <a:buChar char="•"/>
         <a:defRPr lang="en-US" sz="3200" kern="1200">
           <a:solidFill>
@@ -913,7 +914,7 @@
         <a:spcBef>
           <a:spcPct val="20000"/>
         </a:spcBef>
-        <a:buFont typeface="Arial"/>
+        <a:buFont typeface="Arial" panose="020B0604020202090204"/>
         <a:buChar char="–"/>
         <a:defRPr lang="en-US" sz="2800" kern="1200">
           <a:solidFill>
@@ -928,7 +929,7 @@
         <a:spcBef>
           <a:spcPct val="20000"/>
         </a:spcBef>
-        <a:buFont typeface="Arial"/>
+        <a:buFont typeface="Arial" panose="020B0604020202090204"/>
         <a:buChar char="•"/>
         <a:defRPr lang="en-US" sz="2400" kern="1200">
           <a:solidFill>
@@ -943,7 +944,7 @@
         <a:spcBef>
           <a:spcPct val="20000"/>
         </a:spcBef>
-        <a:buFont typeface="Arial"/>
+        <a:buFont typeface="Arial" panose="020B0604020202090204"/>
         <a:buChar char="–"/>
         <a:defRPr lang="en-US" sz="2000" kern="1200">
           <a:solidFill>
@@ -958,7 +959,7 @@
         <a:spcBef>
           <a:spcPct val="20000"/>
         </a:spcBef>
-        <a:buFont typeface="Arial"/>
+        <a:buFont typeface="Arial" panose="020B0604020202090204"/>
         <a:buChar char="»"/>
         <a:defRPr lang="en-US" sz="2000" kern="1200">
           <a:solidFill>
@@ -973,7 +974,7 @@
         <a:spcBef>
           <a:spcPct val="20000"/>
         </a:spcBef>
-        <a:buFont typeface="Arial"/>
+        <a:buFont typeface="Arial" panose="020B0604020202090204"/>
         <a:buChar char="•"/>
         <a:defRPr lang="en-US" sz="2000" kern="1200">
           <a:solidFill>
@@ -988,7 +989,7 @@
         <a:spcBef>
           <a:spcPct val="20000"/>
         </a:spcBef>
-        <a:buFont typeface="Arial"/>
+        <a:buFont typeface="Arial" panose="020B0604020202090204"/>
         <a:buChar char="•"/>
         <a:defRPr lang="en-US" sz="2000" kern="1200">
           <a:solidFill>
@@ -1003,7 +1004,7 @@
         <a:spcBef>
           <a:spcPct val="20000"/>
         </a:spcBef>
-        <a:buFont typeface="Arial"/>
+        <a:buFont typeface="Arial" panose="020B0604020202090204"/>
         <a:buChar char="•"/>
         <a:defRPr lang="en-US" sz="2000" kern="1200">
           <a:solidFill>
@@ -1018,7 +1019,7 @@
         <a:spcBef>
           <a:spcPct val="20000"/>
         </a:spcBef>
-        <a:buFont typeface="Arial"/>
+        <a:buFont typeface="Arial" panose="020B0604020202090204"/>
         <a:buChar char="•"/>
         <a:defRPr lang="en-US" sz="2000" kern="1200">
           <a:solidFill>
@@ -1191,6 +1192,14 @@
               </a:rPr>
               <a:t>01 / SYSTEM VIEW</a:t>
             </a:r>
+            <a:endParaRPr lang="en-US" sz="900" b="1" spc="120" dirty="0">
+              <a:solidFill>
+                <a:srgbClr val="52765A"/>
+              </a:solidFill>
+              <a:latin typeface="+mn-lt"/>
+              <a:ea typeface="+mn-ea"/>
+              <a:cs typeface="+mn-cs"/>
+            </a:endParaRPr>
           </a:p>
         </p:txBody>
       </p:sp>
@@ -1231,6 +1240,14 @@
               </a:rPr>
               <a:t>A closed-loop VR teleoperation stack</a:t>
             </a:r>
+            <a:endParaRPr lang="en-US" sz="2250" b="1" dirty="0">
+              <a:solidFill>
+                <a:srgbClr val="1D2B24"/>
+              </a:solidFill>
+              <a:latin typeface="+mn-lt"/>
+              <a:ea typeface="+mn-ea"/>
+              <a:cs typeface="+mn-cs"/>
+            </a:endParaRPr>
           </a:p>
         </p:txBody>
       </p:sp>
@@ -1271,6 +1288,14 @@
               </a:rPr>
               <a:t>One control loop connects tracked human motion, constrained planning, robot execution, and visual feedback.</a:t>
             </a:r>
+            <a:endParaRPr lang="en-US" sz="1200" dirty="0">
+              <a:solidFill>
+                <a:srgbClr val="657269"/>
+              </a:solidFill>
+              <a:latin typeface="+mn-lt"/>
+              <a:ea typeface="+mn-ea"/>
+              <a:cs typeface="+mn-cs"/>
+            </a:endParaRPr>
           </a:p>
         </p:txBody>
       </p:sp>
@@ -1354,6 +1379,14 @@
               </a:rPr>
               <a:t>DEXMAN_LEROBOT / VR TELEOPERATION SYSTEM</a:t>
             </a:r>
+            <a:endParaRPr lang="en-US" sz="750" b="1" spc="60" dirty="0">
+              <a:solidFill>
+                <a:srgbClr val="657269"/>
+              </a:solidFill>
+              <a:latin typeface="+mn-lt"/>
+              <a:ea typeface="+mn-ea"/>
+              <a:cs typeface="+mn-cs"/>
+            </a:endParaRPr>
           </a:p>
         </p:txBody>
       </p:sp>
@@ -1394,18 +1427,20 @@
               </a:rPr>
               <a:t>01 / 10</a:t>
             </a:r>
+            <a:endParaRPr lang="en-US" sz="750" b="1" dirty="0">
+              <a:solidFill>
+                <a:srgbClr val="657269"/>
+              </a:solidFill>
+              <a:latin typeface="+mn-lt"/>
+              <a:ea typeface="+mn-ea"/>
+              <a:cs typeface="+mn-cs"/>
+            </a:endParaRPr>
           </a:p>
         </p:txBody>
       </p:sp>
       <p:grpSp>
         <p:nvGrpSpPr>
-          <p:cNvPr id="63" name="组合 62">
-            <a:extLst>
-              <a:ext uri="{FF2B5EF4-FFF2-40B4-BE49-F238E27FC236}">
-                <a16:creationId xmlns:a16="http://schemas.microsoft.com/office/drawing/2014/main" id="{3D2D7096-4C10-FCDC-EB39-D926D9607E0D}"/>
-              </a:ext>
-            </a:extLst>
-          </p:cNvPr>
+          <p:cNvPr id="63" name="组合 62"/>
           <p:cNvGrpSpPr/>
           <p:nvPr/>
         </p:nvGrpSpPr>
@@ -1485,19 +1520,21 @@
                 </a:rPr>
                 <a:t>INPUT LAYER</a:t>
               </a:r>
+              <a:endParaRPr lang="en-US" sz="900" b="1" dirty="0">
+                <a:solidFill>
+                  <a:srgbClr val="52765A"/>
+                </a:solidFill>
+                <a:latin typeface="+mn-lt"/>
+                <a:ea typeface="+mn-ea"/>
+                <a:cs typeface="+mn-cs"/>
+              </a:endParaRPr>
             </a:p>
           </p:txBody>
         </p:sp>
       </p:grpSp>
       <p:grpSp>
         <p:nvGrpSpPr>
-          <p:cNvPr id="62" name="组合 61">
-            <a:extLst>
-              <a:ext uri="{FF2B5EF4-FFF2-40B4-BE49-F238E27FC236}">
-                <a16:creationId xmlns:a16="http://schemas.microsoft.com/office/drawing/2014/main" id="{CBF8AC89-7418-A3EC-E091-912E93D7D365}"/>
-              </a:ext>
-            </a:extLst>
-          </p:cNvPr>
+          <p:cNvPr id="62" name="组合 61"/>
           <p:cNvGrpSpPr/>
           <p:nvPr/>
         </p:nvGrpSpPr>
@@ -1577,19 +1614,21 @@
                 </a:rPr>
                 <a:t>CONTROL LAYER</a:t>
               </a:r>
+              <a:endParaRPr lang="en-US" sz="900" b="1" dirty="0">
+                <a:solidFill>
+                  <a:srgbClr val="52765A"/>
+                </a:solidFill>
+                <a:latin typeface="+mn-lt"/>
+                <a:ea typeface="+mn-ea"/>
+                <a:cs typeface="+mn-cs"/>
+              </a:endParaRPr>
             </a:p>
           </p:txBody>
         </p:sp>
       </p:grpSp>
       <p:grpSp>
         <p:nvGrpSpPr>
-          <p:cNvPr id="61" name="组合 60">
-            <a:extLst>
-              <a:ext uri="{FF2B5EF4-FFF2-40B4-BE49-F238E27FC236}">
-                <a16:creationId xmlns:a16="http://schemas.microsoft.com/office/drawing/2014/main" id="{504BC501-9B51-3160-3FA6-C504BF738946}"/>
-              </a:ext>
-            </a:extLst>
-          </p:cNvPr>
+          <p:cNvPr id="61" name="组合 60"/>
           <p:cNvGrpSpPr/>
           <p:nvPr/>
         </p:nvGrpSpPr>
@@ -1669,19 +1708,21 @@
                 </a:rPr>
                 <a:t>EXECUTION LAYER</a:t>
               </a:r>
+              <a:endParaRPr lang="en-US" sz="900" b="1" dirty="0">
+                <a:solidFill>
+                  <a:srgbClr val="52765A"/>
+                </a:solidFill>
+                <a:latin typeface="+mn-lt"/>
+                <a:ea typeface="+mn-ea"/>
+                <a:cs typeface="+mn-cs"/>
+              </a:endParaRPr>
             </a:p>
           </p:txBody>
         </p:sp>
       </p:grpSp>
       <p:grpSp>
         <p:nvGrpSpPr>
-          <p:cNvPr id="58" name="组合 57">
-            <a:extLst>
-              <a:ext uri="{FF2B5EF4-FFF2-40B4-BE49-F238E27FC236}">
-                <a16:creationId xmlns:a16="http://schemas.microsoft.com/office/drawing/2014/main" id="{83089102-EFD3-1F46-AC98-6DA5A665501F}"/>
-              </a:ext>
-            </a:extLst>
-          </p:cNvPr>
+          <p:cNvPr id="58" name="组合 57"/>
           <p:cNvGrpSpPr/>
           <p:nvPr/>
         </p:nvGrpSpPr>
@@ -1794,6 +1835,14 @@
                 </a:rPr>
                 <a:t>Quest / WebXR</a:t>
               </a:r>
+              <a:endParaRPr lang="en-US" sz="1200" b="1" dirty="0">
+                <a:solidFill>
+                  <a:srgbClr val="1D2B24"/>
+                </a:solidFill>
+                <a:latin typeface="+mn-lt"/>
+                <a:ea typeface="+mn-ea"/>
+                <a:cs typeface="+mn-cs"/>
+              </a:endParaRPr>
             </a:p>
           </p:txBody>
         </p:sp>
@@ -1863,6 +1912,14 @@
                 </a:rPr>
                 <a:t>25-joint hand tracking</a:t>
               </a:r>
+              <a:endParaRPr lang="en-US" sz="1050" dirty="0">
+                <a:solidFill>
+                  <a:srgbClr val="657269"/>
+                </a:solidFill>
+                <a:latin typeface="+mn-lt"/>
+                <a:ea typeface="+mn-ea"/>
+                <a:cs typeface="+mn-cs"/>
+              </a:endParaRPr>
             </a:p>
           </p:txBody>
         </p:sp>
@@ -1932,6 +1989,14 @@
                 </a:rPr>
                 <a:t>Wrist pose + grip / buttons</a:t>
               </a:r>
+              <a:endParaRPr lang="en-US" sz="1050" dirty="0">
+                <a:solidFill>
+                  <a:srgbClr val="657269"/>
+                </a:solidFill>
+                <a:latin typeface="+mn-lt"/>
+                <a:ea typeface="+mn-ea"/>
+                <a:cs typeface="+mn-cs"/>
+              </a:endParaRPr>
             </a:p>
           </p:txBody>
         </p:sp>
@@ -2001,6 +2066,14 @@
                 </a:rPr>
                 <a:t>HTTPS + WSS over LAN</a:t>
               </a:r>
+              <a:endParaRPr lang="en-US" sz="1050" dirty="0">
+                <a:solidFill>
+                  <a:srgbClr val="657269"/>
+                </a:solidFill>
+                <a:latin typeface="+mn-lt"/>
+                <a:ea typeface="+mn-ea"/>
+                <a:cs typeface="+mn-cs"/>
+              </a:endParaRPr>
             </a:p>
           </p:txBody>
         </p:sp>
@@ -2133,18 +2206,20 @@
               </a:rPr>
               <a:t>FEEDBACK LOOP</a:t>
             </a:r>
+            <a:endParaRPr lang="en-US" sz="900" b="1" spc="105" dirty="0">
+              <a:solidFill>
+                <a:srgbClr val="52765A"/>
+              </a:solidFill>
+              <a:latin typeface="+mn-lt"/>
+              <a:ea typeface="+mn-ea"/>
+              <a:cs typeface="+mn-cs"/>
+            </a:endParaRPr>
           </a:p>
         </p:txBody>
       </p:sp>
       <p:grpSp>
         <p:nvGrpSpPr>
-          <p:cNvPr id="64" name="组合 63">
-            <a:extLst>
-              <a:ext uri="{FF2B5EF4-FFF2-40B4-BE49-F238E27FC236}">
-                <a16:creationId xmlns:a16="http://schemas.microsoft.com/office/drawing/2014/main" id="{BDB07550-8AF1-8C1D-0BA0-80DC8FD5F679}"/>
-              </a:ext>
-            </a:extLst>
-          </p:cNvPr>
+          <p:cNvPr id="64" name="组合 63"/>
           <p:cNvGrpSpPr/>
           <p:nvPr/>
         </p:nvGrpSpPr>
@@ -2226,19 +2301,21 @@
                 </a:rPr>
                 <a:t>JPEG / WebRTC camera stream</a:t>
               </a:r>
+              <a:endParaRPr lang="en-US" sz="1120" b="1" dirty="0">
+                <a:solidFill>
+                  <a:srgbClr val="1D2B24"/>
+                </a:solidFill>
+                <a:latin typeface="+mn-lt"/>
+                <a:ea typeface="+mn-ea"/>
+                <a:cs typeface="+mn-cs"/>
+              </a:endParaRPr>
             </a:p>
           </p:txBody>
         </p:sp>
       </p:grpSp>
       <p:grpSp>
         <p:nvGrpSpPr>
-          <p:cNvPr id="65" name="组合 64">
-            <a:extLst>
-              <a:ext uri="{FF2B5EF4-FFF2-40B4-BE49-F238E27FC236}">
-                <a16:creationId xmlns:a16="http://schemas.microsoft.com/office/drawing/2014/main" id="{26605BAA-7F8A-660A-B273-30E04898087F}"/>
-              </a:ext>
-            </a:extLst>
-          </p:cNvPr>
+          <p:cNvPr id="65" name="组合 64"/>
           <p:cNvGrpSpPr/>
           <p:nvPr/>
         </p:nvGrpSpPr>
@@ -2320,19 +2397,21 @@
                 </a:rPr>
                 <a:t>Robot state + diagnostics</a:t>
               </a:r>
+              <a:endParaRPr lang="en-US" sz="1120" b="1" dirty="0">
+                <a:solidFill>
+                  <a:srgbClr val="1D2B24"/>
+                </a:solidFill>
+                <a:latin typeface="+mn-lt"/>
+                <a:ea typeface="+mn-ea"/>
+                <a:cs typeface="+mn-cs"/>
+              </a:endParaRPr>
             </a:p>
           </p:txBody>
         </p:sp>
       </p:grpSp>
       <p:grpSp>
         <p:nvGrpSpPr>
-          <p:cNvPr id="66" name="组合 65">
-            <a:extLst>
-              <a:ext uri="{FF2B5EF4-FFF2-40B4-BE49-F238E27FC236}">
-                <a16:creationId xmlns:a16="http://schemas.microsoft.com/office/drawing/2014/main" id="{90010298-3912-D05A-90B5-884227A39FF8}"/>
-              </a:ext>
-            </a:extLst>
-          </p:cNvPr>
+          <p:cNvPr id="66" name="组合 65"/>
           <p:cNvGrpSpPr/>
           <p:nvPr/>
         </p:nvGrpSpPr>
@@ -2414,6 +2493,14 @@
                 </a:rPr>
                 <a:t>VR status + safety color</a:t>
               </a:r>
+              <a:endParaRPr lang="en-US" sz="1120" b="1" dirty="0">
+                <a:solidFill>
+                  <a:srgbClr val="1D2B24"/>
+                </a:solidFill>
+                <a:latin typeface="+mn-lt"/>
+                <a:ea typeface="+mn-ea"/>
+                <a:cs typeface="+mn-cs"/>
+              </a:endParaRPr>
             </a:p>
           </p:txBody>
         </p:sp>
@@ -2455,18 +2542,20 @@
               </a:rPr>
               <a:t>The same front end drives MuJoCo simulation or selected real hardware.</a:t>
             </a:r>
+            <a:endParaRPr lang="en-US" sz="1200" b="1" dirty="0">
+              <a:solidFill>
+                <a:srgbClr val="1D2B24"/>
+              </a:solidFill>
+              <a:latin typeface="+mn-lt"/>
+              <a:ea typeface="+mn-ea"/>
+              <a:cs typeface="+mn-cs"/>
+            </a:endParaRPr>
           </a:p>
         </p:txBody>
       </p:sp>
       <p:grpSp>
         <p:nvGrpSpPr>
-          <p:cNvPr id="59" name="组合 58">
-            <a:extLst>
-              <a:ext uri="{FF2B5EF4-FFF2-40B4-BE49-F238E27FC236}">
-                <a16:creationId xmlns:a16="http://schemas.microsoft.com/office/drawing/2014/main" id="{41633C10-6E12-1806-F20F-B3AF3884C62F}"/>
-              </a:ext>
-            </a:extLst>
-          </p:cNvPr>
+          <p:cNvPr id="59" name="组合 58"/>
           <p:cNvGrpSpPr/>
           <p:nvPr/>
         </p:nvGrpSpPr>
@@ -2548,6 +2637,14 @@
                 </a:rPr>
                 <a:t>Control PC</a:t>
               </a:r>
+              <a:endParaRPr lang="en-US" sz="1200" b="1" dirty="0">
+                <a:solidFill>
+                  <a:srgbClr val="1D2B24"/>
+                </a:solidFill>
+                <a:latin typeface="+mn-lt"/>
+                <a:ea typeface="+mn-ea"/>
+                <a:cs typeface="+mn-cs"/>
+              </a:endParaRPr>
             </a:p>
           </p:txBody>
         </p:sp>
@@ -2617,6 +2714,14 @@
                 </a:rPr>
                 <a:t>QuestBimanual + clutch mapping</a:t>
               </a:r>
+              <a:endParaRPr lang="en-US" sz="1050" dirty="0">
+                <a:solidFill>
+                  <a:srgbClr val="657269"/>
+                </a:solidFill>
+                <a:latin typeface="+mn-lt"/>
+                <a:ea typeface="+mn-ea"/>
+                <a:cs typeface="+mn-cs"/>
+              </a:endParaRPr>
             </a:p>
           </p:txBody>
         </p:sp>
@@ -2686,6 +2791,14 @@
                 </a:rPr>
                 <a:t>Mink IK + safety constraints</a:t>
               </a:r>
+              <a:endParaRPr lang="en-US" sz="1050" dirty="0">
+                <a:solidFill>
+                  <a:srgbClr val="657269"/>
+                </a:solidFill>
+                <a:latin typeface="+mn-lt"/>
+                <a:ea typeface="+mn-ea"/>
+                <a:cs typeface="+mn-cs"/>
+              </a:endParaRPr>
             </a:p>
           </p:txBody>
         </p:sp>
@@ -2755,18 +2868,20 @@
                 </a:rPr>
                 <a:t>200 ms watchdog + state machine</a:t>
               </a:r>
+              <a:endParaRPr lang="en-US" sz="1050" dirty="0">
+                <a:solidFill>
+                  <a:srgbClr val="657269"/>
+                </a:solidFill>
+                <a:latin typeface="+mn-lt"/>
+                <a:ea typeface="+mn-ea"/>
+                <a:cs typeface="+mn-cs"/>
+              </a:endParaRPr>
             </a:p>
           </p:txBody>
         </p:sp>
         <p:sp>
           <p:nvSpPr>
-            <p:cNvPr id="54" name="Rectangle 15">
-              <a:extLst>
-                <a:ext uri="{FF2B5EF4-FFF2-40B4-BE49-F238E27FC236}">
-                  <a16:creationId xmlns:a16="http://schemas.microsoft.com/office/drawing/2014/main" id="{0F2D6130-2BC2-6D21-8819-079058A29405}"/>
-                </a:ext>
-              </a:extLst>
-            </p:cNvPr>
+            <p:cNvPr id="54" name="Rectangle 15"/>
             <p:cNvSpPr/>
             <p:nvPr/>
           </p:nvSpPr>
@@ -2798,13 +2913,7 @@
       </p:grpSp>
       <p:grpSp>
         <p:nvGrpSpPr>
-          <p:cNvPr id="60" name="组合 59">
-            <a:extLst>
-              <a:ext uri="{FF2B5EF4-FFF2-40B4-BE49-F238E27FC236}">
-                <a16:creationId xmlns:a16="http://schemas.microsoft.com/office/drawing/2014/main" id="{ED51C4AE-3E21-C60C-96F9-0BD875F097F5}"/>
-              </a:ext>
-            </a:extLst>
-          </p:cNvPr>
+          <p:cNvPr id="60" name="组合 59"/>
           <p:cNvGrpSpPr/>
           <p:nvPr/>
         </p:nvGrpSpPr>
@@ -2886,6 +2995,14 @@
                 </a:rPr>
                 <a:t>Robot &amp; hand</a:t>
               </a:r>
+              <a:endParaRPr lang="en-US" sz="1200" b="1" dirty="0">
+                <a:solidFill>
+                  <a:srgbClr val="1D2B24"/>
+                </a:solidFill>
+                <a:latin typeface="+mn-lt"/>
+                <a:ea typeface="+mn-ea"/>
+                <a:cs typeface="+mn-cs"/>
+              </a:endParaRPr>
             </a:p>
           </p:txBody>
         </p:sp>
@@ -2955,6 +3072,14 @@
                 </a:rPr>
                 <a:t>Diana SDK servoJ_ex</a:t>
               </a:r>
+              <a:endParaRPr lang="en-US" sz="1050" dirty="0">
+                <a:solidFill>
+                  <a:srgbClr val="657269"/>
+                </a:solidFill>
+                <a:latin typeface="+mn-lt"/>
+                <a:ea typeface="+mn-ea"/>
+                <a:cs typeface="+mn-cs"/>
+              </a:endParaRPr>
             </a:p>
           </p:txBody>
         </p:sp>
@@ -3024,6 +3149,14 @@
                 </a:rPr>
                 <a:t>DexH13 native bridge</a:t>
               </a:r>
+              <a:endParaRPr lang="en-US" sz="1050" dirty="0">
+                <a:solidFill>
+                  <a:srgbClr val="657269"/>
+                </a:solidFill>
+                <a:latin typeface="+mn-lt"/>
+                <a:ea typeface="+mn-ea"/>
+                <a:cs typeface="+mn-cs"/>
+              </a:endParaRPr>
             </a:p>
           </p:txBody>
         </p:sp>
@@ -3093,18 +3226,20 @@
                 </a:rPr>
                 <a:t>Position / Cartesian impedance</a:t>
               </a:r>
+              <a:endParaRPr lang="en-US" sz="1050" dirty="0">
+                <a:solidFill>
+                  <a:srgbClr val="657269"/>
+                </a:solidFill>
+                <a:latin typeface="+mn-lt"/>
+                <a:ea typeface="+mn-ea"/>
+                <a:cs typeface="+mn-cs"/>
+              </a:endParaRPr>
             </a:p>
           </p:txBody>
         </p:sp>
         <p:sp>
           <p:nvSpPr>
-            <p:cNvPr id="55" name="Rectangle 15">
-              <a:extLst>
-                <a:ext uri="{FF2B5EF4-FFF2-40B4-BE49-F238E27FC236}">
-                  <a16:creationId xmlns:a16="http://schemas.microsoft.com/office/drawing/2014/main" id="{F26FFDAD-EAFA-13C9-E6C1-9035C4327B83}"/>
-                </a:ext>
-              </a:extLst>
-            </p:cNvPr>
+            <p:cNvPr id="55" name="Rectangle 15"/>
             <p:cNvSpPr/>
             <p:nvPr/>
           </p:nvSpPr>
@@ -3136,13 +3271,7 @@
       </p:grpSp>
       <p:sp>
         <p:nvSpPr>
-          <p:cNvPr id="67" name="Line 42">
-            <a:extLst>
-              <a:ext uri="{FF2B5EF4-FFF2-40B4-BE49-F238E27FC236}">
-                <a16:creationId xmlns:a16="http://schemas.microsoft.com/office/drawing/2014/main" id="{71E90202-EDBA-AF8D-E2FA-E28C76B876FB}"/>
-              </a:ext>
-            </a:extLst>
-          </p:cNvPr>
+          <p:cNvPr id="67" name="Line 42"/>
           <p:cNvSpPr/>
           <p:nvPr/>
         </p:nvSpPr>
@@ -3172,21 +3301,17 @@
       </p:sp>
     </p:spTree>
   </p:cSld>
-  <p:transition xmlns:p="http://schemas.openxmlformats.org/presentationml/2006/main" spd="slow">
-    <p:fade/>
-  </p:transition>
   <p:clrMapOvr>
     <a:masterClrMapping/>
   </p:clrMapOvr>
-  <mc:AlternateContent xmlns:mc="http://schemas.openxmlformats.org/markup-compatibility/2006">
-    <mc:Choice xmlns:p14="http://schemas.microsoft.com/office/powerpoint/2010/main" Requires="p14"/>
-    <mc:Fallback/>
-  </mc:AlternateContent>
+  <p:transition spd="slow">
+    <p:fade/>
+  </p:transition>
 </p:sld>
 </file>
 
 <file path=ppt/slides/slide10.xml><?xml version="1.0" encoding="utf-8"?>
-<p:sld xmlns:a="http://schemas.openxmlformats.org/drawingml/2006/main" xmlns:p="http://schemas.openxmlformats.org/presentationml/2006/main" xmlns:r="http://schemas.openxmlformats.org/officeDocument/2006/relationships">
+<p:sld xmlns:a="http://schemas.openxmlformats.org/drawingml/2006/main" xmlns:r="http://schemas.openxmlformats.org/officeDocument/2006/relationships" xmlns:p="http://schemas.openxmlformats.org/presentationml/2006/main">
   <p:cSld>
     <p:bg>
       <p:bgPr>
@@ -3220,7 +3345,7 @@
           <a:noFill/>
         </p:spPr>
         <p:txBody>
-          <a:bodyPr wrap="square" lIns="0" rIns="0" tIns="0" bIns="0" anchor="t">
+          <a:bodyPr wrap="square" lIns="0" tIns="0" rIns="0" bIns="0" anchor="t">
             <a:spAutoFit/>
           </a:bodyPr>
           <a:lstStyle/>
@@ -3238,12 +3363,20 @@
                 <a:solidFill>
                   <a:srgbClr val="52765A"/>
                 </a:solidFill>
-                <a:latin typeface="Arial"/>
-                <a:ea typeface="Arial"/>
-                <a:cs typeface="Arial"/>
+                <a:latin typeface="Arial" panose="020B0604020202090204"/>
+                <a:ea typeface="Arial" panose="020B0604020202090204"/>
+                <a:cs typeface="Arial" panose="020B0604020202090204"/>
               </a:rPr>
               <a:t>10 / REPOSITORY PRACTICE</a:t>
             </a:r>
+            <a:endParaRPr sz="900" b="1" i="0">
+              <a:solidFill>
+                <a:srgbClr val="52765A"/>
+              </a:solidFill>
+              <a:latin typeface="Arial" panose="020B0604020202090204"/>
+              <a:ea typeface="Arial" panose="020B0604020202090204"/>
+              <a:cs typeface="Arial" panose="020B0604020202090204"/>
+            </a:endParaRPr>
           </a:p>
         </p:txBody>
       </p:sp>
@@ -3264,7 +3397,7 @@
           <a:noFill/>
         </p:spPr>
         <p:txBody>
-          <a:bodyPr wrap="square" lIns="0" rIns="0" tIns="0" bIns="0" anchor="t">
+          <a:bodyPr wrap="square" lIns="0" tIns="0" rIns="0" bIns="0" anchor="t">
             <a:spAutoFit/>
           </a:bodyPr>
           <a:lstStyle/>
@@ -3282,12 +3415,20 @@
                 <a:solidFill>
                   <a:srgbClr val="1D2B24"/>
                 </a:solidFill>
-                <a:latin typeface="Arial"/>
-                <a:ea typeface="Arial"/>
-                <a:cs typeface="Arial"/>
+                <a:latin typeface="Arial" panose="020B0604020202090204"/>
+                <a:ea typeface="Arial" panose="020B0604020202090204"/>
+                <a:cs typeface="Arial" panose="020B0604020202090204"/>
               </a:rPr>
               <a:t>Start with the ZIP, then follow the README exercises</a:t>
             </a:r>
+            <a:endParaRPr sz="2250" b="1" i="0">
+              <a:solidFill>
+                <a:srgbClr val="1D2B24"/>
+              </a:solidFill>
+              <a:latin typeface="Arial" panose="020B0604020202090204"/>
+              <a:ea typeface="Arial" panose="020B0604020202090204"/>
+              <a:cs typeface="Arial" panose="020B0604020202090204"/>
+            </a:endParaRPr>
           </a:p>
         </p:txBody>
       </p:sp>
@@ -3308,7 +3449,7 @@
           <a:noFill/>
         </p:spPr>
         <p:txBody>
-          <a:bodyPr wrap="square" lIns="0" rIns="0" tIns="0" bIns="0" anchor="t">
+          <a:bodyPr wrap="square" lIns="0" tIns="0" rIns="0" bIns="0" anchor="t">
             <a:spAutoFit/>
           </a:bodyPr>
           <a:lstStyle/>
@@ -3326,12 +3467,20 @@
                 <a:solidFill>
                   <a:srgbClr val="657269"/>
                 </a:solidFill>
-                <a:latin typeface="Arial"/>
-                <a:ea typeface="Arial"/>
-                <a:cs typeface="Arial"/>
+                <a:latin typeface="Arial" panose="020B0604020202090204"/>
+                <a:ea typeface="Arial" panose="020B0604020202090204"/>
+                <a:cs typeface="Arial" panose="020B0604020202090204"/>
               </a:rPr>
               <a:t>Use the command-line workflow in lab3/tactile_analysis. A ZIP can be analyzed directly; HDF5 is optional.</a:t>
             </a:r>
+            <a:endParaRPr sz="1200" b="0" i="0">
+              <a:solidFill>
+                <a:srgbClr val="657269"/>
+              </a:solidFill>
+              <a:latin typeface="Arial" panose="020B0604020202090204"/>
+              <a:ea typeface="Arial" panose="020B0604020202090204"/>
+              <a:cs typeface="Arial" panose="020B0604020202090204"/>
+            </a:endParaRPr>
           </a:p>
         </p:txBody>
       </p:sp>
@@ -3387,7 +3536,7 @@
           <a:noFill/>
         </p:spPr>
         <p:txBody>
-          <a:bodyPr wrap="square" lIns="0" rIns="0" tIns="0" bIns="0" anchor="t">
+          <a:bodyPr wrap="square" lIns="0" tIns="0" rIns="0" bIns="0" anchor="t">
             <a:spAutoFit/>
           </a:bodyPr>
           <a:lstStyle/>
@@ -3405,12 +3554,20 @@
                 <a:solidFill>
                   <a:srgbClr val="657269"/>
                 </a:solidFill>
-                <a:latin typeface="Arial"/>
-                <a:ea typeface="Arial"/>
-                <a:cs typeface="Arial"/>
+                <a:latin typeface="Arial" panose="020B0604020202090204"/>
+                <a:ea typeface="Arial" panose="020B0604020202090204"/>
+                <a:cs typeface="Arial" panose="020B0604020202090204"/>
               </a:rPr>
               <a:t>DEXMAN_LEROBOT / VR TELEOPERATION SYSTEM</a:t>
             </a:r>
+            <a:endParaRPr sz="750" b="1" i="0">
+              <a:solidFill>
+                <a:srgbClr val="657269"/>
+              </a:solidFill>
+              <a:latin typeface="Arial" panose="020B0604020202090204"/>
+              <a:ea typeface="Arial" panose="020B0604020202090204"/>
+              <a:cs typeface="Arial" panose="020B0604020202090204"/>
+            </a:endParaRPr>
           </a:p>
         </p:txBody>
       </p:sp>
@@ -3431,7 +3588,7 @@
           <a:noFill/>
         </p:spPr>
         <p:txBody>
-          <a:bodyPr wrap="square" lIns="0" rIns="0" tIns="0" bIns="0" anchor="t">
+          <a:bodyPr wrap="square" lIns="0" tIns="0" rIns="0" bIns="0" anchor="t">
             <a:spAutoFit/>
           </a:bodyPr>
           <a:lstStyle/>
@@ -3449,12 +3606,20 @@
                 <a:solidFill>
                   <a:srgbClr val="657269"/>
                 </a:solidFill>
-                <a:latin typeface="Arial"/>
-                <a:ea typeface="Arial"/>
-                <a:cs typeface="Arial"/>
+                <a:latin typeface="Arial" panose="020B0604020202090204"/>
+                <a:ea typeface="Arial" panose="020B0604020202090204"/>
+                <a:cs typeface="Arial" panose="020B0604020202090204"/>
               </a:rPr>
               <a:t>10 / 10</a:t>
             </a:r>
+            <a:endParaRPr sz="750" b="1" i="0">
+              <a:solidFill>
+                <a:srgbClr val="657269"/>
+              </a:solidFill>
+              <a:latin typeface="Arial" panose="020B0604020202090204"/>
+              <a:ea typeface="Arial" panose="020B0604020202090204"/>
+              <a:cs typeface="Arial" panose="020B0604020202090204"/>
+            </a:endParaRPr>
           </a:p>
         </p:txBody>
       </p:sp>
@@ -3475,7 +3640,7 @@
           <a:noFill/>
         </p:spPr>
         <p:txBody>
-          <a:bodyPr wrap="square" lIns="0" rIns="0" tIns="0" bIns="0" anchor="t">
+          <a:bodyPr wrap="square" lIns="0" tIns="0" rIns="0" bIns="0" anchor="t">
             <a:spAutoFit/>
           </a:bodyPr>
           <a:lstStyle/>
@@ -3493,12 +3658,20 @@
                 <a:solidFill>
                   <a:srgbClr val="52765A"/>
                 </a:solidFill>
-                <a:latin typeface="Arial"/>
-                <a:ea typeface="Arial"/>
-                <a:cs typeface="Arial"/>
+                <a:latin typeface="Arial" panose="020B0604020202090204"/>
+                <a:ea typeface="Arial" panose="020B0604020202090204"/>
+                <a:cs typeface="Arial" panose="020B0604020202090204"/>
               </a:rPr>
               <a:t>RUN FROM THE REPOSITORY ROOT</a:t>
             </a:r>
+            <a:endParaRPr sz="1050" b="1" i="0">
+              <a:solidFill>
+                <a:srgbClr val="52765A"/>
+              </a:solidFill>
+              <a:latin typeface="Arial" panose="020B0604020202090204"/>
+              <a:ea typeface="Arial" panose="020B0604020202090204"/>
+              <a:cs typeface="Arial" panose="020B0604020202090204"/>
+            </a:endParaRPr>
           </a:p>
         </p:txBody>
       </p:sp>
@@ -3564,7 +3737,7 @@
           <a:noFill/>
         </p:spPr>
         <p:txBody>
-          <a:bodyPr wrap="square" lIns="0" rIns="0" tIns="0" bIns="0" anchor="t">
+          <a:bodyPr wrap="square" lIns="0" tIns="0" rIns="0" bIns="0" anchor="t">
             <a:spAutoFit/>
           </a:bodyPr>
           <a:lstStyle/>
@@ -3582,12 +3755,20 @@
                 <a:solidFill>
                   <a:srgbClr val="1D2B24"/>
                 </a:solidFill>
-                <a:latin typeface="Courier New"/>
-                <a:ea typeface="Courier New"/>
-                <a:cs typeface="Courier New"/>
+                <a:latin typeface="Courier New" panose="02070409020205090404"/>
+                <a:ea typeface="Courier New" panose="02070409020205090404"/>
+                <a:cs typeface="Courier New" panose="02070409020205090404"/>
               </a:rPr>
               <a:t>cd lab3/tactile_analysis</a:t>
             </a:r>
+            <a:endParaRPr sz="1050" b="0" i="0">
+              <a:solidFill>
+                <a:srgbClr val="1D2B24"/>
+              </a:solidFill>
+              <a:latin typeface="Courier New" panose="02070409020205090404"/>
+              <a:ea typeface="Courier New" panose="02070409020205090404"/>
+              <a:cs typeface="Courier New" panose="02070409020205090404"/>
+            </a:endParaRPr>
           </a:p>
           <a:p>
             <a:pPr algn="l">
@@ -3603,12 +3784,20 @@
                 <a:solidFill>
                   <a:srgbClr val="1D2B24"/>
                 </a:solidFill>
-                <a:latin typeface="Courier New"/>
-                <a:ea typeface="Courier New"/>
-                <a:cs typeface="Courier New"/>
+                <a:latin typeface="Courier New" panose="02070409020205090404"/>
+                <a:ea typeface="Courier New" panose="02070409020205090404"/>
+                <a:cs typeface="Courier New" panose="02070409020205090404"/>
               </a:rPr>
               <a:t>python examples/analyze_recording.py \</a:t>
             </a:r>
+            <a:endParaRPr sz="1050" b="0" i="0">
+              <a:solidFill>
+                <a:srgbClr val="1D2B24"/>
+              </a:solidFill>
+              <a:latin typeface="Courier New" panose="02070409020205090404"/>
+              <a:ea typeface="Courier New" panose="02070409020205090404"/>
+              <a:cs typeface="Courier New" panose="02070409020205090404"/>
+            </a:endParaRPr>
           </a:p>
           <a:p>
             <a:pPr algn="l">
@@ -3624,12 +3813,20 @@
                 <a:solidFill>
                   <a:srgbClr val="1D2B24"/>
                 </a:solidFill>
-                <a:latin typeface="Courier New"/>
-                <a:ea typeface="Courier New"/>
-                <a:cs typeface="Courier New"/>
+                <a:latin typeface="Courier New" panose="02070409020205090404"/>
+                <a:ea typeface="Courier New" panose="02070409020205090404"/>
+                <a:cs typeface="Courier New" panose="02070409020205090404"/>
               </a:rPr>
               <a:t>  "teleop_20261021T090120_798e4203.zip" \</a:t>
             </a:r>
+            <a:endParaRPr sz="1050" b="0" i="0">
+              <a:solidFill>
+                <a:srgbClr val="1D2B24"/>
+              </a:solidFill>
+              <a:latin typeface="Courier New" panose="02070409020205090404"/>
+              <a:ea typeface="Courier New" panose="02070409020205090404"/>
+              <a:cs typeface="Courier New" panose="02070409020205090404"/>
+            </a:endParaRPr>
           </a:p>
           <a:p>
             <a:pPr algn="l">
@@ -3645,12 +3842,20 @@
                 <a:solidFill>
                   <a:srgbClr val="1D2B24"/>
                 </a:solidFill>
-                <a:latin typeface="Courier New"/>
-                <a:ea typeface="Courier New"/>
-                <a:cs typeface="Courier New"/>
+                <a:latin typeface="Courier New" panose="02070409020205090404"/>
+                <a:ea typeface="Courier New" panose="02070409020205090404"/>
+                <a:cs typeface="Courier New" panose="02070409020205090404"/>
               </a:rPr>
               <a:t>  --trial all --allow-unverified \</a:t>
             </a:r>
+            <a:endParaRPr sz="1050" b="0" i="0">
+              <a:solidFill>
+                <a:srgbClr val="1D2B24"/>
+              </a:solidFill>
+              <a:latin typeface="Courier New" panose="02070409020205090404"/>
+              <a:ea typeface="Courier New" panose="02070409020205090404"/>
+              <a:cs typeface="Courier New" panose="02070409020205090404"/>
+            </a:endParaRPr>
           </a:p>
           <a:p>
             <a:pPr algn="l">
@@ -3666,12 +3871,20 @@
                 <a:solidFill>
                   <a:srgbClr val="1D2B24"/>
                 </a:solidFill>
-                <a:latin typeface="Courier New"/>
-                <a:ea typeface="Courier New"/>
-                <a:cs typeface="Courier New"/>
+                <a:latin typeface="Courier New" panose="02070409020205090404"/>
+                <a:ea typeface="Courier New" panose="02070409020205090404"/>
+                <a:cs typeface="Courier New" panose="02070409020205090404"/>
               </a:rPr>
               <a:t>  --contact-threshold 10 \</a:t>
             </a:r>
+            <a:endParaRPr sz="1050" b="0" i="0">
+              <a:solidFill>
+                <a:srgbClr val="1D2B24"/>
+              </a:solidFill>
+              <a:latin typeface="Courier New" panose="02070409020205090404"/>
+              <a:ea typeface="Courier New" panose="02070409020205090404"/>
+              <a:cs typeface="Courier New" panose="02070409020205090404"/>
+            </a:endParaRPr>
           </a:p>
           <a:p>
             <a:pPr algn="l">
@@ -3687,12 +3900,20 @@
                 <a:solidFill>
                   <a:srgbClr val="1D2B24"/>
                 </a:solidFill>
-                <a:latin typeface="Courier New"/>
-                <a:ea typeface="Courier New"/>
-                <a:cs typeface="Courier New"/>
+                <a:latin typeface="Courier New" panose="02070409020205090404"/>
+                <a:ea typeface="Courier New" panose="02070409020205090404"/>
+                <a:cs typeface="Courier New" panose="02070409020205090404"/>
               </a:rPr>
               <a:t>  --output-dir analysis_out/course_t10</a:t>
             </a:r>
+            <a:endParaRPr sz="1050" b="0" i="0">
+              <a:solidFill>
+                <a:srgbClr val="1D2B24"/>
+              </a:solidFill>
+              <a:latin typeface="Courier New" panose="02070409020205090404"/>
+              <a:ea typeface="Courier New" panose="02070409020205090404"/>
+              <a:cs typeface="Courier New" panose="02070409020205090404"/>
+            </a:endParaRPr>
           </a:p>
         </p:txBody>
       </p:sp>
@@ -3713,7 +3934,7 @@
           <a:noFill/>
         </p:spPr>
         <p:txBody>
-          <a:bodyPr wrap="square" lIns="0" rIns="0" tIns="0" bIns="0" anchor="t">
+          <a:bodyPr wrap="square" lIns="0" tIns="0" rIns="0" bIns="0" anchor="t">
             <a:spAutoFit/>
           </a:bodyPr>
           <a:lstStyle/>
@@ -3731,12 +3952,20 @@
                 <a:solidFill>
                   <a:srgbClr val="657269"/>
                 </a:solidFill>
-                <a:latin typeface="Arial"/>
-                <a:ea typeface="Arial"/>
-                <a:cs typeface="Arial"/>
+                <a:latin typeface="Arial" panose="020B0604020202090204"/>
+                <a:ea typeface="Arial" panose="020B0604020202090204"/>
+                <a:cs typeface="Arial" panose="020B0604020202090204"/>
               </a:rPr>
               <a:t>After installing dependencies and activating the environment (README §2).</a:t>
             </a:r>
+            <a:endParaRPr sz="1050" b="0" i="0">
+              <a:solidFill>
+                <a:srgbClr val="657269"/>
+              </a:solidFill>
+              <a:latin typeface="Arial" panose="020B0604020202090204"/>
+              <a:ea typeface="Arial" panose="020B0604020202090204"/>
+              <a:cs typeface="Arial" panose="020B0604020202090204"/>
+            </a:endParaRPr>
           </a:p>
           <a:p>
             <a:pPr algn="l">
@@ -3752,12 +3981,20 @@
                 <a:solidFill>
                   <a:srgbClr val="657269"/>
                 </a:solidFill>
-                <a:latin typeface="Arial"/>
-                <a:ea typeface="Arial"/>
-                <a:cs typeface="Arial"/>
+                <a:latin typeface="Arial" panose="020B0604020202090204"/>
+                <a:ea typeface="Arial" panose="020B0604020202090204"/>
+                <a:cs typeface="Arial" panose="020B0604020202090204"/>
               </a:rPr>
               <a:t>Replace the ZIP path if needed; choose a new output directory for each run.</a:t>
             </a:r>
+            <a:endParaRPr sz="1050" b="0" i="0">
+              <a:solidFill>
+                <a:srgbClr val="657269"/>
+              </a:solidFill>
+              <a:latin typeface="Arial" panose="020B0604020202090204"/>
+              <a:ea typeface="Arial" panose="020B0604020202090204"/>
+              <a:cs typeface="Arial" panose="020B0604020202090204"/>
+            </a:endParaRPr>
           </a:p>
         </p:txBody>
       </p:sp>
@@ -3778,7 +4015,7 @@
           <a:noFill/>
         </p:spPr>
         <p:txBody>
-          <a:bodyPr wrap="square" lIns="0" rIns="0" tIns="0" bIns="0" anchor="t">
+          <a:bodyPr wrap="square" lIns="0" tIns="0" rIns="0" bIns="0" anchor="t">
             <a:spAutoFit/>
           </a:bodyPr>
           <a:lstStyle/>
@@ -3796,12 +4033,20 @@
                 <a:solidFill>
                   <a:srgbClr val="52765A"/>
                 </a:solidFill>
-                <a:latin typeface="Arial"/>
-                <a:ea typeface="Arial"/>
-                <a:cs typeface="Arial"/>
+                <a:latin typeface="Arial" panose="020B0604020202090204"/>
+                <a:ea typeface="Arial" panose="020B0604020202090204"/>
+                <a:cs typeface="Arial" panose="020B0604020202090204"/>
               </a:rPr>
               <a:t>YOUR TASKS</a:t>
             </a:r>
+            <a:endParaRPr sz="1050" b="1" i="0">
+              <a:solidFill>
+                <a:srgbClr val="52765A"/>
+              </a:solidFill>
+              <a:latin typeface="Arial" panose="020B0604020202090204"/>
+              <a:ea typeface="Arial" panose="020B0604020202090204"/>
+              <a:cs typeface="Arial" panose="020B0604020202090204"/>
+            </a:endParaRPr>
           </a:p>
         </p:txBody>
       </p:sp>
@@ -3822,7 +4067,7 @@
           <a:noFill/>
         </p:spPr>
         <p:txBody>
-          <a:bodyPr wrap="square" lIns="0" rIns="0" tIns="0" bIns="0" anchor="t">
+          <a:bodyPr wrap="square" lIns="0" tIns="0" rIns="0" bIns="0" anchor="t">
             <a:spAutoFit/>
           </a:bodyPr>
           <a:lstStyle/>
@@ -3840,12 +4085,20 @@
                 <a:solidFill>
                   <a:srgbClr val="52765A"/>
                 </a:solidFill>
-                <a:latin typeface="Arial"/>
-                <a:ea typeface="Arial"/>
-                <a:cs typeface="Arial"/>
+                <a:latin typeface="Arial" panose="020B0604020202090204"/>
+                <a:ea typeface="Arial" panose="020B0604020202090204"/>
+                <a:cs typeface="Arial" panose="020B0604020202090204"/>
               </a:rPr>
               <a:t>1</a:t>
             </a:r>
+            <a:endParaRPr sz="1500" b="1" i="0">
+              <a:solidFill>
+                <a:srgbClr val="52765A"/>
+              </a:solidFill>
+              <a:latin typeface="Arial" panose="020B0604020202090204"/>
+              <a:ea typeface="Arial" panose="020B0604020202090204"/>
+              <a:cs typeface="Arial" panose="020B0604020202090204"/>
+            </a:endParaRPr>
           </a:p>
         </p:txBody>
       </p:sp>
@@ -3866,7 +4119,7 @@
           <a:noFill/>
         </p:spPr>
         <p:txBody>
-          <a:bodyPr wrap="square" lIns="0" rIns="0" tIns="0" bIns="0" anchor="t">
+          <a:bodyPr wrap="square" lIns="0" tIns="0" rIns="0" bIns="0" anchor="t">
             <a:spAutoFit/>
           </a:bodyPr>
           <a:lstStyle/>
@@ -3884,12 +4137,20 @@
                 <a:solidFill>
                   <a:srgbClr val="1D2B24"/>
                 </a:solidFill>
-                <a:latin typeface="Arial"/>
-                <a:ea typeface="Arial"/>
-                <a:cs typeface="Arial"/>
+                <a:latin typeface="Arial" panose="020B0604020202090204"/>
+                <a:ea typeface="Arial" panose="020B0604020202090204"/>
+                <a:cs typeface="Arial" panose="020B0604020202090204"/>
               </a:rPr>
               <a:t>Inspect validity and sampling quality</a:t>
             </a:r>
+            <a:endParaRPr sz="1120" b="1" i="0">
+              <a:solidFill>
+                <a:srgbClr val="1D2B24"/>
+              </a:solidFill>
+              <a:latin typeface="Arial" panose="020B0604020202090204"/>
+              <a:ea typeface="Arial" panose="020B0604020202090204"/>
+              <a:cs typeface="Arial" panose="020B0604020202090204"/>
+            </a:endParaRPr>
           </a:p>
         </p:txBody>
       </p:sp>
@@ -3910,7 +4171,7 @@
           <a:noFill/>
         </p:spPr>
         <p:txBody>
-          <a:bodyPr wrap="square" lIns="0" rIns="0" tIns="0" bIns="0" anchor="t">
+          <a:bodyPr wrap="square" lIns="0" tIns="0" rIns="0" bIns="0" anchor="t">
             <a:spAutoFit/>
           </a:bodyPr>
           <a:lstStyle/>
@@ -3928,12 +4189,20 @@
                 <a:solidFill>
                   <a:srgbClr val="657269"/>
                 </a:solidFill>
-                <a:latin typeface="Arial"/>
-                <a:ea typeface="Arial"/>
-                <a:cs typeface="Arial"/>
+                <a:latin typeface="Arial" panose="020B0604020202090204"/>
+                <a:ea typeface="Arial" panose="020B0604020202090204"/>
+                <a:cs typeface="Arial" panose="020B0604020202090204"/>
               </a:rPr>
               <a:t>README §3: --list-trials</a:t>
             </a:r>
+            <a:endParaRPr sz="1050" b="0" i="0">
+              <a:solidFill>
+                <a:srgbClr val="657269"/>
+              </a:solidFill>
+              <a:latin typeface="Arial" panose="020B0604020202090204"/>
+              <a:ea typeface="Arial" panose="020B0604020202090204"/>
+              <a:cs typeface="Arial" panose="020B0604020202090204"/>
+            </a:endParaRPr>
           </a:p>
         </p:txBody>
       </p:sp>
@@ -3954,7 +4223,7 @@
           <a:noFill/>
         </p:spPr>
         <p:txBody>
-          <a:bodyPr wrap="square" lIns="0" rIns="0" tIns="0" bIns="0" anchor="t">
+          <a:bodyPr wrap="square" lIns="0" tIns="0" rIns="0" bIns="0" anchor="t">
             <a:spAutoFit/>
           </a:bodyPr>
           <a:lstStyle/>
@@ -3972,12 +4241,20 @@
                 <a:solidFill>
                   <a:srgbClr val="52765A"/>
                 </a:solidFill>
-                <a:latin typeface="Arial"/>
-                <a:ea typeface="Arial"/>
-                <a:cs typeface="Arial"/>
+                <a:latin typeface="Arial" panose="020B0604020202090204"/>
+                <a:ea typeface="Arial" panose="020B0604020202090204"/>
+                <a:cs typeface="Arial" panose="020B0604020202090204"/>
               </a:rPr>
               <a:t>2</a:t>
             </a:r>
+            <a:endParaRPr sz="1500" b="1" i="0">
+              <a:solidFill>
+                <a:srgbClr val="52765A"/>
+              </a:solidFill>
+              <a:latin typeface="Arial" panose="020B0604020202090204"/>
+              <a:ea typeface="Arial" panose="020B0604020202090204"/>
+              <a:cs typeface="Arial" panose="020B0604020202090204"/>
+            </a:endParaRPr>
           </a:p>
         </p:txBody>
       </p:sp>
@@ -3998,7 +4275,7 @@
           <a:noFill/>
         </p:spPr>
         <p:txBody>
-          <a:bodyPr wrap="square" lIns="0" rIns="0" tIns="0" bIns="0" anchor="t">
+          <a:bodyPr wrap="square" lIns="0" tIns="0" rIns="0" bIns="0" anchor="t">
             <a:spAutoFit/>
           </a:bodyPr>
           <a:lstStyle/>
@@ -4016,12 +4293,20 @@
                 <a:solidFill>
                   <a:srgbClr val="1D2B24"/>
                 </a:solidFill>
-                <a:latin typeface="Arial"/>
-                <a:ea typeface="Arial"/>
-                <a:cs typeface="Arial"/>
+                <a:latin typeface="Arial" panose="020B0604020202090204"/>
+                <a:ea typeface="Arial" panose="020B0604020202090204"/>
+                <a:cs typeface="Arial" panose="020B0604020202090204"/>
               </a:rPr>
               <a:t>Read plots + JSON / CSV reports</a:t>
             </a:r>
+            <a:endParaRPr sz="1120" b="1" i="0">
+              <a:solidFill>
+                <a:srgbClr val="1D2B24"/>
+              </a:solidFill>
+              <a:latin typeface="Arial" panose="020B0604020202090204"/>
+              <a:ea typeface="Arial" panose="020B0604020202090204"/>
+              <a:cs typeface="Arial" panose="020B0604020202090204"/>
+            </a:endParaRPr>
           </a:p>
         </p:txBody>
       </p:sp>
@@ -4042,7 +4327,7 @@
           <a:noFill/>
         </p:spPr>
         <p:txBody>
-          <a:bodyPr wrap="square" lIns="0" rIns="0" tIns="0" bIns="0" anchor="t">
+          <a:bodyPr wrap="square" lIns="0" tIns="0" rIns="0" bIns="0" anchor="t">
             <a:spAutoFit/>
           </a:bodyPr>
           <a:lstStyle/>
@@ -4060,12 +4345,20 @@
                 <a:solidFill>
                   <a:srgbClr val="657269"/>
                 </a:solidFill>
-                <a:latin typeface="Arial"/>
-                <a:ea typeface="Arial"/>
-                <a:cs typeface="Arial"/>
+                <a:latin typeface="Arial" panose="020B0604020202090204"/>
+                <a:ea typeface="Arial" panose="020B0604020202090204"/>
+                <a:cs typeface="Arial" panose="020B0604020202090204"/>
               </a:rPr>
               <a:t>README §§5–6: compare 10 vs 20</a:t>
             </a:r>
+            <a:endParaRPr sz="1050" b="0" i="0">
+              <a:solidFill>
+                <a:srgbClr val="657269"/>
+              </a:solidFill>
+              <a:latin typeface="Arial" panose="020B0604020202090204"/>
+              <a:ea typeface="Arial" panose="020B0604020202090204"/>
+              <a:cs typeface="Arial" panose="020B0604020202090204"/>
+            </a:endParaRPr>
           </a:p>
         </p:txBody>
       </p:sp>
@@ -4086,7 +4379,7 @@
           <a:noFill/>
         </p:spPr>
         <p:txBody>
-          <a:bodyPr wrap="square" lIns="0" rIns="0" tIns="0" bIns="0" anchor="t">
+          <a:bodyPr wrap="square" lIns="0" tIns="0" rIns="0" bIns="0" anchor="t">
             <a:spAutoFit/>
           </a:bodyPr>
           <a:lstStyle/>
@@ -4104,12 +4397,20 @@
                 <a:solidFill>
                   <a:srgbClr val="52765A"/>
                 </a:solidFill>
-                <a:latin typeface="Arial"/>
-                <a:ea typeface="Arial"/>
-                <a:cs typeface="Arial"/>
+                <a:latin typeface="Arial" panose="020B0604020202090204"/>
+                <a:ea typeface="Arial" panose="020B0604020202090204"/>
+                <a:cs typeface="Arial" panose="020B0604020202090204"/>
               </a:rPr>
               <a:t>3</a:t>
             </a:r>
+            <a:endParaRPr sz="1500" b="1" i="0">
+              <a:solidFill>
+                <a:srgbClr val="52765A"/>
+              </a:solidFill>
+              <a:latin typeface="Arial" panose="020B0604020202090204"/>
+              <a:ea typeface="Arial" panose="020B0604020202090204"/>
+              <a:cs typeface="Arial" panose="020B0604020202090204"/>
+            </a:endParaRPr>
           </a:p>
         </p:txBody>
       </p:sp>
@@ -4130,7 +4431,7 @@
           <a:noFill/>
         </p:spPr>
         <p:txBody>
-          <a:bodyPr wrap="square" lIns="0" rIns="0" tIns="0" bIns="0" anchor="t">
+          <a:bodyPr wrap="square" lIns="0" tIns="0" rIns="0" bIns="0" anchor="t">
             <a:spAutoFit/>
           </a:bodyPr>
           <a:lstStyle/>
@@ -4148,12 +4449,20 @@
                 <a:solidFill>
                   <a:srgbClr val="1D2B24"/>
                 </a:solidFill>
-                <a:latin typeface="Arial"/>
-                <a:ea typeface="Arial"/>
-                <a:cs typeface="Arial"/>
+                <a:latin typeface="Arial" panose="020B0604020202090204"/>
+                <a:ea typeface="Arial" panose="020B0604020202090204"/>
+                <a:cs typeface="Arial" panose="020B0604020202090204"/>
               </a:rPr>
               <a:t>Run the synthetic area / pressure demo</a:t>
             </a:r>
+            <a:endParaRPr sz="1120" b="1" i="0">
+              <a:solidFill>
+                <a:srgbClr val="1D2B24"/>
+              </a:solidFill>
+              <a:latin typeface="Arial" panose="020B0604020202090204"/>
+              <a:ea typeface="Arial" panose="020B0604020202090204"/>
+              <a:cs typeface="Arial" panose="020B0604020202090204"/>
+            </a:endParaRPr>
           </a:p>
         </p:txBody>
       </p:sp>
@@ -4174,7 +4483,7 @@
           <a:noFill/>
         </p:spPr>
         <p:txBody>
-          <a:bodyPr wrap="square" lIns="0" rIns="0" tIns="0" bIns="0" anchor="t">
+          <a:bodyPr wrap="square" lIns="0" tIns="0" rIns="0" bIns="0" anchor="t">
             <a:spAutoFit/>
           </a:bodyPr>
           <a:lstStyle/>
@@ -4192,12 +4501,20 @@
                 <a:solidFill>
                   <a:srgbClr val="657269"/>
                 </a:solidFill>
-                <a:latin typeface="Arial"/>
-                <a:ea typeface="Arial"/>
-                <a:cs typeface="Arial"/>
+                <a:latin typeface="Arial" panose="020B0604020202090204"/>
+                <a:ea typeface="Arial" panose="020B0604020202090204"/>
+                <a:cs typeface="Arial" panose="020B0604020202090204"/>
               </a:rPr>
               <a:t>README §§7–9: formulas + calibration</a:t>
             </a:r>
+            <a:endParaRPr sz="1050" b="0" i="0">
+              <a:solidFill>
+                <a:srgbClr val="657269"/>
+              </a:solidFill>
+              <a:latin typeface="Arial" panose="020B0604020202090204"/>
+              <a:ea typeface="Arial" panose="020B0604020202090204"/>
+              <a:cs typeface="Arial" panose="020B0604020202090204"/>
+            </a:endParaRPr>
           </a:p>
         </p:txBody>
       </p:sp>
@@ -4263,7 +4580,7 @@
           <a:noFill/>
         </p:spPr>
         <p:txBody>
-          <a:bodyPr wrap="square" lIns="0" rIns="0" tIns="0" bIns="0" anchor="t">
+          <a:bodyPr wrap="square" lIns="0" tIns="0" rIns="0" bIns="0" anchor="t">
             <a:spAutoFit/>
           </a:bodyPr>
           <a:lstStyle/>
@@ -4281,12 +4598,20 @@
                 <a:solidFill>
                   <a:srgbClr val="52765A"/>
                 </a:solidFill>
-                <a:latin typeface="Arial"/>
-                <a:ea typeface="Arial"/>
-                <a:cs typeface="Arial"/>
+                <a:latin typeface="Arial" panose="020B0604020202090204"/>
+                <a:ea typeface="Arial" panose="020B0604020202090204"/>
+                <a:cs typeface="Arial" panose="020B0604020202090204"/>
               </a:rPr>
               <a:t>CONTINUE IN THE README</a:t>
             </a:r>
+            <a:endParaRPr sz="1050" b="1" i="0">
+              <a:solidFill>
+                <a:srgbClr val="52765A"/>
+              </a:solidFill>
+              <a:latin typeface="Arial" panose="020B0604020202090204"/>
+              <a:ea typeface="Arial" panose="020B0604020202090204"/>
+              <a:cs typeface="Arial" panose="020B0604020202090204"/>
+            </a:endParaRPr>
           </a:p>
         </p:txBody>
       </p:sp>
@@ -4307,7 +4632,7 @@
           <a:noFill/>
         </p:spPr>
         <p:txBody>
-          <a:bodyPr wrap="square" lIns="0" rIns="0" tIns="0" bIns="0" anchor="t">
+          <a:bodyPr wrap="square" lIns="0" tIns="0" rIns="0" bIns="0" anchor="t">
             <a:spAutoFit/>
           </a:bodyPr>
           <a:lstStyle/>
@@ -4325,23 +4650,89 @@
                 <a:solidFill>
                   <a:srgbClr val="1D2B24"/>
                 </a:solidFill>
-                <a:latin typeface="Arial"/>
-                <a:ea typeface="Arial"/>
-                <a:cs typeface="Arial"/>
+                <a:latin typeface="Arial" panose="020B0604020202090204"/>
+                <a:ea typeface="Arial" panose="020B0604020202090204"/>
+                <a:cs typeface="Arial" panose="020B0604020202090204"/>
               </a:rPr>
               <a:t>lab3/tactile_analysis/README.md  (Chinese)     |     README.en.md  (English)</a:t>
             </a:r>
+            <a:endParaRPr sz="1200" b="1" i="0">
+              <a:solidFill>
+                <a:srgbClr val="1D2B24"/>
+              </a:solidFill>
+              <a:latin typeface="Arial" panose="020B0604020202090204"/>
+              <a:ea typeface="Arial" panose="020B0604020202090204"/>
+              <a:cs typeface="Arial" panose="020B0604020202090204"/>
+            </a:endParaRPr>
+          </a:p>
+        </p:txBody>
+      </p:sp>
+      <p:sp>
+        <p:nvSpPr>
+          <p:cNvPr id="26" name="文本框 25"/>
+          <p:cNvSpPr txBox="1"/>
+          <p:nvPr/>
+        </p:nvSpPr>
+        <p:spPr>
+          <a:xfrm>
+            <a:off x="6580505" y="5205095"/>
+            <a:ext cx="6193155" cy="922020"/>
+          </a:xfrm>
+          <a:prstGeom prst="rect">
+            <a:avLst/>
+          </a:prstGeom>
+          <a:noFill/>
+        </p:spPr>
+        <p:txBody>
+          <a:bodyPr wrap="square" rtlCol="0">
+            <a:spAutoFit/>
+          </a:bodyPr>
+          <a:p>
+            <a:r>
+              <a:rPr altLang="zh-CN"/>
+              <a:t>Please clone the repository：</a:t>
+            </a:r>
+            <a:br>
+              <a:rPr altLang="zh-CN"/>
+            </a:br>
+            <a:r>
+              <a:rPr lang="en-US" altLang="zh-CN"/>
+              <a:t>https://github.com/TUSZ-AGDR/sztu-tactile-robotics/</a:t>
+            </a:r>
+            <a:br>
+              <a:rPr lang="en-US" altLang="zh-CN"/>
+            </a:br>
+            <a:r>
+              <a:rPr lang="en-US" altLang="zh-CN"/>
+              <a:t>Continue in </a:t>
+            </a:r>
+            <a:r>
+              <a:rPr lang="en-US" altLang="zh-CN" b="1">
+                <a:latin typeface="Arial" panose="020B0604020202090204" pitchFamily="34" charset="0"/>
+                <a:cs typeface="Arial" panose="020B0604020202090204" pitchFamily="34" charset="0"/>
+              </a:rPr>
+              <a:t>lab3/tactile_analysis</a:t>
+            </a:r>
+            <a:r>
+              <a:rPr lang="en-US" altLang="zh-CN"/>
+              <a:t> </a:t>
+            </a:r>
+            <a:r>
+              <a:rPr lang="en-US" altLang="zh-CN"/>
+              <a:t>Folder</a:t>
+            </a:r>
+            <a:endParaRPr lang="en-US" altLang="zh-CN"/>
           </a:p>
         </p:txBody>
       </p:sp>
     </p:spTree>
   </p:cSld>
-  <p:transition xmlns:p="http://schemas.openxmlformats.org/presentationml/2006/main" spd="slow">
-    <p:fade/>
-  </p:transition>
   <p:clrMapOvr>
     <a:masterClrMapping/>
   </p:clrMapOvr>
+  <p:transition spd="slow">
+    <p:fade/>
+  </p:transition>
 </p:sld>
 </file>
 
@@ -4407,6 +4798,14 @@
               </a:rPr>
               <a:t>02 / VR DATA PATH</a:t>
             </a:r>
+            <a:endParaRPr lang="en-US" sz="900" b="1" spc="120" dirty="0">
+              <a:solidFill>
+                <a:srgbClr val="52765A"/>
+              </a:solidFill>
+              <a:latin typeface="+mn-lt"/>
+              <a:ea typeface="+mn-ea"/>
+              <a:cs typeface="+mn-cs"/>
+            </a:endParaRPr>
           </a:p>
         </p:txBody>
       </p:sp>
@@ -4447,6 +4846,14 @@
               </a:rPr>
               <a:t>WebXR turns the operator into a time-stamped control source</a:t>
             </a:r>
+            <a:endParaRPr lang="en-US" sz="2250" b="1" dirty="0">
+              <a:solidFill>
+                <a:srgbClr val="1D2B24"/>
+              </a:solidFill>
+              <a:latin typeface="+mn-lt"/>
+              <a:ea typeface="+mn-ea"/>
+              <a:cs typeface="+mn-cs"/>
+            </a:endParaRPr>
           </a:p>
         </p:txBody>
       </p:sp>
@@ -4487,6 +4894,14 @@
               </a:rPr>
               <a:t>Tracking is validated, transformed into the robot frame, then consumed by one control owner.</a:t>
             </a:r>
+            <a:endParaRPr lang="en-US" sz="1200" dirty="0">
+              <a:solidFill>
+                <a:srgbClr val="657269"/>
+              </a:solidFill>
+              <a:latin typeface="+mn-lt"/>
+              <a:ea typeface="+mn-ea"/>
+              <a:cs typeface="+mn-cs"/>
+            </a:endParaRPr>
           </a:p>
         </p:txBody>
       </p:sp>
@@ -4570,6 +4985,14 @@
               </a:rPr>
               <a:t>DEXMAN_LEROBOT / VR TELEOPERATION SYSTEM</a:t>
             </a:r>
+            <a:endParaRPr lang="en-US" sz="750" b="1" spc="60" dirty="0">
+              <a:solidFill>
+                <a:srgbClr val="657269"/>
+              </a:solidFill>
+              <a:latin typeface="+mn-lt"/>
+              <a:ea typeface="+mn-ea"/>
+              <a:cs typeface="+mn-cs"/>
+            </a:endParaRPr>
           </a:p>
         </p:txBody>
       </p:sp>
@@ -4610,6 +5033,14 @@
               </a:rPr>
               <a:t>02 / 10</a:t>
             </a:r>
+            <a:endParaRPr lang="en-US" sz="750" b="1" dirty="0">
+              <a:solidFill>
+                <a:srgbClr val="657269"/>
+              </a:solidFill>
+              <a:latin typeface="+mn-lt"/>
+              <a:ea typeface="+mn-ea"/>
+              <a:cs typeface="+mn-cs"/>
+            </a:endParaRPr>
           </a:p>
         </p:txBody>
       </p:sp>
@@ -4683,6 +5114,14 @@
               </a:rPr>
               <a:t>CONTROL PACKET</a:t>
             </a:r>
+            <a:endParaRPr lang="en-US" sz="1120" b="1" spc="90" dirty="0">
+              <a:solidFill>
+                <a:srgbClr val="52765A"/>
+              </a:solidFill>
+              <a:latin typeface="+mn-lt"/>
+              <a:ea typeface="+mn-ea"/>
+              <a:cs typeface="+mn-cs"/>
+            </a:endParaRPr>
           </a:p>
         </p:txBody>
       </p:sp>
@@ -4723,6 +5162,14 @@
               </a:rPr>
               <a:t>Pose</a:t>
             </a:r>
+            <a:endParaRPr lang="en-US" sz="1350" b="1" dirty="0">
+              <a:solidFill>
+                <a:srgbClr val="1D2B24"/>
+              </a:solidFill>
+              <a:latin typeface="+mn-lt"/>
+              <a:ea typeface="+mn-ea"/>
+              <a:cs typeface="+mn-cs"/>
+            </a:endParaRPr>
           </a:p>
         </p:txBody>
       </p:sp>
@@ -4763,6 +5210,14 @@
               </a:rPr>
               <a:t>wrist xyz + quaternion</a:t>
             </a:r>
+            <a:endParaRPr lang="en-US" sz="1120" dirty="0">
+              <a:solidFill>
+                <a:srgbClr val="657269"/>
+              </a:solidFill>
+              <a:latin typeface="+mn-lt"/>
+              <a:ea typeface="+mn-ea"/>
+              <a:cs typeface="+mn-cs"/>
+            </a:endParaRPr>
           </a:p>
         </p:txBody>
       </p:sp>
@@ -4803,6 +5258,14 @@
               </a:rPr>
               <a:t>25 named joints / hand</a:t>
             </a:r>
+            <a:endParaRPr lang="en-US" sz="1120" dirty="0">
+              <a:solidFill>
+                <a:srgbClr val="657269"/>
+              </a:solidFill>
+              <a:latin typeface="+mn-lt"/>
+              <a:ea typeface="+mn-ea"/>
+              <a:cs typeface="+mn-cs"/>
+            </a:endParaRPr>
           </a:p>
         </p:txBody>
       </p:sp>
@@ -4886,6 +5349,14 @@
               </a:rPr>
               <a:t>Intent</a:t>
             </a:r>
+            <a:endParaRPr lang="en-US" sz="1350" b="1" dirty="0">
+              <a:solidFill>
+                <a:srgbClr val="1D2B24"/>
+              </a:solidFill>
+              <a:latin typeface="+mn-lt"/>
+              <a:ea typeface="+mn-ea"/>
+              <a:cs typeface="+mn-cs"/>
+            </a:endParaRPr>
           </a:p>
         </p:txBody>
       </p:sp>
@@ -4926,6 +5397,14 @@
               </a:rPr>
               <a:t>left/right grip = clutch</a:t>
             </a:r>
+            <a:endParaRPr lang="en-US" sz="1120" dirty="0">
+              <a:solidFill>
+                <a:srgbClr val="657269"/>
+              </a:solidFill>
+              <a:latin typeface="+mn-lt"/>
+              <a:ea typeface="+mn-ea"/>
+              <a:cs typeface="+mn-cs"/>
+            </a:endParaRPr>
           </a:p>
         </p:txBody>
       </p:sp>
@@ -4966,6 +5445,14 @@
               </a:rPr>
               <a:t>A / B / X / Y = state events</a:t>
             </a:r>
+            <a:endParaRPr lang="en-US" sz="1120" dirty="0">
+              <a:solidFill>
+                <a:srgbClr val="657269"/>
+              </a:solidFill>
+              <a:latin typeface="+mn-lt"/>
+              <a:ea typeface="+mn-ea"/>
+              <a:cs typeface="+mn-cs"/>
+            </a:endParaRPr>
           </a:p>
         </p:txBody>
       </p:sp>
@@ -5049,6 +5536,14 @@
               </a:rPr>
               <a:t>Transport</a:t>
             </a:r>
+            <a:endParaRPr lang="en-US" sz="1350" b="1" dirty="0">
+              <a:solidFill>
+                <a:srgbClr val="1D2B24"/>
+              </a:solidFill>
+              <a:latin typeface="+mn-lt"/>
+              <a:ea typeface="+mn-ea"/>
+              <a:cs typeface="+mn-cs"/>
+            </a:endParaRPr>
           </a:p>
         </p:txBody>
       </p:sp>
@@ -5089,6 +5584,14 @@
               </a:rPr>
               <a:t>WSS /ws → relay → control loop</a:t>
             </a:r>
+            <a:endParaRPr lang="en-US" sz="1120" dirty="0">
+              <a:solidFill>
+                <a:srgbClr val="657269"/>
+              </a:solidFill>
+              <a:latin typeface="+mn-lt"/>
+              <a:ea typeface="+mn-ea"/>
+              <a:cs typeface="+mn-cs"/>
+            </a:endParaRPr>
           </a:p>
         </p:txBody>
       </p:sp>
@@ -5129,18 +5632,20 @@
               </a:rPr>
               <a:t>packet age measured on control PC</a:t>
             </a:r>
+            <a:endParaRPr lang="en-US" sz="1120" dirty="0">
+              <a:solidFill>
+                <a:srgbClr val="657269"/>
+              </a:solidFill>
+              <a:latin typeface="+mn-lt"/>
+              <a:ea typeface="+mn-ea"/>
+              <a:cs typeface="+mn-cs"/>
+            </a:endParaRPr>
           </a:p>
         </p:txBody>
       </p:sp>
       <p:grpSp>
         <p:nvGrpSpPr>
-          <p:cNvPr id="62" name="组合 61">
-            <a:extLst>
-              <a:ext uri="{FF2B5EF4-FFF2-40B4-BE49-F238E27FC236}">
-                <a16:creationId xmlns:a16="http://schemas.microsoft.com/office/drawing/2014/main" id="{AE8DDAA6-BCE8-E97F-75E2-344F163515F7}"/>
-              </a:ext>
-            </a:extLst>
-          </p:cNvPr>
+          <p:cNvPr id="62" name="组合 61"/>
           <p:cNvGrpSpPr/>
           <p:nvPr/>
         </p:nvGrpSpPr>
@@ -5220,19 +5725,21 @@
                 </a:rPr>
                 <a:t>VALIDATE</a:t>
               </a:r>
+              <a:endParaRPr lang="en-US" sz="900" b="1" dirty="0">
+                <a:solidFill>
+                  <a:srgbClr val="52765A"/>
+                </a:solidFill>
+                <a:latin typeface="+mn-lt"/>
+                <a:ea typeface="+mn-ea"/>
+                <a:cs typeface="+mn-cs"/>
+              </a:endParaRPr>
             </a:p>
           </p:txBody>
         </p:sp>
       </p:grpSp>
       <p:grpSp>
         <p:nvGrpSpPr>
-          <p:cNvPr id="61" name="组合 60">
-            <a:extLst>
-              <a:ext uri="{FF2B5EF4-FFF2-40B4-BE49-F238E27FC236}">
-                <a16:creationId xmlns:a16="http://schemas.microsoft.com/office/drawing/2014/main" id="{6B88F903-4020-3B4B-E398-70A9EF1BD4D0}"/>
-              </a:ext>
-            </a:extLst>
-          </p:cNvPr>
+          <p:cNvPr id="61" name="组合 60"/>
           <p:cNvGrpSpPr/>
           <p:nvPr/>
         </p:nvGrpSpPr>
@@ -5312,19 +5819,21 @@
                 </a:rPr>
                 <a:t>TRANSFORM</a:t>
               </a:r>
+              <a:endParaRPr lang="en-US" sz="900" b="1" dirty="0">
+                <a:solidFill>
+                  <a:srgbClr val="52765A"/>
+                </a:solidFill>
+                <a:latin typeface="+mn-lt"/>
+                <a:ea typeface="+mn-ea"/>
+                <a:cs typeface="+mn-cs"/>
+              </a:endParaRPr>
             </a:p>
           </p:txBody>
         </p:sp>
       </p:grpSp>
       <p:grpSp>
         <p:nvGrpSpPr>
-          <p:cNvPr id="60" name="组合 59">
-            <a:extLst>
-              <a:ext uri="{FF2B5EF4-FFF2-40B4-BE49-F238E27FC236}">
-                <a16:creationId xmlns:a16="http://schemas.microsoft.com/office/drawing/2014/main" id="{02F44282-3EE1-DD02-E9CE-2447D1647297}"/>
-              </a:ext>
-            </a:extLst>
-          </p:cNvPr>
+          <p:cNvPr id="60" name="组合 59"/>
           <p:cNvGrpSpPr/>
           <p:nvPr/>
         </p:nvGrpSpPr>
@@ -5404,19 +5913,21 @@
                 </a:rPr>
                 <a:t>CONSUME</a:t>
               </a:r>
+              <a:endParaRPr lang="en-US" sz="900" b="1" dirty="0">
+                <a:solidFill>
+                  <a:srgbClr val="52765A"/>
+                </a:solidFill>
+                <a:latin typeface="+mn-lt"/>
+                <a:ea typeface="+mn-ea"/>
+                <a:cs typeface="+mn-cs"/>
+              </a:endParaRPr>
             </a:p>
           </p:txBody>
         </p:sp>
       </p:grpSp>
       <p:grpSp>
         <p:nvGrpSpPr>
-          <p:cNvPr id="57" name="组合 56">
-            <a:extLst>
-              <a:ext uri="{FF2B5EF4-FFF2-40B4-BE49-F238E27FC236}">
-                <a16:creationId xmlns:a16="http://schemas.microsoft.com/office/drawing/2014/main" id="{5BD745A3-4372-212D-7593-01EB9CBB435A}"/>
-              </a:ext>
-            </a:extLst>
-          </p:cNvPr>
+          <p:cNvPr id="57" name="组合 56"/>
           <p:cNvGrpSpPr/>
           <p:nvPr/>
         </p:nvGrpSpPr>
@@ -5498,6 +6009,14 @@
                 </a:rPr>
                 <a:t>1</a:t>
               </a:r>
+              <a:endParaRPr lang="en-US" sz="1950" b="1" dirty="0">
+                <a:solidFill>
+                  <a:srgbClr val="52765A"/>
+                </a:solidFill>
+                <a:latin typeface="+mn-lt"/>
+                <a:ea typeface="+mn-ea"/>
+                <a:cs typeface="+mn-cs"/>
+              </a:endParaRPr>
             </a:p>
           </p:txBody>
         </p:sp>
@@ -5538,6 +6057,14 @@
                 </a:rPr>
                 <a:t>Freshness</a:t>
               </a:r>
+              <a:endParaRPr lang="en-US" sz="1120" b="1" dirty="0">
+                <a:solidFill>
+                  <a:srgbClr val="1D2B24"/>
+                </a:solidFill>
+                <a:latin typeface="+mn-lt"/>
+                <a:ea typeface="+mn-ea"/>
+                <a:cs typeface="+mn-cs"/>
+              </a:endParaRPr>
             </a:p>
           </p:txBody>
         </p:sp>
@@ -5586,6 +6113,14 @@
                 </a:rPr>
                 <a:t>racking flag</a:t>
               </a:r>
+              <a:endParaRPr lang="en-US" sz="1050" dirty="0">
+                <a:solidFill>
+                  <a:srgbClr val="657269"/>
+                </a:solidFill>
+                <a:latin typeface="+mn-lt"/>
+                <a:ea typeface="+mn-ea"/>
+                <a:cs typeface="+mn-cs"/>
+              </a:endParaRPr>
             </a:p>
           </p:txBody>
         </p:sp>
@@ -5634,6 +6169,14 @@
                 </a:rPr>
                 <a:t>inite pose</a:t>
               </a:r>
+              <a:endParaRPr lang="en-US" sz="1050" dirty="0">
+                <a:solidFill>
+                  <a:srgbClr val="657269"/>
+                </a:solidFill>
+                <a:latin typeface="+mn-lt"/>
+                <a:ea typeface="+mn-ea"/>
+                <a:cs typeface="+mn-cs"/>
+              </a:endParaRPr>
             </a:p>
           </p:txBody>
         </p:sp>
@@ -5682,6 +6225,14 @@
                 </a:rPr>
                 <a:t>nown buttons</a:t>
               </a:r>
+              <a:endParaRPr lang="en-US" sz="1050" dirty="0">
+                <a:solidFill>
+                  <a:srgbClr val="657269"/>
+                </a:solidFill>
+                <a:latin typeface="+mn-lt"/>
+                <a:ea typeface="+mn-ea"/>
+                <a:cs typeface="+mn-cs"/>
+              </a:endParaRPr>
             </a:p>
           </p:txBody>
         </p:sp>
@@ -5744,6 +6295,14 @@
                 </a:rPr>
                 <a:t> </a:t>
               </a:r>
+              <a:endParaRPr lang="en-US" sz="1050" b="1" dirty="0">
+                <a:solidFill>
+                  <a:srgbClr val="A64C45"/>
+                </a:solidFill>
+                <a:latin typeface="+mn-lt"/>
+                <a:ea typeface="+mn-ea"/>
+                <a:cs typeface="+mn-cs"/>
+              </a:endParaRPr>
             </a:p>
           </p:txBody>
         </p:sp>
@@ -5792,19 +6351,21 @@
                 </a:rPr>
                 <a:t>atched stop</a:t>
               </a:r>
+              <a:endParaRPr lang="en-US" sz="1050" b="1" dirty="0">
+                <a:solidFill>
+                  <a:srgbClr val="A64C45"/>
+                </a:solidFill>
+                <a:latin typeface="+mn-lt"/>
+                <a:ea typeface="+mn-ea"/>
+                <a:cs typeface="+mn-cs"/>
+              </a:endParaRPr>
             </a:p>
           </p:txBody>
         </p:sp>
       </p:grpSp>
       <p:grpSp>
         <p:nvGrpSpPr>
-          <p:cNvPr id="56" name="组合 55">
-            <a:extLst>
-              <a:ext uri="{FF2B5EF4-FFF2-40B4-BE49-F238E27FC236}">
-                <a16:creationId xmlns:a16="http://schemas.microsoft.com/office/drawing/2014/main" id="{B2F70DF0-4044-5FDA-DF61-2706AAF05048}"/>
-              </a:ext>
-            </a:extLst>
-          </p:cNvPr>
+          <p:cNvPr id="56" name="组合 55"/>
           <p:cNvGrpSpPr/>
           <p:nvPr/>
         </p:nvGrpSpPr>
@@ -5886,6 +6447,14 @@
                 </a:rPr>
                 <a:t>2</a:t>
               </a:r>
+              <a:endParaRPr lang="en-US" sz="1950" b="1" dirty="0">
+                <a:solidFill>
+                  <a:srgbClr val="52765A"/>
+                </a:solidFill>
+                <a:latin typeface="+mn-lt"/>
+                <a:ea typeface="+mn-ea"/>
+                <a:cs typeface="+mn-cs"/>
+              </a:endParaRPr>
             </a:p>
           </p:txBody>
         </p:sp>
@@ -5926,6 +6495,14 @@
                 </a:rPr>
                 <a:t>Coordinate frame</a:t>
               </a:r>
+              <a:endParaRPr lang="en-US" sz="1120" b="1" dirty="0">
+                <a:solidFill>
+                  <a:srgbClr val="1D2B24"/>
+                </a:solidFill>
+                <a:latin typeface="+mn-lt"/>
+                <a:ea typeface="+mn-ea"/>
+                <a:cs typeface="+mn-cs"/>
+              </a:endParaRPr>
             </a:p>
           </p:txBody>
         </p:sp>
@@ -5996,6 +6573,11 @@
                 </a:rPr>
                 <a:t>→ DexH13 palm</a:t>
               </a:r>
+              <a:endParaRPr lang="en-US" altLang="zh-CN" sz="1050" dirty="0">
+                <a:solidFill>
+                  <a:srgbClr val="657269"/>
+                </a:solidFill>
+              </a:endParaRPr>
             </a:p>
           </p:txBody>
         </p:sp>
@@ -6115,19 +6697,21 @@
                 </a:rPr>
                 <a:t>hared calibration</a:t>
               </a:r>
+              <a:endParaRPr lang="en-US" sz="1050" b="1" dirty="0">
+                <a:solidFill>
+                  <a:srgbClr val="52765A"/>
+                </a:solidFill>
+                <a:latin typeface="+mn-lt"/>
+                <a:ea typeface="+mn-ea"/>
+                <a:cs typeface="+mn-cs"/>
+              </a:endParaRPr>
             </a:p>
           </p:txBody>
         </p:sp>
       </p:grpSp>
       <p:grpSp>
         <p:nvGrpSpPr>
-          <p:cNvPr id="55" name="组合 54">
-            <a:extLst>
-              <a:ext uri="{FF2B5EF4-FFF2-40B4-BE49-F238E27FC236}">
-                <a16:creationId xmlns:a16="http://schemas.microsoft.com/office/drawing/2014/main" id="{00CD72A1-074B-6078-FCB8-2D5FB5EC43FB}"/>
-              </a:ext>
-            </a:extLst>
-          </p:cNvPr>
+          <p:cNvPr id="55" name="组合 54"/>
           <p:cNvGrpSpPr/>
           <p:nvPr/>
         </p:nvGrpSpPr>
@@ -6209,6 +6793,14 @@
                 </a:rPr>
                 <a:t>3</a:t>
               </a:r>
+              <a:endParaRPr lang="en-US" sz="1950" b="1" dirty="0">
+                <a:solidFill>
+                  <a:srgbClr val="52765A"/>
+                </a:solidFill>
+                <a:latin typeface="+mn-lt"/>
+                <a:ea typeface="+mn-ea"/>
+                <a:cs typeface="+mn-cs"/>
+              </a:endParaRPr>
             </a:p>
           </p:txBody>
         </p:sp>
@@ -6249,6 +6841,14 @@
                 </a:rPr>
                 <a:t>Relative clutch</a:t>
               </a:r>
+              <a:endParaRPr lang="en-US" sz="1120" b="1" dirty="0">
+                <a:solidFill>
+                  <a:srgbClr val="1D2B24"/>
+                </a:solidFill>
+                <a:latin typeface="+mn-lt"/>
+                <a:ea typeface="+mn-ea"/>
+                <a:cs typeface="+mn-cs"/>
+              </a:endParaRPr>
             </a:p>
           </p:txBody>
         </p:sp>
@@ -6297,6 +6897,14 @@
                 </a:rPr>
                 <a:t>apture reference</a:t>
               </a:r>
+              <a:endParaRPr lang="en-US" sz="1050" dirty="0">
+                <a:solidFill>
+                  <a:srgbClr val="657269"/>
+                </a:solidFill>
+                <a:latin typeface="+mn-lt"/>
+                <a:ea typeface="+mn-ea"/>
+                <a:cs typeface="+mn-cs"/>
+              </a:endParaRPr>
             </a:p>
           </p:txBody>
         </p:sp>
@@ -6345,6 +6953,14 @@
                 </a:rPr>
                 <a:t>ollow incrementally</a:t>
               </a:r>
+              <a:endParaRPr lang="en-US" sz="1050" dirty="0">
+                <a:solidFill>
+                  <a:srgbClr val="657269"/>
+                </a:solidFill>
+                <a:latin typeface="+mn-lt"/>
+                <a:ea typeface="+mn-ea"/>
+                <a:cs typeface="+mn-cs"/>
+              </a:endParaRPr>
             </a:p>
           </p:txBody>
         </p:sp>
@@ -6393,6 +7009,14 @@
                 </a:rPr>
                 <a:t>elease → re-anchor</a:t>
               </a:r>
+              <a:endParaRPr lang="en-US" sz="1050" dirty="0">
+                <a:solidFill>
+                  <a:srgbClr val="657269"/>
+                </a:solidFill>
+                <a:latin typeface="+mn-lt"/>
+                <a:ea typeface="+mn-ea"/>
+                <a:cs typeface="+mn-cs"/>
+              </a:endParaRPr>
             </a:p>
           </p:txBody>
         </p:sp>
@@ -6441,6 +7065,14 @@
                 </a:rPr>
                 <a:t>o absolute pose</a:t>
               </a:r>
+              <a:endParaRPr lang="en-US" sz="1050" b="1" dirty="0">
+                <a:solidFill>
+                  <a:srgbClr val="52765A"/>
+                </a:solidFill>
+                <a:latin typeface="+mn-lt"/>
+                <a:ea typeface="+mn-ea"/>
+                <a:cs typeface="+mn-cs"/>
+              </a:endParaRPr>
             </a:p>
           </p:txBody>
         </p:sp>
@@ -6543,18 +7175,20 @@
               </a:rPr>
               <a:t>Video returns independently: JPEG fallback, WebRTC when explicitly enabled.</a:t>
             </a:r>
-          </a:p>
-        </p:txBody>
-      </p:sp>
-      <p:sp>
-        <p:nvSpPr>
-          <p:cNvPr id="58" name="Line 52">
-            <a:extLst>
-              <a:ext uri="{FF2B5EF4-FFF2-40B4-BE49-F238E27FC236}">
-                <a16:creationId xmlns:a16="http://schemas.microsoft.com/office/drawing/2014/main" id="{C898BE8C-5DCC-394C-80B9-6228C3A7898C}"/>
-              </a:ext>
-            </a:extLst>
-          </p:cNvPr>
+            <a:endParaRPr lang="en-US" sz="1050" b="1" dirty="0">
+              <a:solidFill>
+                <a:srgbClr val="1D2B24"/>
+              </a:solidFill>
+              <a:latin typeface="+mn-lt"/>
+              <a:ea typeface="+mn-ea"/>
+              <a:cs typeface="+mn-cs"/>
+            </a:endParaRPr>
+          </a:p>
+        </p:txBody>
+      </p:sp>
+      <p:sp>
+        <p:nvSpPr>
+          <p:cNvPr id="58" name="Line 52"/>
           <p:cNvSpPr/>
           <p:nvPr/>
         </p:nvSpPr>
@@ -6584,13 +7218,7 @@
       </p:sp>
       <p:sp>
         <p:nvSpPr>
-          <p:cNvPr id="59" name="Line 52">
-            <a:extLst>
-              <a:ext uri="{FF2B5EF4-FFF2-40B4-BE49-F238E27FC236}">
-                <a16:creationId xmlns:a16="http://schemas.microsoft.com/office/drawing/2014/main" id="{00D71C57-4D89-5877-3053-B538DD91270D}"/>
-              </a:ext>
-            </a:extLst>
-          </p:cNvPr>
+          <p:cNvPr id="59" name="Line 52"/>
           <p:cNvSpPr/>
           <p:nvPr/>
         </p:nvSpPr>
@@ -6620,16 +7248,9 @@
       </p:sp>
     </p:spTree>
   </p:cSld>
-  <p:transition xmlns:p="http://schemas.openxmlformats.org/presentationml/2006/main" spd="slow">
-    <p:fade/>
-  </p:transition>
   <p:clrMapOvr>
     <a:masterClrMapping/>
   </p:clrMapOvr>
-  <mc:AlternateContent xmlns:mc="http://schemas.openxmlformats.org/markup-compatibility/2006">
-    <mc:Choice xmlns:p14="http://schemas.microsoft.com/office/powerpoint/2010/main" Requires="p14"/>
-    <mc:Fallback/>
-  </mc:AlternateContent>
 </p:sld>
 </file>
 
@@ -6695,6 +7316,14 @@
               </a:rPr>
               <a:t>03 / CONSTRAINED PLANNING</a:t>
             </a:r>
+            <a:endParaRPr lang="en-US" sz="900" b="1" spc="120" dirty="0">
+              <a:solidFill>
+                <a:srgbClr val="52765A"/>
+              </a:solidFill>
+              <a:latin typeface="+mn-lt"/>
+              <a:ea typeface="+mn-ea"/>
+              <a:cs typeface="+mn-cs"/>
+            </a:endParaRPr>
           </a:p>
         </p:txBody>
       </p:sp>
@@ -6735,6 +7364,14 @@
               </a:rPr>
               <a:t>Mink is the safety envelope around every commanded motion</a:t>
             </a:r>
+            <a:endParaRPr lang="en-US" sz="2250" b="1" dirty="0">
+              <a:solidFill>
+                <a:srgbClr val="1D2B24"/>
+              </a:solidFill>
+              <a:latin typeface="+mn-lt"/>
+              <a:ea typeface="+mn-ea"/>
+              <a:cs typeface="+mn-cs"/>
+            </a:endParaRPr>
           </a:p>
         </p:txBody>
       </p:sp>
@@ -6775,6 +7412,14 @@
               </a:rPr>
               <a:t>The planner solves the task, then accepts only a legal, smooth, model-checked step.</a:t>
             </a:r>
+            <a:endParaRPr lang="en-US" sz="1200" dirty="0">
+              <a:solidFill>
+                <a:srgbClr val="657269"/>
+              </a:solidFill>
+              <a:latin typeface="+mn-lt"/>
+              <a:ea typeface="+mn-ea"/>
+              <a:cs typeface="+mn-cs"/>
+            </a:endParaRPr>
           </a:p>
         </p:txBody>
       </p:sp>
@@ -6858,6 +7503,14 @@
               </a:rPr>
               <a:t>DEXMAN_LEROBOT / VR TELEOPERATION SYSTEM</a:t>
             </a:r>
+            <a:endParaRPr lang="en-US" sz="750" b="1" spc="60" dirty="0">
+              <a:solidFill>
+                <a:srgbClr val="657269"/>
+              </a:solidFill>
+              <a:latin typeface="+mn-lt"/>
+              <a:ea typeface="+mn-ea"/>
+              <a:cs typeface="+mn-cs"/>
+            </a:endParaRPr>
           </a:p>
         </p:txBody>
       </p:sp>
@@ -6898,6 +7551,14 @@
               </a:rPr>
               <a:t>03 / 10</a:t>
             </a:r>
+            <a:endParaRPr lang="en-US" sz="750" b="1" dirty="0">
+              <a:solidFill>
+                <a:srgbClr val="657269"/>
+              </a:solidFill>
+              <a:latin typeface="+mn-lt"/>
+              <a:ea typeface="+mn-ea"/>
+              <a:cs typeface="+mn-cs"/>
+            </a:endParaRPr>
           </a:p>
         </p:txBody>
       </p:sp>
@@ -6969,6 +7630,14 @@
               </a:rPr>
               <a:t>RELATIVE FOLLOWING</a:t>
             </a:r>
+            <a:endParaRPr lang="en-US" sz="900" b="1" spc="90" dirty="0">
+              <a:solidFill>
+                <a:srgbClr val="A7C6A5"/>
+              </a:solidFill>
+              <a:latin typeface="+mn-lt"/>
+              <a:ea typeface="+mn-ea"/>
+              <a:cs typeface="+mn-cs"/>
+            </a:endParaRPr>
           </a:p>
         </p:txBody>
       </p:sp>
@@ -7017,13 +7686,7 @@
       </p:sp>
       <p:grpSp>
         <p:nvGrpSpPr>
-          <p:cNvPr id="99" name="组合 98">
-            <a:extLst>
-              <a:ext uri="{FF2B5EF4-FFF2-40B4-BE49-F238E27FC236}">
-                <a16:creationId xmlns:a16="http://schemas.microsoft.com/office/drawing/2014/main" id="{D266EA28-C0D0-3694-3D3C-2B5B1F5C5059}"/>
-              </a:ext>
-            </a:extLst>
-          </p:cNvPr>
+          <p:cNvPr id="99" name="组合 98"/>
           <p:cNvGrpSpPr/>
           <p:nvPr/>
         </p:nvGrpSpPr>
@@ -7106,7 +7769,7 @@
             <a:lstStyle/>
             <a:p>
               <a:pPr marL="171450" indent="-171450" algn="l">
-                <a:buFont typeface="Arial" panose="020B0604020202020204" pitchFamily="34" charset="0"/>
+                <a:buFont typeface="Arial" panose="020B0604020202090204" pitchFamily="34" charset="0"/>
                 <a:buChar char="•"/>
               </a:pPr>
               <a:r>
@@ -7128,6 +7791,14 @@
                 </a:rPr>
                 <a:t>alm / TCP tracking</a:t>
               </a:r>
+              <a:endParaRPr lang="en-US" sz="1050" dirty="0">
+                <a:solidFill>
+                  <a:srgbClr val="FFFFFF"/>
+                </a:solidFill>
+                <a:latin typeface="+mn-lt"/>
+                <a:ea typeface="+mn-ea"/>
+                <a:cs typeface="+mn-cs"/>
+              </a:endParaRPr>
             </a:p>
           </p:txBody>
         </p:sp>
@@ -7202,7 +7873,7 @@
             <a:lstStyle/>
             <a:p>
               <a:pPr marL="171450" indent="-171450" algn="l">
-                <a:buFont typeface="Arial" panose="020B0604020202020204" pitchFamily="34" charset="0"/>
+                <a:buFont typeface="Arial" panose="020B0604020202090204" pitchFamily="34" charset="0"/>
                 <a:buChar char="•"/>
               </a:pPr>
               <a:r>
@@ -7224,6 +7895,14 @@
                 </a:rPr>
                 <a:t>lbow + home bias</a:t>
               </a:r>
+              <a:endParaRPr lang="en-US" sz="1050" dirty="0">
+                <a:solidFill>
+                  <a:srgbClr val="FFFFFF"/>
+                </a:solidFill>
+                <a:latin typeface="+mn-lt"/>
+                <a:ea typeface="+mn-ea"/>
+                <a:cs typeface="+mn-cs"/>
+              </a:endParaRPr>
             </a:p>
           </p:txBody>
         </p:sp>
@@ -7298,7 +7977,7 @@
             <a:lstStyle/>
             <a:p>
               <a:pPr marL="171450" indent="-171450" algn="l">
-                <a:buFont typeface="Arial" panose="020B0604020202020204" pitchFamily="34" charset="0"/>
+                <a:buFont typeface="Arial" panose="020B0604020202090204" pitchFamily="34" charset="0"/>
                 <a:buChar char="•"/>
               </a:pPr>
               <a:r>
@@ -7320,6 +7999,14 @@
                 </a:rPr>
                 <a:t>oint command or freeze</a:t>
               </a:r>
+              <a:endParaRPr lang="en-US" sz="1050" dirty="0">
+                <a:solidFill>
+                  <a:srgbClr val="FFFFFF"/>
+                </a:solidFill>
+                <a:latin typeface="+mn-lt"/>
+                <a:ea typeface="+mn-ea"/>
+                <a:cs typeface="+mn-cs"/>
+              </a:endParaRPr>
             </a:p>
           </p:txBody>
         </p:sp>
@@ -7361,18 +8048,20 @@
               </a:rPr>
               <a:t>Release clutch → freeze + clear reference</a:t>
             </a:r>
+            <a:endParaRPr lang="en-US" sz="980" dirty="0">
+              <a:solidFill>
+                <a:srgbClr val="D5E0D6"/>
+              </a:solidFill>
+              <a:latin typeface="+mn-lt"/>
+              <a:ea typeface="+mn-ea"/>
+              <a:cs typeface="+mn-cs"/>
+            </a:endParaRPr>
           </a:p>
         </p:txBody>
       </p:sp>
       <p:grpSp>
         <p:nvGrpSpPr>
-          <p:cNvPr id="90" name="组合 89">
-            <a:extLst>
-              <a:ext uri="{FF2B5EF4-FFF2-40B4-BE49-F238E27FC236}">
-                <a16:creationId xmlns:a16="http://schemas.microsoft.com/office/drawing/2014/main" id="{C6C2F60C-7284-8A68-CCD9-CD95B23537E7}"/>
-              </a:ext>
-            </a:extLst>
-          </p:cNvPr>
+          <p:cNvPr id="90" name="组合 89"/>
           <p:cNvGrpSpPr/>
           <p:nvPr/>
         </p:nvGrpSpPr>
@@ -7386,13 +8075,7 @@
         </p:grpSpPr>
         <p:grpSp>
           <p:nvGrpSpPr>
-            <p:cNvPr id="86" name="组合 85">
-              <a:extLst>
-                <a:ext uri="{FF2B5EF4-FFF2-40B4-BE49-F238E27FC236}">
-                  <a16:creationId xmlns:a16="http://schemas.microsoft.com/office/drawing/2014/main" id="{9EFAC55C-F57B-8214-19C7-6295B19EA216}"/>
-                </a:ext>
-              </a:extLst>
-            </p:cNvPr>
+            <p:cNvPr id="86" name="组合 85"/>
             <p:cNvGrpSpPr/>
             <p:nvPr/>
           </p:nvGrpSpPr>
@@ -7480,19 +8163,21 @@
                   </a:rPr>
                   <a:t> SOLVE</a:t>
                 </a:r>
+                <a:endParaRPr lang="en-US" sz="900" b="1" dirty="0">
+                  <a:solidFill>
+                    <a:srgbClr val="52765A"/>
+                  </a:solidFill>
+                  <a:latin typeface="+mn-lt"/>
+                  <a:ea typeface="+mn-ea"/>
+                  <a:cs typeface="+mn-cs"/>
+                </a:endParaRPr>
               </a:p>
             </p:txBody>
           </p:sp>
         </p:grpSp>
         <p:grpSp>
           <p:nvGrpSpPr>
-            <p:cNvPr id="87" name="组合 86">
-              <a:extLst>
-                <a:ext uri="{FF2B5EF4-FFF2-40B4-BE49-F238E27FC236}">
-                  <a16:creationId xmlns:a16="http://schemas.microsoft.com/office/drawing/2014/main" id="{4E58AB50-A614-84C3-5AA3-FC8E6F82A0F4}"/>
-                </a:ext>
-              </a:extLst>
-            </p:cNvPr>
+            <p:cNvPr id="87" name="组合 86"/>
             <p:cNvGrpSpPr/>
             <p:nvPr/>
           </p:nvGrpSpPr>
@@ -7572,19 +8257,21 @@
                   </a:rPr>
                   <a:t>NULL SPACE</a:t>
                 </a:r>
+                <a:endParaRPr lang="en-US" sz="900" b="1" dirty="0">
+                  <a:solidFill>
+                    <a:srgbClr val="52765A"/>
+                  </a:solidFill>
+                  <a:latin typeface="+mn-lt"/>
+                  <a:ea typeface="+mn-ea"/>
+                  <a:cs typeface="+mn-cs"/>
+                </a:endParaRPr>
               </a:p>
             </p:txBody>
           </p:sp>
         </p:grpSp>
         <p:grpSp>
           <p:nvGrpSpPr>
-            <p:cNvPr id="88" name="组合 87">
-              <a:extLst>
-                <a:ext uri="{FF2B5EF4-FFF2-40B4-BE49-F238E27FC236}">
-                  <a16:creationId xmlns:a16="http://schemas.microsoft.com/office/drawing/2014/main" id="{1553D0D6-DBD6-ED9D-E030-259D619ED43E}"/>
-                </a:ext>
-              </a:extLst>
-            </p:cNvPr>
+            <p:cNvPr id="88" name="组合 87"/>
             <p:cNvGrpSpPr/>
             <p:nvPr/>
           </p:nvGrpSpPr>
@@ -7664,19 +8351,21 @@
                   </a:rPr>
                   <a:t>VERIFY</a:t>
                 </a:r>
+                <a:endParaRPr lang="en-US" sz="900" b="1" dirty="0">
+                  <a:solidFill>
+                    <a:srgbClr val="52765A"/>
+                  </a:solidFill>
+                  <a:latin typeface="+mn-lt"/>
+                  <a:ea typeface="+mn-ea"/>
+                  <a:cs typeface="+mn-cs"/>
+                </a:endParaRPr>
               </a:p>
             </p:txBody>
           </p:sp>
         </p:grpSp>
         <p:grpSp>
           <p:nvGrpSpPr>
-            <p:cNvPr id="89" name="组合 88">
-              <a:extLst>
-                <a:ext uri="{FF2B5EF4-FFF2-40B4-BE49-F238E27FC236}">
-                  <a16:creationId xmlns:a16="http://schemas.microsoft.com/office/drawing/2014/main" id="{7E24B160-8CE0-3356-AAE2-B04431C533BF}"/>
-                </a:ext>
-              </a:extLst>
-            </p:cNvPr>
+            <p:cNvPr id="89" name="组合 88"/>
             <p:cNvGrpSpPr/>
             <p:nvPr/>
           </p:nvGrpSpPr>
@@ -7756,6 +8445,14 @@
                   </a:rPr>
                   <a:t>SEND / HOLD</a:t>
                 </a:r>
+                <a:endParaRPr lang="en-US" sz="900" b="1" dirty="0">
+                  <a:solidFill>
+                    <a:srgbClr val="52765A"/>
+                  </a:solidFill>
+                  <a:latin typeface="+mn-lt"/>
+                  <a:ea typeface="+mn-ea"/>
+                  <a:cs typeface="+mn-cs"/>
+                </a:endParaRPr>
               </a:p>
             </p:txBody>
           </p:sp>
@@ -7853,13 +8550,7 @@
       </p:grpSp>
       <p:grpSp>
         <p:nvGrpSpPr>
-          <p:cNvPr id="93" name="组合 92">
-            <a:extLst>
-              <a:ext uri="{FF2B5EF4-FFF2-40B4-BE49-F238E27FC236}">
-                <a16:creationId xmlns:a16="http://schemas.microsoft.com/office/drawing/2014/main" id="{33634FE8-8C8C-5D86-FBE4-D677EE83102B}"/>
-              </a:ext>
-            </a:extLst>
-          </p:cNvPr>
+          <p:cNvPr id="93" name="组合 92"/>
           <p:cNvGrpSpPr/>
           <p:nvPr/>
         </p:nvGrpSpPr>
@@ -7972,6 +8663,14 @@
                 </a:rPr>
                 <a:t>1 Task + limits</a:t>
               </a:r>
+              <a:endParaRPr lang="en-US" sz="1200" b="1" dirty="0">
+                <a:solidFill>
+                  <a:srgbClr val="1D2B24"/>
+                </a:solidFill>
+                <a:latin typeface="+mn-lt"/>
+                <a:ea typeface="+mn-ea"/>
+                <a:cs typeface="+mn-cs"/>
+              </a:endParaRPr>
             </a:p>
           </p:txBody>
         </p:sp>
@@ -8041,6 +8740,14 @@
                 </a:rPr>
                 <a:t>Mink FrameTask</a:t>
               </a:r>
+              <a:endParaRPr lang="en-US" sz="1050" dirty="0">
+                <a:solidFill>
+                  <a:srgbClr val="657269"/>
+                </a:solidFill>
+                <a:latin typeface="+mn-lt"/>
+                <a:ea typeface="+mn-ea"/>
+                <a:cs typeface="+mn-cs"/>
+              </a:endParaRPr>
             </a:p>
           </p:txBody>
         </p:sp>
@@ -8110,6 +8817,14 @@
                 </a:rPr>
                 <a:t>URDF joint ranges</a:t>
               </a:r>
+              <a:endParaRPr lang="en-US" sz="1050" dirty="0">
+                <a:solidFill>
+                  <a:srgbClr val="657269"/>
+                </a:solidFill>
+                <a:latin typeface="+mn-lt"/>
+                <a:ea typeface="+mn-ea"/>
+                <a:cs typeface="+mn-cs"/>
+              </a:endParaRPr>
             </a:p>
           </p:txBody>
         </p:sp>
@@ -8179,19 +8894,21 @@
                 </a:rPr>
                 <a:t>dynamic dt: 5–50 ms</a:t>
               </a:r>
+              <a:endParaRPr lang="en-US" sz="1050" dirty="0">
+                <a:solidFill>
+                  <a:srgbClr val="657269"/>
+                </a:solidFill>
+                <a:latin typeface="+mn-lt"/>
+                <a:ea typeface="+mn-ea"/>
+                <a:cs typeface="+mn-cs"/>
+              </a:endParaRPr>
             </a:p>
           </p:txBody>
         </p:sp>
       </p:grpSp>
       <p:grpSp>
         <p:nvGrpSpPr>
-          <p:cNvPr id="95" name="组合 94">
-            <a:extLst>
-              <a:ext uri="{FF2B5EF4-FFF2-40B4-BE49-F238E27FC236}">
-                <a16:creationId xmlns:a16="http://schemas.microsoft.com/office/drawing/2014/main" id="{A1F70847-F49E-8B18-9DBD-EC921605F183}"/>
-              </a:ext>
-            </a:extLst>
-          </p:cNvPr>
+          <p:cNvPr id="95" name="组合 94"/>
           <p:cNvGrpSpPr/>
           <p:nvPr/>
         </p:nvGrpSpPr>
@@ -8304,6 +9021,14 @@
                 </a:rPr>
                 <a:t>3 Collision envelope</a:t>
               </a:r>
+              <a:endParaRPr lang="en-US" sz="1200" b="1" dirty="0">
+                <a:solidFill>
+                  <a:srgbClr val="1D2B24"/>
+                </a:solidFill>
+                <a:latin typeface="+mn-lt"/>
+                <a:ea typeface="+mn-ea"/>
+                <a:cs typeface="+mn-cs"/>
+              </a:endParaRPr>
             </a:p>
           </p:txBody>
         </p:sp>
@@ -8381,6 +9106,14 @@
                 </a:rPr>
                 <a:t>rm: 5 cm hard / 8 cm detect</a:t>
               </a:r>
+              <a:endParaRPr lang="en-US" sz="1050" dirty="0">
+                <a:solidFill>
+                  <a:srgbClr val="657269"/>
+                </a:solidFill>
+                <a:latin typeface="+mn-lt"/>
+                <a:ea typeface="+mn-ea"/>
+                <a:cs typeface="+mn-cs"/>
+              </a:endParaRPr>
             </a:p>
           </p:txBody>
         </p:sp>
@@ -8483,6 +9216,14 @@
                 </a:rPr>
                 <a:t>: 0 cm</a:t>
               </a:r>
+              <a:endParaRPr lang="en-US" sz="1050" dirty="0">
+                <a:solidFill>
+                  <a:srgbClr val="657269"/>
+                </a:solidFill>
+                <a:latin typeface="+mn-lt"/>
+                <a:ea typeface="+mn-ea"/>
+                <a:cs typeface="+mn-cs"/>
+              </a:endParaRPr>
             </a:p>
           </p:txBody>
         </p:sp>
@@ -8570,6 +9311,14 @@
                 </a:rPr>
                 <a:t> cm</a:t>
               </a:r>
+              <a:endParaRPr lang="en-US" sz="1050" dirty="0">
+                <a:solidFill>
+                  <a:srgbClr val="657269"/>
+                </a:solidFill>
+                <a:latin typeface="+mn-lt"/>
+                <a:ea typeface="+mn-ea"/>
+                <a:cs typeface="+mn-cs"/>
+              </a:endParaRPr>
             </a:p>
           </p:txBody>
         </p:sp>
@@ -8644,18 +9393,20 @@
               </a:rPr>
               <a:t>SMOOTHING</a:t>
             </a:r>
+            <a:endParaRPr lang="en-US" sz="1050" b="1" dirty="0">
+              <a:solidFill>
+                <a:srgbClr val="52765A"/>
+              </a:solidFill>
+              <a:latin typeface="+mn-lt"/>
+              <a:ea typeface="+mn-ea"/>
+              <a:cs typeface="+mn-cs"/>
+            </a:endParaRPr>
           </a:p>
         </p:txBody>
       </p:sp>
       <p:grpSp>
         <p:nvGrpSpPr>
-          <p:cNvPr id="97" name="组合 96">
-            <a:extLst>
-              <a:ext uri="{FF2B5EF4-FFF2-40B4-BE49-F238E27FC236}">
-                <a16:creationId xmlns:a16="http://schemas.microsoft.com/office/drawing/2014/main" id="{C3495A6B-2AD3-1B05-66B7-3B0F6817A475}"/>
-              </a:ext>
-            </a:extLst>
-          </p:cNvPr>
+          <p:cNvPr id="97" name="组合 96"/>
           <p:cNvGrpSpPr/>
           <p:nvPr/>
         </p:nvGrpSpPr>
@@ -8733,6 +9484,14 @@
                 </a:rPr>
                 <a:t>Lead-in</a:t>
               </a:r>
+              <a:endParaRPr lang="en-US" sz="1050" b="1" dirty="0">
+                <a:solidFill>
+                  <a:srgbClr val="1D2B24"/>
+                </a:solidFill>
+                <a:latin typeface="+mn-lt"/>
+                <a:ea typeface="+mn-ea"/>
+                <a:cs typeface="+mn-cs"/>
+              </a:endParaRPr>
             </a:p>
           </p:txBody>
         </p:sp>
@@ -8773,6 +9532,14 @@
                 </a:rPr>
                 <a:t>full rate ≤ 2 cm / 5°</a:t>
               </a:r>
+              <a:endParaRPr lang="en-US" sz="900" dirty="0">
+                <a:solidFill>
+                  <a:srgbClr val="657269"/>
+                </a:solidFill>
+                <a:latin typeface="+mn-lt"/>
+                <a:ea typeface="+mn-ea"/>
+                <a:cs typeface="+mn-cs"/>
+              </a:endParaRPr>
             </a:p>
           </p:txBody>
         </p:sp>
@@ -8842,6 +9609,14 @@
                 </a:rPr>
                 <a:t>Ramp</a:t>
               </a:r>
+              <a:endParaRPr lang="en-US" sz="1050" b="1" dirty="0">
+                <a:solidFill>
+                  <a:srgbClr val="1D2B24"/>
+                </a:solidFill>
+                <a:latin typeface="+mn-lt"/>
+                <a:ea typeface="+mn-ea"/>
+                <a:cs typeface="+mn-cs"/>
+              </a:endParaRPr>
             </a:p>
           </p:txBody>
         </p:sp>
@@ -8882,6 +9657,14 @@
                 </a:rPr>
                 <a:t>soft slowdown zone</a:t>
               </a:r>
+              <a:endParaRPr lang="en-US" sz="900" dirty="0">
+                <a:solidFill>
+                  <a:srgbClr val="657269"/>
+                </a:solidFill>
+                <a:latin typeface="+mn-lt"/>
+                <a:ea typeface="+mn-ea"/>
+                <a:cs typeface="+mn-cs"/>
+              </a:endParaRPr>
             </a:p>
           </p:txBody>
         </p:sp>
@@ -8951,6 +9734,14 @@
                 </a:rPr>
                 <a:t>Stop</a:t>
               </a:r>
+              <a:endParaRPr lang="en-US" sz="1050" b="1" dirty="0">
+                <a:solidFill>
+                  <a:srgbClr val="1D2B24"/>
+                </a:solidFill>
+                <a:latin typeface="+mn-lt"/>
+                <a:ea typeface="+mn-ea"/>
+                <a:cs typeface="+mn-cs"/>
+              </a:endParaRPr>
             </a:p>
           </p:txBody>
         </p:sp>
@@ -8991,6 +9782,14 @@
                 </a:rPr>
                 <a:t>zero at hard bound</a:t>
               </a:r>
+              <a:endParaRPr lang="en-US" sz="900" dirty="0">
+                <a:solidFill>
+                  <a:srgbClr val="657269"/>
+                </a:solidFill>
+                <a:latin typeface="+mn-lt"/>
+                <a:ea typeface="+mn-ea"/>
+                <a:cs typeface="+mn-cs"/>
+              </a:endParaRPr>
             </a:p>
           </p:txBody>
         </p:sp>
@@ -9060,6 +9859,14 @@
                 </a:rPr>
                 <a:t>Home</a:t>
               </a:r>
+              <a:endParaRPr lang="en-US" sz="1050" b="1" dirty="0">
+                <a:solidFill>
+                  <a:srgbClr val="1D2B24"/>
+                </a:solidFill>
+                <a:latin typeface="+mn-lt"/>
+                <a:ea typeface="+mn-ea"/>
+                <a:cs typeface="+mn-cs"/>
+              </a:endParaRPr>
             </a:p>
           </p:txBody>
         </p:sp>
@@ -9100,6 +9907,14 @@
                 </a:rPr>
                 <a:t>direct joint interpolation</a:t>
               </a:r>
+              <a:endParaRPr lang="en-US" sz="900" dirty="0">
+                <a:solidFill>
+                  <a:srgbClr val="657269"/>
+                </a:solidFill>
+                <a:latin typeface="+mn-lt"/>
+                <a:ea typeface="+mn-ea"/>
+                <a:cs typeface="+mn-cs"/>
+              </a:endParaRPr>
             </a:p>
           </p:txBody>
         </p:sp>
@@ -9108,13 +9923,7 @@
         <mc:Choice xmlns:a14="http://schemas.microsoft.com/office/drawing/2010/main" Requires="a14">
           <p:sp>
             <p:nvSpPr>
-              <p:cNvPr id="85" name="文本框 84">
-                <a:extLst>
-                  <a:ext uri="{FF2B5EF4-FFF2-40B4-BE49-F238E27FC236}">
-                    <a16:creationId xmlns:a16="http://schemas.microsoft.com/office/drawing/2014/main" id="{A78F27A0-BA40-85EF-A68F-1D97DD01A89D}"/>
-                  </a:ext>
-                </a:extLst>
-              </p:cNvPr>
+              <p:cNvPr id="85" name="文本框 84"/>
               <p:cNvSpPr txBox="1"/>
               <p:nvPr/>
             </p:nvSpPr>
@@ -9134,10 +9943,12 @@
               </a:bodyPr>
               <a:lstStyle/>
               <a:p>
-                <a:pPr/>
                 <a14:m>
                   <m:oMathPara xmlns:m="http://schemas.openxmlformats.org/officeDocument/2006/math">
-                    <m:oMath>
+                    <m:oMathParaPr>
+                      <m:jc m:val="centerGroup"/>
+                    </m:oMathParaPr>
+                    <m:oMath xmlns:m="http://schemas.openxmlformats.org/officeDocument/2006/math">
                       <m:sSubSup>
                         <m:sSubSupPr>
                           <m:ctrlPr>
@@ -9326,7 +10137,16 @@
                               </a:solidFill>
                               <a:latin typeface="Cambria Math" panose="02040503050406030204" pitchFamily="18" charset="0"/>
                             </a:rPr>
-                            <m:t>−1</m:t>
+                            <m:t>−</m:t>
+                          </m:r>
+                          <m:r>
+                            <a:rPr lang="en-US" altLang="zh-CN" b="0" i="1" smtClean="0">
+                              <a:solidFill>
+                                <a:schemeClr val="bg1"/>
+                              </a:solidFill>
+                              <a:latin typeface="Cambria Math" panose="02040503050406030204" pitchFamily="18" charset="0"/>
+                            </a:rPr>
+                            <m:t>1</m:t>
                           </m:r>
                         </m:sup>
                       </m:sSup>
@@ -9399,13 +10219,7 @@
         <mc:Fallback>
           <p:sp>
             <p:nvSpPr>
-              <p:cNvPr id="85" name="文本框 84">
-                <a:extLst>
-                  <a:ext uri="{FF2B5EF4-FFF2-40B4-BE49-F238E27FC236}">
-                    <a16:creationId xmlns:a16="http://schemas.microsoft.com/office/drawing/2014/main" id="{A78F27A0-BA40-85EF-A68F-1D97DD01A89D}"/>
-                  </a:ext>
-                </a:extLst>
-              </p:cNvPr>
+              <p:cNvPr id="85" name="文本框 84"/>
               <p:cNvSpPr txBox="1">
                 <a:spLocks noRot="1" noChangeAspect="1" noMove="1" noResize="1" noEditPoints="1" noAdjustHandles="1" noChangeArrowheads="1" noChangeShapeType="1" noTextEdit="1"/>
               </p:cNvSpPr>
@@ -9419,10 +10233,10 @@
               <a:prstGeom prst="rect">
                 <a:avLst/>
               </a:prstGeom>
-              <a:blipFill>
-                <a:blip r:embed="rId3"/>
+              <a:blipFill rotWithShape="1">
+                <a:blip r:embed="rId1"/>
                 <a:stretch>
-                  <a:fillRect b="-2564"/>
+                  <a:fillRect l="-4" t="-36" b="134"/>
                 </a:stretch>
               </a:blipFill>
             </p:spPr>
@@ -9443,13 +10257,7 @@
       </mc:AlternateContent>
       <p:grpSp>
         <p:nvGrpSpPr>
-          <p:cNvPr id="94" name="组合 93">
-            <a:extLst>
-              <a:ext uri="{FF2B5EF4-FFF2-40B4-BE49-F238E27FC236}">
-                <a16:creationId xmlns:a16="http://schemas.microsoft.com/office/drawing/2014/main" id="{92C8AF7C-1618-0557-0D57-711163E0D5DE}"/>
-              </a:ext>
-            </a:extLst>
-          </p:cNvPr>
+          <p:cNvPr id="94" name="组合 93"/>
           <p:cNvGrpSpPr/>
           <p:nvPr/>
         </p:nvGrpSpPr>
@@ -9531,6 +10339,14 @@
                 </a:rPr>
                 <a:t>2 Strict null-space</a:t>
               </a:r>
+              <a:endParaRPr lang="en-US" sz="1200" b="1" dirty="0">
+                <a:solidFill>
+                  <a:srgbClr val="1D2B24"/>
+                </a:solidFill>
+                <a:latin typeface="+mn-lt"/>
+                <a:ea typeface="+mn-ea"/>
+                <a:cs typeface="+mn-cs"/>
+              </a:endParaRPr>
             </a:p>
           </p:txBody>
         </p:sp>
@@ -9608,6 +10424,14 @@
                 </a:rPr>
                 <a:t>lbow ceiling 0.563 m</a:t>
               </a:r>
+              <a:endParaRPr lang="en-US" sz="1050" dirty="0">
+                <a:solidFill>
+                  <a:srgbClr val="657269"/>
+                </a:solidFill>
+                <a:latin typeface="+mn-lt"/>
+                <a:ea typeface="+mn-ea"/>
+                <a:cs typeface="+mn-cs"/>
+              </a:endParaRPr>
             </a:p>
           </p:txBody>
         </p:sp>
@@ -9685,6 +10509,14 @@
                 </a:rPr>
                 <a:t>oint 1 / 3 / 4 → Home</a:t>
               </a:r>
+              <a:endParaRPr lang="en-US" sz="1050" dirty="0">
+                <a:solidFill>
+                  <a:srgbClr val="657269"/>
+                </a:solidFill>
+                <a:latin typeface="+mn-lt"/>
+                <a:ea typeface="+mn-ea"/>
+                <a:cs typeface="+mn-cs"/>
+              </a:endParaRPr>
             </a:p>
           </p:txBody>
         </p:sp>
@@ -9762,18 +10594,20 @@
                 </a:rPr>
                 <a:t>scape only when stuck</a:t>
               </a:r>
+              <a:endParaRPr lang="en-US" sz="1050" dirty="0">
+                <a:solidFill>
+                  <a:srgbClr val="657269"/>
+                </a:solidFill>
+                <a:latin typeface="+mn-lt"/>
+                <a:ea typeface="+mn-ea"/>
+                <a:cs typeface="+mn-cs"/>
+              </a:endParaRPr>
             </a:p>
           </p:txBody>
         </p:sp>
         <p:sp>
           <p:nvSpPr>
-            <p:cNvPr id="91" name="Rectangle 35">
-              <a:extLst>
-                <a:ext uri="{FF2B5EF4-FFF2-40B4-BE49-F238E27FC236}">
-                  <a16:creationId xmlns:a16="http://schemas.microsoft.com/office/drawing/2014/main" id="{8E89B67E-9CCC-5814-5989-BFC7BF959ABD}"/>
-                </a:ext>
-              </a:extLst>
-            </p:cNvPr>
+            <p:cNvPr id="91" name="Rectangle 35"/>
             <p:cNvSpPr/>
             <p:nvPr/>
           </p:nvSpPr>
@@ -9805,13 +10639,7 @@
       </p:grpSp>
       <p:grpSp>
         <p:nvGrpSpPr>
-          <p:cNvPr id="96" name="组合 95">
-            <a:extLst>
-              <a:ext uri="{FF2B5EF4-FFF2-40B4-BE49-F238E27FC236}">
-                <a16:creationId xmlns:a16="http://schemas.microsoft.com/office/drawing/2014/main" id="{9DBCC145-BABC-6825-6CC5-ABB385C431D3}"/>
-              </a:ext>
-            </a:extLst>
-          </p:cNvPr>
+          <p:cNvPr id="96" name="组合 95"/>
           <p:cNvGrpSpPr/>
           <p:nvPr/>
         </p:nvGrpSpPr>
@@ -9893,6 +10721,14 @@
                 </a:rPr>
                 <a:t>4 Exact FK shaping</a:t>
               </a:r>
+              <a:endParaRPr lang="en-US" sz="1200" b="1" dirty="0">
+                <a:solidFill>
+                  <a:srgbClr val="1D2B24"/>
+                </a:solidFill>
+                <a:latin typeface="+mn-lt"/>
+                <a:ea typeface="+mn-ea"/>
+                <a:cs typeface="+mn-cs"/>
+              </a:endParaRPr>
             </a:p>
           </p:txBody>
         </p:sp>
@@ -9962,6 +10798,14 @@
                 </a:rPr>
                 <a:t>0.50 m/s, 90°/s follow</a:t>
               </a:r>
+              <a:endParaRPr lang="en-US" sz="1050" dirty="0">
+                <a:solidFill>
+                  <a:srgbClr val="657269"/>
+                </a:solidFill>
+                <a:latin typeface="+mn-lt"/>
+                <a:ea typeface="+mn-ea"/>
+                <a:cs typeface="+mn-cs"/>
+              </a:endParaRPr>
             </a:p>
           </p:txBody>
         </p:sp>
@@ -10031,6 +10875,14 @@
                 </a:rPr>
                 <a:t>4 cm / 8° hard re-anchor</a:t>
               </a:r>
+              <a:endParaRPr lang="en-US" sz="1050" dirty="0">
+                <a:solidFill>
+                  <a:srgbClr val="657269"/>
+                </a:solidFill>
+                <a:latin typeface="+mn-lt"/>
+                <a:ea typeface="+mn-ea"/>
+                <a:cs typeface="+mn-cs"/>
+              </a:endParaRPr>
             </a:p>
           </p:txBody>
         </p:sp>
@@ -10100,18 +10952,20 @@
                 </a:rPr>
                 <a:t>Freeze measured q on failure</a:t>
               </a:r>
+              <a:endParaRPr lang="en-US" sz="1050" dirty="0">
+                <a:solidFill>
+                  <a:srgbClr val="657269"/>
+                </a:solidFill>
+                <a:latin typeface="+mn-lt"/>
+                <a:ea typeface="+mn-ea"/>
+                <a:cs typeface="+mn-cs"/>
+              </a:endParaRPr>
             </a:p>
           </p:txBody>
         </p:sp>
         <p:sp>
           <p:nvSpPr>
-            <p:cNvPr id="92" name="Rectangle 35">
-              <a:extLst>
-                <a:ext uri="{FF2B5EF4-FFF2-40B4-BE49-F238E27FC236}">
-                  <a16:creationId xmlns:a16="http://schemas.microsoft.com/office/drawing/2014/main" id="{7C2ABAC2-666B-DCD6-DCB8-396D38AF3719}"/>
-                </a:ext>
-              </a:extLst>
-            </p:cNvPr>
+            <p:cNvPr id="92" name="Rectangle 35"/>
             <p:cNvSpPr/>
             <p:nvPr/>
           </p:nvSpPr>
@@ -10143,16 +10997,9 @@
       </p:grpSp>
     </p:spTree>
   </p:cSld>
-  <p:transition xmlns:p="http://schemas.openxmlformats.org/presentationml/2006/main" spd="slow">
-    <p:fade/>
-  </p:transition>
   <p:clrMapOvr>
     <a:masterClrMapping/>
   </p:clrMapOvr>
-  <mc:AlternateContent xmlns:mc="http://schemas.openxmlformats.org/markup-compatibility/2006">
-    <mc:Choice xmlns:p14="http://schemas.microsoft.com/office/powerpoint/2010/main" Requires="p14"/>
-    <mc:Fallback/>
-  </mc:AlternateContent>
 </p:sld>
 </file>
 
@@ -10218,6 +11065,14 @@
               </a:rPr>
               <a:t>04 / DEXTEROUS HAND CONTROL</a:t>
             </a:r>
+            <a:endParaRPr lang="en-US" sz="900" b="1" spc="120" dirty="0">
+              <a:solidFill>
+                <a:srgbClr val="52765A"/>
+              </a:solidFill>
+              <a:latin typeface="+mn-lt"/>
+              <a:ea typeface="+mn-ea"/>
+              <a:cs typeface="+mn-cs"/>
+            </a:endParaRPr>
           </a:p>
         </p:txBody>
       </p:sp>
@@ -10258,6 +11113,14 @@
               </a:rPr>
               <a:t>Retargeting preserves intent while respecting the DexH13 actuator model</a:t>
             </a:r>
+            <a:endParaRPr lang="en-US" sz="2250" b="1" dirty="0">
+              <a:solidFill>
+                <a:srgbClr val="1D2B24"/>
+              </a:solidFill>
+              <a:latin typeface="+mn-lt"/>
+              <a:ea typeface="+mn-ea"/>
+              <a:cs typeface="+mn-cs"/>
+            </a:endParaRPr>
           </a:p>
         </p:txBody>
       </p:sp>
@@ -10298,6 +11161,14 @@
               </a:rPr>
               <a:t>The hand pipeline is separate from arm IK, but shares the same tracked wrist and safety state.</a:t>
             </a:r>
+            <a:endParaRPr lang="en-US" sz="1200" dirty="0">
+              <a:solidFill>
+                <a:srgbClr val="657269"/>
+              </a:solidFill>
+              <a:latin typeface="+mn-lt"/>
+              <a:ea typeface="+mn-ea"/>
+              <a:cs typeface="+mn-cs"/>
+            </a:endParaRPr>
           </a:p>
         </p:txBody>
       </p:sp>
@@ -10381,6 +11252,14 @@
               </a:rPr>
               <a:t>DEXMAN_LEROBOT / VR TELEOPERATION SYSTEM</a:t>
             </a:r>
+            <a:endParaRPr lang="en-US" sz="750" b="1" spc="60" dirty="0">
+              <a:solidFill>
+                <a:srgbClr val="657269"/>
+              </a:solidFill>
+              <a:latin typeface="+mn-lt"/>
+              <a:ea typeface="+mn-ea"/>
+              <a:cs typeface="+mn-cs"/>
+            </a:endParaRPr>
           </a:p>
         </p:txBody>
       </p:sp>
@@ -10421,18 +11300,20 @@
               </a:rPr>
               <a:t>04 / 10</a:t>
             </a:r>
+            <a:endParaRPr lang="en-US" sz="750" b="1" dirty="0">
+              <a:solidFill>
+                <a:srgbClr val="657269"/>
+              </a:solidFill>
+              <a:latin typeface="+mn-lt"/>
+              <a:ea typeface="+mn-ea"/>
+              <a:cs typeface="+mn-cs"/>
+            </a:endParaRPr>
           </a:p>
         </p:txBody>
       </p:sp>
       <p:grpSp>
         <p:nvGrpSpPr>
-          <p:cNvPr id="50" name="组合 49">
-            <a:extLst>
-              <a:ext uri="{FF2B5EF4-FFF2-40B4-BE49-F238E27FC236}">
-                <a16:creationId xmlns:a16="http://schemas.microsoft.com/office/drawing/2014/main" id="{A2FEADF7-09C3-537D-CE3D-BE3FAF64F074}"/>
-              </a:ext>
-            </a:extLst>
-          </p:cNvPr>
+          <p:cNvPr id="50" name="组合 49"/>
           <p:cNvGrpSpPr/>
           <p:nvPr/>
         </p:nvGrpSpPr>
@@ -10543,6 +11424,14 @@
                 </a:rPr>
                 <a:t>1</a:t>
               </a:r>
+              <a:endParaRPr lang="en-US" sz="1050" b="1" dirty="0">
+                <a:solidFill>
+                  <a:srgbClr val="52765A"/>
+                </a:solidFill>
+                <a:latin typeface="+mn-lt"/>
+                <a:ea typeface="+mn-ea"/>
+                <a:cs typeface="+mn-cs"/>
+              </a:endParaRPr>
             </a:p>
           </p:txBody>
         </p:sp>
@@ -10583,6 +11472,14 @@
                 </a:rPr>
                 <a:t>WebXR</a:t>
               </a:r>
+              <a:endParaRPr lang="en-US" sz="1280" b="1" dirty="0">
+                <a:solidFill>
+                  <a:srgbClr val="1D2B24"/>
+                </a:solidFill>
+                <a:latin typeface="+mn-lt"/>
+                <a:ea typeface="+mn-ea"/>
+                <a:cs typeface="+mn-cs"/>
+              </a:endParaRPr>
             </a:p>
           </p:txBody>
         </p:sp>
@@ -10641,6 +11538,11 @@
                 </a:rPr>
                 <a:t>+ wrist pose</a:t>
               </a:r>
+              <a:endParaRPr lang="en-US" altLang="zh-CN" sz="1050" dirty="0">
+                <a:solidFill>
+                  <a:srgbClr val="657269"/>
+                </a:solidFill>
+              </a:endParaRPr>
             </a:p>
           </p:txBody>
         </p:sp>
@@ -10677,13 +11579,7 @@
       </p:sp>
       <p:grpSp>
         <p:nvGrpSpPr>
-          <p:cNvPr id="51" name="组合 50">
-            <a:extLst>
-              <a:ext uri="{FF2B5EF4-FFF2-40B4-BE49-F238E27FC236}">
-                <a16:creationId xmlns:a16="http://schemas.microsoft.com/office/drawing/2014/main" id="{DF8C69D6-0150-A9BF-957B-EF8471031240}"/>
-              </a:ext>
-            </a:extLst>
-          </p:cNvPr>
+          <p:cNvPr id="51" name="组合 50"/>
           <p:cNvGrpSpPr/>
           <p:nvPr/>
         </p:nvGrpSpPr>
@@ -10794,6 +11690,14 @@
                 </a:rPr>
                 <a:t>2</a:t>
               </a:r>
+              <a:endParaRPr lang="en-US" sz="1050" b="1" dirty="0">
+                <a:solidFill>
+                  <a:srgbClr val="52765A"/>
+                </a:solidFill>
+                <a:latin typeface="+mn-lt"/>
+                <a:ea typeface="+mn-ea"/>
+                <a:cs typeface="+mn-cs"/>
+              </a:endParaRPr>
             </a:p>
           </p:txBody>
         </p:sp>
@@ -10834,6 +11738,14 @@
                 </a:rPr>
                 <a:t>Palm frame</a:t>
               </a:r>
+              <a:endParaRPr lang="en-US" sz="1280" b="1" dirty="0">
+                <a:solidFill>
+                  <a:srgbClr val="1D2B24"/>
+                </a:solidFill>
+                <a:latin typeface="+mn-lt"/>
+                <a:ea typeface="+mn-ea"/>
+                <a:cs typeface="+mn-cs"/>
+              </a:endParaRPr>
             </a:p>
           </p:txBody>
         </p:sp>
@@ -10903,6 +11815,11 @@
                 </a:rPr>
                 <a:t>DexH13 axes</a:t>
               </a:r>
+              <a:endParaRPr lang="en-US" altLang="zh-CN" sz="1050" dirty="0">
+                <a:solidFill>
+                  <a:srgbClr val="657269"/>
+                </a:solidFill>
+              </a:endParaRPr>
             </a:p>
           </p:txBody>
         </p:sp>
@@ -10939,13 +11856,7 @@
       </p:sp>
       <p:grpSp>
         <p:nvGrpSpPr>
-          <p:cNvPr id="52" name="组合 51">
-            <a:extLst>
-              <a:ext uri="{FF2B5EF4-FFF2-40B4-BE49-F238E27FC236}">
-                <a16:creationId xmlns:a16="http://schemas.microsoft.com/office/drawing/2014/main" id="{552BD1E9-FF52-6157-F861-EA6952BEA583}"/>
-              </a:ext>
-            </a:extLst>
-          </p:cNvPr>
+          <p:cNvPr id="52" name="组合 51"/>
           <p:cNvGrpSpPr/>
           <p:nvPr/>
         </p:nvGrpSpPr>
@@ -11056,6 +11967,14 @@
                 </a:rPr>
                 <a:t>3</a:t>
               </a:r>
+              <a:endParaRPr lang="en-US" sz="1050" b="1" dirty="0">
+                <a:solidFill>
+                  <a:srgbClr val="52765A"/>
+                </a:solidFill>
+                <a:latin typeface="+mn-lt"/>
+                <a:ea typeface="+mn-ea"/>
+                <a:cs typeface="+mn-cs"/>
+              </a:endParaRPr>
             </a:p>
           </p:txBody>
         </p:sp>
@@ -11096,6 +12015,14 @@
                 </a:rPr>
                 <a:t>DexPilot</a:t>
               </a:r>
+              <a:endParaRPr lang="en-US" sz="1280" b="1" dirty="0">
+                <a:solidFill>
+                  <a:srgbClr val="1D2B24"/>
+                </a:solidFill>
+                <a:latin typeface="+mn-lt"/>
+                <a:ea typeface="+mn-ea"/>
+                <a:cs typeface="+mn-cs"/>
+              </a:endParaRPr>
             </a:p>
           </p:txBody>
         </p:sp>
@@ -11136,6 +12063,14 @@
                 </a:rPr>
                 <a:t>MediaPipe-21</a:t>
               </a:r>
+              <a:endParaRPr lang="en-US" sz="1050" dirty="0">
+                <a:solidFill>
+                  <a:srgbClr val="657269"/>
+                </a:solidFill>
+                <a:latin typeface="+mn-lt"/>
+                <a:ea typeface="+mn-ea"/>
+                <a:cs typeface="+mn-cs"/>
+              </a:endParaRPr>
             </a:p>
           </p:txBody>
         </p:sp>
@@ -11176,6 +12111,14 @@
                 </a:rPr>
                 <a:t>optimization</a:t>
               </a:r>
+              <a:endParaRPr lang="en-US" sz="1050" dirty="0">
+                <a:solidFill>
+                  <a:srgbClr val="657269"/>
+                </a:solidFill>
+                <a:latin typeface="+mn-lt"/>
+                <a:ea typeface="+mn-ea"/>
+                <a:cs typeface="+mn-cs"/>
+              </a:endParaRPr>
             </a:p>
           </p:txBody>
         </p:sp>
@@ -11212,13 +12155,7 @@
       </p:sp>
       <p:grpSp>
         <p:nvGrpSpPr>
-          <p:cNvPr id="53" name="组合 52">
-            <a:extLst>
-              <a:ext uri="{FF2B5EF4-FFF2-40B4-BE49-F238E27FC236}">
-                <a16:creationId xmlns:a16="http://schemas.microsoft.com/office/drawing/2014/main" id="{E4771620-9B2A-7781-CE54-EA95152193D0}"/>
-              </a:ext>
-            </a:extLst>
-          </p:cNvPr>
+          <p:cNvPr id="53" name="组合 52"/>
           <p:cNvGrpSpPr/>
           <p:nvPr/>
         </p:nvGrpSpPr>
@@ -11329,6 +12266,14 @@
                 </a:rPr>
                 <a:t>4</a:t>
               </a:r>
+              <a:endParaRPr lang="en-US" sz="1050" b="1" dirty="0">
+                <a:solidFill>
+                  <a:srgbClr val="52765A"/>
+                </a:solidFill>
+                <a:latin typeface="+mn-lt"/>
+                <a:ea typeface="+mn-ea"/>
+                <a:cs typeface="+mn-cs"/>
+              </a:endParaRPr>
             </a:p>
           </p:txBody>
         </p:sp>
@@ -11369,6 +12314,14 @@
                 </a:rPr>
                 <a:t>DexH13</a:t>
               </a:r>
+              <a:endParaRPr lang="en-US" sz="1280" b="1" dirty="0">
+                <a:solidFill>
+                  <a:srgbClr val="1D2B24"/>
+                </a:solidFill>
+                <a:latin typeface="+mn-lt"/>
+                <a:ea typeface="+mn-ea"/>
+                <a:cs typeface="+mn-cs"/>
+              </a:endParaRPr>
             </a:p>
           </p:txBody>
         </p:sp>
@@ -11409,6 +12362,14 @@
                 </a:rPr>
                 <a:t>16 logical</a:t>
               </a:r>
+              <a:endParaRPr lang="en-US" sz="1050" dirty="0">
+                <a:solidFill>
+                  <a:srgbClr val="657269"/>
+                </a:solidFill>
+                <a:latin typeface="+mn-lt"/>
+                <a:ea typeface="+mn-ea"/>
+                <a:cs typeface="+mn-cs"/>
+              </a:endParaRPr>
             </a:p>
           </p:txBody>
         </p:sp>
@@ -11457,6 +12418,14 @@
                 </a:rPr>
                 <a:t>3 active</a:t>
               </a:r>
+              <a:endParaRPr lang="en-US" sz="1050" dirty="0">
+                <a:solidFill>
+                  <a:srgbClr val="657269"/>
+                </a:solidFill>
+                <a:latin typeface="+mn-lt"/>
+                <a:ea typeface="+mn-ea"/>
+                <a:cs typeface="+mn-cs"/>
+              </a:endParaRPr>
             </a:p>
           </p:txBody>
         </p:sp>
@@ -11493,13 +12462,7 @@
       </p:sp>
       <p:grpSp>
         <p:nvGrpSpPr>
-          <p:cNvPr id="54" name="组合 53">
-            <a:extLst>
-              <a:ext uri="{FF2B5EF4-FFF2-40B4-BE49-F238E27FC236}">
-                <a16:creationId xmlns:a16="http://schemas.microsoft.com/office/drawing/2014/main" id="{FAD4E116-18EE-979F-E91A-264DD7999823}"/>
-              </a:ext>
-            </a:extLst>
-          </p:cNvPr>
+          <p:cNvPr id="54" name="组合 53"/>
           <p:cNvGrpSpPr/>
           <p:nvPr/>
         </p:nvGrpSpPr>
@@ -11610,6 +12573,14 @@
                 </a:rPr>
                 <a:t>5</a:t>
               </a:r>
+              <a:endParaRPr lang="en-US" sz="1050" b="1" dirty="0">
+                <a:solidFill>
+                  <a:srgbClr val="52765A"/>
+                </a:solidFill>
+                <a:latin typeface="+mn-lt"/>
+                <a:ea typeface="+mn-ea"/>
+                <a:cs typeface="+mn-cs"/>
+              </a:endParaRPr>
             </a:p>
           </p:txBody>
         </p:sp>
@@ -11650,6 +12621,14 @@
                 </a:rPr>
                 <a:t>Bridge</a:t>
               </a:r>
+              <a:endParaRPr lang="en-US" sz="1280" b="1" dirty="0">
+                <a:solidFill>
+                  <a:srgbClr val="1D2B24"/>
+                </a:solidFill>
+                <a:latin typeface="+mn-lt"/>
+                <a:ea typeface="+mn-ea"/>
+                <a:cs typeface="+mn-cs"/>
+              </a:endParaRPr>
             </a:p>
           </p:txBody>
         </p:sp>
@@ -11690,6 +12669,14 @@
                 </a:rPr>
                 <a:t>native owner</a:t>
               </a:r>
+              <a:endParaRPr lang="en-US" sz="1050" dirty="0">
+                <a:solidFill>
+                  <a:srgbClr val="657269"/>
+                </a:solidFill>
+                <a:latin typeface="+mn-lt"/>
+                <a:ea typeface="+mn-ea"/>
+                <a:cs typeface="+mn-cs"/>
+              </a:endParaRPr>
             </a:p>
           </p:txBody>
         </p:sp>
@@ -11773,13 +12760,7 @@
       </p:grpSp>
       <p:grpSp>
         <p:nvGrpSpPr>
-          <p:cNvPr id="55" name="组合 54">
-            <a:extLst>
-              <a:ext uri="{FF2B5EF4-FFF2-40B4-BE49-F238E27FC236}">
-                <a16:creationId xmlns:a16="http://schemas.microsoft.com/office/drawing/2014/main" id="{DCE6014F-0BF5-4F85-4CAC-568D273A39FD}"/>
-              </a:ext>
-            </a:extLst>
-          </p:cNvPr>
+          <p:cNvPr id="55" name="组合 54"/>
           <p:cNvGrpSpPr/>
           <p:nvPr/>
         </p:nvGrpSpPr>
@@ -11859,6 +12840,14 @@
                 </a:rPr>
                 <a:t>RETARGETING RULES</a:t>
               </a:r>
+              <a:endParaRPr lang="en-US" sz="900" b="1" spc="98" dirty="0">
+                <a:solidFill>
+                  <a:srgbClr val="52765A"/>
+                </a:solidFill>
+                <a:latin typeface="+mn-lt"/>
+                <a:ea typeface="+mn-ea"/>
+                <a:cs typeface="+mn-cs"/>
+              </a:endParaRPr>
             </a:p>
           </p:txBody>
         </p:sp>
@@ -11887,7 +12876,7 @@
             </a:bodyPr>
             <a:lstStyle/>
             <a:p>
-              <a:pPr marL="89312" indent="-89312" algn="l">
+              <a:pPr marL="89535" indent="-89535" algn="l">
                 <a:buClr>
                   <a:srgbClr val="1D2B24"/>
                 </a:buClr>
@@ -11906,6 +12895,14 @@
                 </a:rPr>
                 <a:t>Wrist orientation is expressed in the palm-local frame before DexPilot.</a:t>
               </a:r>
+              <a:endParaRPr lang="en-US" sz="1120" dirty="0">
+                <a:solidFill>
+                  <a:srgbClr val="1D2B24"/>
+                </a:solidFill>
+                <a:latin typeface="+mn-lt"/>
+                <a:ea typeface="+mn-ea"/>
+                <a:cs typeface="+mn-cs"/>
+              </a:endParaRPr>
             </a:p>
           </p:txBody>
         </p:sp>
@@ -11934,7 +12931,7 @@
             </a:bodyPr>
             <a:lstStyle/>
             <a:p>
-              <a:pPr marL="89312" indent="-89312" algn="l">
+              <a:pPr marL="89535" indent="-89535" algn="l">
                 <a:buClr>
                   <a:srgbClr val="1D2B24"/>
                 </a:buClr>
@@ -11953,6 +12950,14 @@
                 </a:rPr>
                 <a:t>Index / middle / ring joint4 are passive observations; the bridge fills them from the latest measured values.</a:t>
               </a:r>
+              <a:endParaRPr lang="en-US" sz="1120" dirty="0">
+                <a:solidFill>
+                  <a:srgbClr val="1D2B24"/>
+                </a:solidFill>
+                <a:latin typeface="+mn-lt"/>
+                <a:ea typeface="+mn-ea"/>
+                <a:cs typeface="+mn-cs"/>
+              </a:endParaRPr>
             </a:p>
           </p:txBody>
         </p:sp>
@@ -11981,7 +12986,7 @@
             </a:bodyPr>
             <a:lstStyle/>
             <a:p>
-              <a:pPr marL="89312" indent="-89312" algn="l">
+              <a:pPr marL="89535" indent="-89535" algn="l">
                 <a:buClr>
                   <a:srgbClr val="1D2B24"/>
                 </a:buClr>
@@ -12000,19 +13005,21 @@
                 </a:rPr>
                 <a:t>Valid tracking is required before targets are sent; missing wrist orientation means no target.</a:t>
               </a:r>
+              <a:endParaRPr lang="en-US" sz="1120" dirty="0">
+                <a:solidFill>
+                  <a:srgbClr val="1D2B24"/>
+                </a:solidFill>
+                <a:latin typeface="+mn-lt"/>
+                <a:ea typeface="+mn-ea"/>
+                <a:cs typeface="+mn-cs"/>
+              </a:endParaRPr>
             </a:p>
           </p:txBody>
         </p:sp>
       </p:grpSp>
       <p:grpSp>
         <p:nvGrpSpPr>
-          <p:cNvPr id="56" name="组合 55">
-            <a:extLst>
-              <a:ext uri="{FF2B5EF4-FFF2-40B4-BE49-F238E27FC236}">
-                <a16:creationId xmlns:a16="http://schemas.microsoft.com/office/drawing/2014/main" id="{11B6C031-379B-FDF0-F24B-5574E1563046}"/>
-              </a:ext>
-            </a:extLst>
-          </p:cNvPr>
+          <p:cNvPr id="56" name="组合 55"/>
           <p:cNvGrpSpPr/>
           <p:nvPr/>
         </p:nvGrpSpPr>
@@ -12092,22 +13099,23 @@
                 </a:rPr>
                 <a:t>Watchdog behavior: no fresh command → stop using old targets; fault recovery never auto-enables or auto-resumes.</a:t>
               </a:r>
+              <a:endParaRPr lang="en-US" sz="1050" b="1" dirty="0">
+                <a:solidFill>
+                  <a:srgbClr val="1D2B24"/>
+                </a:solidFill>
+                <a:latin typeface="+mn-lt"/>
+                <a:ea typeface="+mn-ea"/>
+                <a:cs typeface="+mn-cs"/>
+              </a:endParaRPr>
             </a:p>
           </p:txBody>
         </p:sp>
       </p:grpSp>
     </p:spTree>
   </p:cSld>
-  <p:transition xmlns:p="http://schemas.openxmlformats.org/presentationml/2006/main" spd="slow">
-    <p:fade/>
-  </p:transition>
   <p:clrMapOvr>
     <a:masterClrMapping/>
   </p:clrMapOvr>
-  <mc:AlternateContent xmlns:mc="http://schemas.openxmlformats.org/markup-compatibility/2006">
-    <mc:Choice xmlns:p14="http://schemas.microsoft.com/office/powerpoint/2010/main" Requires="p14"/>
-    <mc:Fallback/>
-  </mc:AlternateContent>
 </p:sld>
 </file>
 
@@ -12173,6 +13181,14 @@
               </a:rPr>
               <a:t>05 / EXECUTION &amp; SAFETY</a:t>
             </a:r>
+            <a:endParaRPr lang="en-US" sz="900" b="1" spc="120" dirty="0">
+              <a:solidFill>
+                <a:srgbClr val="52765A"/>
+              </a:solidFill>
+              <a:latin typeface="+mn-lt"/>
+              <a:ea typeface="+mn-ea"/>
+              <a:cs typeface="+mn-cs"/>
+            </a:endParaRPr>
           </a:p>
         </p:txBody>
       </p:sp>
@@ -12213,6 +13229,14 @@
               </a:rPr>
               <a:t>Impedance control is a mode inside a fail-closed state machine</a:t>
             </a:r>
+            <a:endParaRPr lang="en-US" sz="2250" b="1" dirty="0">
+              <a:solidFill>
+                <a:srgbClr val="1D2B24"/>
+              </a:solidFill>
+              <a:latin typeface="+mn-lt"/>
+              <a:ea typeface="+mn-ea"/>
+              <a:cs typeface="+mn-cs"/>
+            </a:endParaRPr>
           </a:p>
         </p:txBody>
       </p:sp>
@@ -12253,6 +13277,14 @@
               </a:rPr>
               <a:t>The operator can move the system only after explicit readiness, authorization, and fresh communication.</a:t>
             </a:r>
+            <a:endParaRPr lang="en-US" sz="1200" dirty="0">
+              <a:solidFill>
+                <a:srgbClr val="657269"/>
+              </a:solidFill>
+              <a:latin typeface="+mn-lt"/>
+              <a:ea typeface="+mn-ea"/>
+              <a:cs typeface="+mn-cs"/>
+            </a:endParaRPr>
           </a:p>
         </p:txBody>
       </p:sp>
@@ -12336,6 +13368,14 @@
               </a:rPr>
               <a:t>DEXMAN_LEROBOT / VR TELEOPERATION SYSTEM</a:t>
             </a:r>
+            <a:endParaRPr lang="en-US" sz="750" b="1" spc="60" dirty="0">
+              <a:solidFill>
+                <a:srgbClr val="657269"/>
+              </a:solidFill>
+              <a:latin typeface="+mn-lt"/>
+              <a:ea typeface="+mn-ea"/>
+              <a:cs typeface="+mn-cs"/>
+            </a:endParaRPr>
           </a:p>
         </p:txBody>
       </p:sp>
@@ -12376,6 +13416,14 @@
               </a:rPr>
               <a:t>05 / 10</a:t>
             </a:r>
+            <a:endParaRPr lang="en-US" sz="750" b="1" dirty="0">
+              <a:solidFill>
+                <a:srgbClr val="657269"/>
+              </a:solidFill>
+              <a:latin typeface="+mn-lt"/>
+              <a:ea typeface="+mn-ea"/>
+              <a:cs typeface="+mn-cs"/>
+            </a:endParaRPr>
           </a:p>
         </p:txBody>
       </p:sp>
@@ -12449,6 +13497,14 @@
               </a:rPr>
               <a:t>ARM EXECUTION</a:t>
             </a:r>
+            <a:endParaRPr lang="en-US" sz="1050" b="1" spc="90" dirty="0">
+              <a:solidFill>
+                <a:srgbClr val="52765A"/>
+              </a:solidFill>
+              <a:latin typeface="+mn-lt"/>
+              <a:ea typeface="+mn-ea"/>
+              <a:cs typeface="+mn-cs"/>
+            </a:endParaRPr>
           </a:p>
         </p:txBody>
       </p:sp>
@@ -12520,6 +13576,14 @@
               </a:rPr>
               <a:t>POSITION</a:t>
             </a:r>
+            <a:endParaRPr lang="en-US" sz="1350" b="1" dirty="0">
+              <a:solidFill>
+                <a:srgbClr val="1D2B24"/>
+              </a:solidFill>
+              <a:latin typeface="+mn-lt"/>
+              <a:ea typeface="+mn-ea"/>
+              <a:cs typeface="+mn-cs"/>
+            </a:endParaRPr>
           </a:p>
         </p:txBody>
       </p:sp>
@@ -12560,6 +13624,14 @@
               </a:rPr>
               <a:t>servoJ_ex • ah_t 0.05 • gain 150</a:t>
             </a:r>
+            <a:endParaRPr lang="en-US" sz="900" dirty="0">
+              <a:solidFill>
+                <a:srgbClr val="657269"/>
+              </a:solidFill>
+              <a:latin typeface="+mn-lt"/>
+              <a:ea typeface="+mn-ea"/>
+              <a:cs typeface="+mn-cs"/>
+            </a:endParaRPr>
           </a:p>
         </p:txBody>
       </p:sp>
@@ -12631,6 +13703,14 @@
               </a:rPr>
               <a:t>CARTESIAN IMPEDANCE</a:t>
             </a:r>
+            <a:endParaRPr lang="en-US" sz="1350" b="1" dirty="0">
+              <a:solidFill>
+                <a:srgbClr val="1D2B24"/>
+              </a:solidFill>
+              <a:latin typeface="+mn-lt"/>
+              <a:ea typeface="+mn-ea"/>
+              <a:cs typeface="+mn-cs"/>
+            </a:endParaRPr>
           </a:p>
         </p:txBody>
       </p:sp>
@@ -12671,6 +13751,14 @@
               </a:rPr>
               <a:t>set once per mode switch</a:t>
             </a:r>
+            <a:endParaRPr lang="en-US" sz="900" dirty="0">
+              <a:solidFill>
+                <a:srgbClr val="657269"/>
+              </a:solidFill>
+              <a:latin typeface="+mn-lt"/>
+              <a:ea typeface="+mn-ea"/>
+              <a:cs typeface="+mn-cs"/>
+            </a:endParaRPr>
           </a:p>
         </p:txBody>
       </p:sp>
@@ -12711,6 +13799,14 @@
               </a:rPr>
               <a:t>Mode switch</a:t>
             </a:r>
+            <a:endParaRPr lang="en-US" sz="1050" b="1" dirty="0">
+              <a:solidFill>
+                <a:srgbClr val="1D2B24"/>
+              </a:solidFill>
+              <a:latin typeface="+mn-lt"/>
+              <a:ea typeface="+mn-ea"/>
+              <a:cs typeface="+mn-cs"/>
+            </a:endParaRPr>
           </a:p>
         </p:txBody>
       </p:sp>
@@ -12751,6 +13847,14 @@
               </a:rPr>
               <a:t>stop servo → change mode → resume</a:t>
             </a:r>
+            <a:endParaRPr lang="en-US" sz="1050" dirty="0">
+              <a:solidFill>
+                <a:srgbClr val="657269"/>
+              </a:solidFill>
+              <a:latin typeface="+mn-lt"/>
+              <a:ea typeface="+mn-ea"/>
+              <a:cs typeface="+mn-cs"/>
+            </a:endParaRPr>
           </a:p>
         </p:txBody>
       </p:sp>
@@ -12791,6 +13895,14 @@
               </a:rPr>
               <a:t>Normal follow</a:t>
             </a:r>
+            <a:endParaRPr lang="en-US" sz="1050" b="1" dirty="0">
+              <a:solidFill>
+                <a:srgbClr val="1D2B24"/>
+              </a:solidFill>
+              <a:latin typeface="+mn-lt"/>
+              <a:ea typeface="+mn-ea"/>
+              <a:cs typeface="+mn-cs"/>
+            </a:endParaRPr>
           </a:p>
         </p:txBody>
       </p:sp>
@@ -12831,6 +13943,14 @@
               </a:rPr>
               <a:t>servo horizon = max(40 ms, planning dt)</a:t>
             </a:r>
+            <a:endParaRPr lang="en-US" sz="1050" dirty="0">
+              <a:solidFill>
+                <a:srgbClr val="657269"/>
+              </a:solidFill>
+              <a:latin typeface="+mn-lt"/>
+              <a:ea typeface="+mn-ea"/>
+              <a:cs typeface="+mn-cs"/>
+            </a:endParaRPr>
           </a:p>
         </p:txBody>
       </p:sp>
@@ -12902,6 +14022,14 @@
               </a:rPr>
               <a:t>READY GATES</a:t>
             </a:r>
+            <a:endParaRPr lang="en-US" sz="900" b="1" dirty="0">
+              <a:solidFill>
+                <a:srgbClr val="52765A"/>
+              </a:solidFill>
+              <a:latin typeface="+mn-lt"/>
+              <a:ea typeface="+mn-ea"/>
+              <a:cs typeface="+mn-cs"/>
+            </a:endParaRPr>
           </a:p>
         </p:txBody>
       </p:sp>
@@ -13004,6 +14132,14 @@
               </a:rPr>
               <a:t>PREPARE</a:t>
             </a:r>
+            <a:endParaRPr lang="en-US" sz="1120" b="1" dirty="0">
+              <a:solidFill>
+                <a:srgbClr val="1D2B24"/>
+              </a:solidFill>
+              <a:latin typeface="+mn-lt"/>
+              <a:ea typeface="+mn-ea"/>
+              <a:cs typeface="+mn-cs"/>
+            </a:endParaRPr>
           </a:p>
         </p:txBody>
       </p:sp>
@@ -13044,6 +14180,14 @@
               </a:rPr>
               <a:t>fresh hand + arm state</a:t>
             </a:r>
+            <a:endParaRPr lang="en-US" sz="980" dirty="0">
+              <a:solidFill>
+                <a:srgbClr val="657269"/>
+              </a:solidFill>
+              <a:latin typeface="+mn-lt"/>
+              <a:ea typeface="+mn-ea"/>
+              <a:cs typeface="+mn-cs"/>
+            </a:endParaRPr>
           </a:p>
         </p:txBody>
       </p:sp>
@@ -13156,6 +14300,14 @@
               </a:rPr>
               <a:t>AUTHORIZE</a:t>
             </a:r>
+            <a:endParaRPr lang="en-US" sz="1120" b="1" dirty="0">
+              <a:solidFill>
+                <a:srgbClr val="1D2B24"/>
+              </a:solidFill>
+              <a:latin typeface="+mn-lt"/>
+              <a:ea typeface="+mn-ea"/>
+              <a:cs typeface="+mn-cs"/>
+            </a:endParaRPr>
           </a:p>
         </p:txBody>
       </p:sp>
@@ -13196,6 +14348,14 @@
               </a:rPr>
               <a:t>computer + VR ready</a:t>
             </a:r>
+            <a:endParaRPr lang="en-US" sz="980" dirty="0">
+              <a:solidFill>
+                <a:srgbClr val="657269"/>
+              </a:solidFill>
+              <a:latin typeface="+mn-lt"/>
+              <a:ea typeface="+mn-ea"/>
+              <a:cs typeface="+mn-cs"/>
+            </a:endParaRPr>
           </a:p>
         </p:txBody>
       </p:sp>
@@ -13308,6 +14468,14 @@
               </a:rPr>
               <a:t>FOLLOW</a:t>
             </a:r>
+            <a:endParaRPr lang="en-US" sz="1120" b="1" dirty="0">
+              <a:solidFill>
+                <a:srgbClr val="1D2B24"/>
+              </a:solidFill>
+              <a:latin typeface="+mn-lt"/>
+              <a:ea typeface="+mn-ea"/>
+              <a:cs typeface="+mn-cs"/>
+            </a:endParaRPr>
           </a:p>
         </p:txBody>
       </p:sp>
@@ -13348,6 +14516,14 @@
               </a:rPr>
               <a:t>grip held, target fresh</a:t>
             </a:r>
+            <a:endParaRPr lang="en-US" sz="980" dirty="0">
+              <a:solidFill>
+                <a:srgbClr val="657269"/>
+              </a:solidFill>
+              <a:latin typeface="+mn-lt"/>
+              <a:ea typeface="+mn-ea"/>
+              <a:cs typeface="+mn-cs"/>
+            </a:endParaRPr>
           </a:p>
         </p:txBody>
       </p:sp>
@@ -13460,6 +14636,14 @@
               </a:rPr>
               <a:t>LATCHED STOP</a:t>
             </a:r>
+            <a:endParaRPr lang="en-US" sz="1120" b="1" dirty="0">
+              <a:solidFill>
+                <a:srgbClr val="1D2B24"/>
+              </a:solidFill>
+              <a:latin typeface="+mn-lt"/>
+              <a:ea typeface="+mn-ea"/>
+              <a:cs typeface="+mn-cs"/>
+            </a:endParaRPr>
           </a:p>
         </p:txBody>
       </p:sp>
@@ -13500,6 +14684,14 @@
               </a:rPr>
               <a:t>X / watchdog / SDK fault</a:t>
             </a:r>
+            <a:endParaRPr lang="en-US" sz="980" dirty="0">
+              <a:solidFill>
+                <a:srgbClr val="657269"/>
+              </a:solidFill>
+              <a:latin typeface="+mn-lt"/>
+              <a:ea typeface="+mn-ea"/>
+              <a:cs typeface="+mn-cs"/>
+            </a:endParaRPr>
           </a:p>
         </p:txBody>
       </p:sp>
@@ -13571,6 +14763,14 @@
               </a:rPr>
               <a:t>NON-NEGOTIABLES</a:t>
             </a:r>
+            <a:endParaRPr lang="en-US" sz="1050" b="1" spc="90" dirty="0">
+              <a:solidFill>
+                <a:srgbClr val="A7C6A5"/>
+              </a:solidFill>
+              <a:latin typeface="+mn-lt"/>
+              <a:ea typeface="+mn-ea"/>
+              <a:cs typeface="+mn-cs"/>
+            </a:endParaRPr>
           </a:p>
         </p:txBody>
       </p:sp>
@@ -13642,6 +14842,14 @@
               </a:rPr>
               <a:t>200 ms</a:t>
             </a:r>
+            <a:endParaRPr lang="en-US" sz="900" b="1" dirty="0">
+              <a:solidFill>
+                <a:srgbClr val="FFFFFF"/>
+              </a:solidFill>
+              <a:latin typeface="+mn-lt"/>
+              <a:ea typeface="+mn-ea"/>
+              <a:cs typeface="+mn-cs"/>
+            </a:endParaRPr>
           </a:p>
         </p:txBody>
       </p:sp>
@@ -13682,6 +14890,14 @@
               </a:rPr>
               <a:t>packet age → latch violation</a:t>
             </a:r>
+            <a:endParaRPr lang="en-US" sz="900" dirty="0">
+              <a:solidFill>
+                <a:srgbClr val="E8F0E8"/>
+              </a:solidFill>
+              <a:latin typeface="+mn-lt"/>
+              <a:ea typeface="+mn-ea"/>
+              <a:cs typeface="+mn-cs"/>
+            </a:endParaRPr>
           </a:p>
         </p:txBody>
       </p:sp>
@@ -13753,6 +14969,14 @@
               </a:rPr>
               <a:t>X</a:t>
             </a:r>
+            <a:endParaRPr lang="en-US" sz="900" b="1" dirty="0">
+              <a:solidFill>
+                <a:srgbClr val="FFFFFF"/>
+              </a:solidFill>
+              <a:latin typeface="+mn-lt"/>
+              <a:ea typeface="+mn-ea"/>
+              <a:cs typeface="+mn-cs"/>
+            </a:endParaRPr>
           </a:p>
         </p:txBody>
       </p:sp>
@@ -13793,6 +15017,14 @@
               </a:rPr>
               <a:t>software soft stop</a:t>
             </a:r>
+            <a:endParaRPr lang="en-US" sz="900" dirty="0">
+              <a:solidFill>
+                <a:srgbClr val="E8F0E8"/>
+              </a:solidFill>
+              <a:latin typeface="+mn-lt"/>
+              <a:ea typeface="+mn-ea"/>
+              <a:cs typeface="+mn-cs"/>
+            </a:endParaRPr>
           </a:p>
         </p:txBody>
       </p:sp>
@@ -13864,6 +15096,14 @@
               </a:rPr>
               <a:t>Y</a:t>
             </a:r>
+            <a:endParaRPr lang="en-US" sz="900" b="1" dirty="0">
+              <a:solidFill>
+                <a:srgbClr val="FFFFFF"/>
+              </a:solidFill>
+              <a:latin typeface="+mn-lt"/>
+              <a:ea typeface="+mn-ea"/>
+              <a:cs typeface="+mn-cs"/>
+            </a:endParaRPr>
           </a:p>
         </p:txBody>
       </p:sp>
@@ -13904,6 +15144,14 @@
               </a:rPr>
               <a:t>full controller recovery unlocks</a:t>
             </a:r>
+            <a:endParaRPr lang="en-US" sz="900" dirty="0">
+              <a:solidFill>
+                <a:srgbClr val="E8F0E8"/>
+              </a:solidFill>
+              <a:latin typeface="+mn-lt"/>
+              <a:ea typeface="+mn-ea"/>
+              <a:cs typeface="+mn-cs"/>
+            </a:endParaRPr>
           </a:p>
         </p:txBody>
       </p:sp>
@@ -13975,6 +15223,14 @@
               </a:rPr>
               <a:t>Grip / B</a:t>
             </a:r>
+            <a:endParaRPr lang="en-US" sz="900" b="1" dirty="0">
+              <a:solidFill>
+                <a:srgbClr val="FFFFFF"/>
+              </a:solidFill>
+              <a:latin typeface="+mn-lt"/>
+              <a:ea typeface="+mn-ea"/>
+              <a:cs typeface="+mn-cs"/>
+            </a:endParaRPr>
           </a:p>
         </p:txBody>
       </p:sp>
@@ -14015,6 +15271,14 @@
               </a:rPr>
               <a:t>stop refresh; clear reference</a:t>
             </a:r>
+            <a:endParaRPr lang="en-US" sz="900" dirty="0">
+              <a:solidFill>
+                <a:srgbClr val="E8F0E8"/>
+              </a:solidFill>
+              <a:latin typeface="+mn-lt"/>
+              <a:ea typeface="+mn-ea"/>
+              <a:cs typeface="+mn-cs"/>
+            </a:endParaRPr>
           </a:p>
         </p:txBody>
       </p:sp>
@@ -14086,6 +15350,14 @@
               </a:rPr>
               <a:t>Collision</a:t>
             </a:r>
+            <a:endParaRPr lang="en-US" sz="900" b="1" dirty="0">
+              <a:solidFill>
+                <a:srgbClr val="FFFFFF"/>
+              </a:solidFill>
+              <a:latin typeface="+mn-lt"/>
+              <a:ea typeface="+mn-ea"/>
+              <a:cs typeface="+mn-cs"/>
+            </a:endParaRPr>
           </a:p>
         </p:txBody>
       </p:sp>
@@ -14126,6 +15398,14 @@
               </a:rPr>
               <a:t>controller + model checks stay on</a:t>
             </a:r>
+            <a:endParaRPr lang="en-US" sz="900" dirty="0">
+              <a:solidFill>
+                <a:srgbClr val="E8F0E8"/>
+              </a:solidFill>
+              <a:latin typeface="+mn-lt"/>
+              <a:ea typeface="+mn-ea"/>
+              <a:cs typeface="+mn-cs"/>
+            </a:endParaRPr>
           </a:p>
         </p:txBody>
       </p:sp>
@@ -14197,26 +15477,27 @@
               </a:rPr>
               <a:t>Safety is layered: model constraints, watchdogs, controller collision detection, explicit recovery, and a reachable physical emergency stop.</a:t>
             </a:r>
+            <a:endParaRPr lang="en-US" sz="1050" b="1" dirty="0">
+              <a:solidFill>
+                <a:srgbClr val="1D2B24"/>
+              </a:solidFill>
+              <a:latin typeface="+mn-lt"/>
+              <a:ea typeface="+mn-ea"/>
+              <a:cs typeface="+mn-cs"/>
+            </a:endParaRPr>
           </a:p>
         </p:txBody>
       </p:sp>
     </p:spTree>
   </p:cSld>
-  <p:transition xmlns:p="http://schemas.openxmlformats.org/presentationml/2006/main" spd="slow">
-    <p:fade/>
-  </p:transition>
   <p:clrMapOvr>
     <a:masterClrMapping/>
   </p:clrMapOvr>
-  <mc:AlternateContent xmlns:mc="http://schemas.openxmlformats.org/markup-compatibility/2006">
-    <mc:Choice xmlns:p14="http://schemas.microsoft.com/office/powerpoint/2010/main" Requires="p14"/>
-    <mc:Fallback/>
-  </mc:AlternateContent>
 </p:sld>
 </file>
 
 <file path=ppt/slides/slide6.xml><?xml version="1.0" encoding="utf-8"?>
-<p:sld xmlns:a="http://schemas.openxmlformats.org/drawingml/2006/main" xmlns:p="http://schemas.openxmlformats.org/presentationml/2006/main" xmlns:r="http://schemas.openxmlformats.org/officeDocument/2006/relationships">
+<p:sld xmlns:a="http://schemas.openxmlformats.org/drawingml/2006/main" xmlns:r="http://schemas.openxmlformats.org/officeDocument/2006/relationships" xmlns:p="http://schemas.openxmlformats.org/presentationml/2006/main">
   <p:cSld>
     <p:bg>
       <p:bgPr>
@@ -14250,7 +15531,7 @@
           <a:noFill/>
         </p:spPr>
         <p:txBody>
-          <a:bodyPr wrap="square" lIns="0" rIns="0" tIns="0" bIns="0" anchor="t">
+          <a:bodyPr wrap="square" lIns="0" tIns="0" rIns="0" bIns="0" anchor="t">
             <a:spAutoFit/>
           </a:bodyPr>
           <a:lstStyle/>
@@ -14268,12 +15549,20 @@
                 <a:solidFill>
                   <a:srgbClr val="52765A"/>
                 </a:solidFill>
-                <a:latin typeface="Arial"/>
-                <a:ea typeface="Arial"/>
-                <a:cs typeface="Arial"/>
+                <a:latin typeface="Arial" panose="020B0604020202090204"/>
+                <a:ea typeface="Arial" panose="020B0604020202090204"/>
+                <a:cs typeface="Arial" panose="020B0604020202090204"/>
               </a:rPr>
               <a:t>06 / WHY TACTILE ANALYSIS</a:t>
             </a:r>
+            <a:endParaRPr sz="900" b="1" i="0">
+              <a:solidFill>
+                <a:srgbClr val="52765A"/>
+              </a:solidFill>
+              <a:latin typeface="Arial" panose="020B0604020202090204"/>
+              <a:ea typeface="Arial" panose="020B0604020202090204"/>
+              <a:cs typeface="Arial" panose="020B0604020202090204"/>
+            </a:endParaRPr>
           </a:p>
         </p:txBody>
       </p:sp>
@@ -14294,7 +15583,7 @@
           <a:noFill/>
         </p:spPr>
         <p:txBody>
-          <a:bodyPr wrap="square" lIns="0" rIns="0" tIns="0" bIns="0" anchor="t">
+          <a:bodyPr wrap="square" lIns="0" tIns="0" rIns="0" bIns="0" anchor="t">
             <a:spAutoFit/>
           </a:bodyPr>
           <a:lstStyle/>
@@ -14312,12 +15601,20 @@
                 <a:solidFill>
                   <a:srgbClr val="1D2B24"/>
                 </a:solidFill>
-                <a:latin typeface="Arial"/>
-                <a:ea typeface="Arial"/>
-                <a:cs typeface="Arial"/>
+                <a:latin typeface="Arial" panose="020B0604020202090204"/>
+                <a:ea typeface="Arial" panose="020B0604020202090204"/>
+                <a:cs typeface="Arial" panose="020B0604020202090204"/>
               </a:rPr>
               <a:t>Tactile sensing makes contact behavior measurable</a:t>
             </a:r>
+            <a:endParaRPr sz="2250" b="1" i="0">
+              <a:solidFill>
+                <a:srgbClr val="1D2B24"/>
+              </a:solidFill>
+              <a:latin typeface="Arial" panose="020B0604020202090204"/>
+              <a:ea typeface="Arial" panose="020B0604020202090204"/>
+              <a:cs typeface="Arial" panose="020B0604020202090204"/>
+            </a:endParaRPr>
           </a:p>
         </p:txBody>
       </p:sp>
@@ -14338,7 +15635,7 @@
           <a:noFill/>
         </p:spPr>
         <p:txBody>
-          <a:bodyPr wrap="square" lIns="0" rIns="0" tIns="0" bIns="0" anchor="t">
+          <a:bodyPr wrap="square" lIns="0" tIns="0" rIns="0" bIns="0" anchor="t">
             <a:spAutoFit/>
           </a:bodyPr>
           <a:lstStyle/>
@@ -14356,12 +15653,20 @@
                 <a:solidFill>
                   <a:srgbClr val="657269"/>
                 </a:solidFill>
-                <a:latin typeface="Arial"/>
-                <a:ea typeface="Arial"/>
-                <a:cs typeface="Arial"/>
+                <a:latin typeface="Arial" panose="020B0604020202090204"/>
+                <a:ea typeface="Arial" panose="020B0604020202090204"/>
+                <a:cs typeface="Arial" panose="020B0604020202090204"/>
               </a:rPr>
               <a:t>Recorded tactile signals add evidence about the hand–object interaction during teleoperation.</a:t>
             </a:r>
+            <a:endParaRPr sz="1200" b="0" i="0">
+              <a:solidFill>
+                <a:srgbClr val="657269"/>
+              </a:solidFill>
+              <a:latin typeface="Arial" panose="020B0604020202090204"/>
+              <a:ea typeface="Arial" panose="020B0604020202090204"/>
+              <a:cs typeface="Arial" panose="020B0604020202090204"/>
+            </a:endParaRPr>
           </a:p>
         </p:txBody>
       </p:sp>
@@ -14417,7 +15722,7 @@
           <a:noFill/>
         </p:spPr>
         <p:txBody>
-          <a:bodyPr wrap="square" lIns="0" rIns="0" tIns="0" bIns="0" anchor="t">
+          <a:bodyPr wrap="square" lIns="0" tIns="0" rIns="0" bIns="0" anchor="t">
             <a:spAutoFit/>
           </a:bodyPr>
           <a:lstStyle/>
@@ -14435,12 +15740,20 @@
                 <a:solidFill>
                   <a:srgbClr val="657269"/>
                 </a:solidFill>
-                <a:latin typeface="Arial"/>
-                <a:ea typeface="Arial"/>
-                <a:cs typeface="Arial"/>
+                <a:latin typeface="Arial" panose="020B0604020202090204"/>
+                <a:ea typeface="Arial" panose="020B0604020202090204"/>
+                <a:cs typeface="Arial" panose="020B0604020202090204"/>
               </a:rPr>
               <a:t>DEXMAN_LEROBOT / VR TELEOPERATION SYSTEM</a:t>
             </a:r>
+            <a:endParaRPr sz="750" b="1" i="0">
+              <a:solidFill>
+                <a:srgbClr val="657269"/>
+              </a:solidFill>
+              <a:latin typeface="Arial" panose="020B0604020202090204"/>
+              <a:ea typeface="Arial" panose="020B0604020202090204"/>
+              <a:cs typeface="Arial" panose="020B0604020202090204"/>
+            </a:endParaRPr>
           </a:p>
         </p:txBody>
       </p:sp>
@@ -14461,7 +15774,7 @@
           <a:noFill/>
         </p:spPr>
         <p:txBody>
-          <a:bodyPr wrap="square" lIns="0" rIns="0" tIns="0" bIns="0" anchor="t">
+          <a:bodyPr wrap="square" lIns="0" tIns="0" rIns="0" bIns="0" anchor="t">
             <a:spAutoFit/>
           </a:bodyPr>
           <a:lstStyle/>
@@ -14479,12 +15792,20 @@
                 <a:solidFill>
                   <a:srgbClr val="657269"/>
                 </a:solidFill>
-                <a:latin typeface="Arial"/>
-                <a:ea typeface="Arial"/>
-                <a:cs typeface="Arial"/>
+                <a:latin typeface="Arial" panose="020B0604020202090204"/>
+                <a:ea typeface="Arial" panose="020B0604020202090204"/>
+                <a:cs typeface="Arial" panose="020B0604020202090204"/>
               </a:rPr>
               <a:t>06 / 10</a:t>
             </a:r>
+            <a:endParaRPr sz="750" b="1" i="0">
+              <a:solidFill>
+                <a:srgbClr val="657269"/>
+              </a:solidFill>
+              <a:latin typeface="Arial" panose="020B0604020202090204"/>
+              <a:ea typeface="Arial" panose="020B0604020202090204"/>
+              <a:cs typeface="Arial" panose="020B0604020202090204"/>
+            </a:endParaRPr>
           </a:p>
         </p:txBody>
       </p:sp>
@@ -14595,7 +15916,7 @@
           <a:noFill/>
         </p:spPr>
         <p:txBody>
-          <a:bodyPr wrap="square" lIns="0" rIns="0" tIns="0" bIns="0" anchor="t">
+          <a:bodyPr wrap="square" lIns="0" tIns="0" rIns="0" bIns="0" anchor="t">
             <a:spAutoFit/>
           </a:bodyPr>
           <a:lstStyle/>
@@ -14613,12 +15934,20 @@
                 <a:solidFill>
                   <a:srgbClr val="52765A"/>
                 </a:solidFill>
-                <a:latin typeface="Arial"/>
-                <a:ea typeface="Arial"/>
-                <a:cs typeface="Arial"/>
+                <a:latin typeface="Arial" panose="020B0604020202090204"/>
+                <a:ea typeface="Arial" panose="020B0604020202090204"/>
+                <a:cs typeface="Arial" panose="020B0604020202090204"/>
               </a:rPr>
               <a:t>UNDERSTAND INTERACTIONS</a:t>
             </a:r>
+            <a:endParaRPr sz="900" b="1" i="0">
+              <a:solidFill>
+                <a:srgbClr val="52765A"/>
+              </a:solidFill>
+              <a:latin typeface="Arial" panose="020B0604020202090204"/>
+              <a:ea typeface="Arial" panose="020B0604020202090204"/>
+              <a:cs typeface="Arial" panose="020B0604020202090204"/>
+            </a:endParaRPr>
           </a:p>
         </p:txBody>
       </p:sp>
@@ -14639,7 +15968,7 @@
           <a:noFill/>
         </p:spPr>
         <p:txBody>
-          <a:bodyPr wrap="square" lIns="0" rIns="0" tIns="0" bIns="0" anchor="t">
+          <a:bodyPr wrap="square" lIns="0" tIns="0" rIns="0" bIns="0" anchor="t">
             <a:spAutoFit/>
           </a:bodyPr>
           <a:lstStyle/>
@@ -14657,12 +15986,20 @@
                 <a:solidFill>
                   <a:srgbClr val="1D2B24"/>
                 </a:solidFill>
-                <a:latin typeface="Arial"/>
-                <a:ea typeface="Arial"/>
-                <a:cs typeface="Arial"/>
+                <a:latin typeface="Arial" panose="020B0604020202090204"/>
+                <a:ea typeface="Arial" panose="020B0604020202090204"/>
+                <a:cs typeface="Arial" panose="020B0604020202090204"/>
               </a:rPr>
               <a:t>When and where does</a:t>
             </a:r>
+            <a:endParaRPr sz="1700" b="1" i="0">
+              <a:solidFill>
+                <a:srgbClr val="1D2B24"/>
+              </a:solidFill>
+              <a:latin typeface="Arial" panose="020B0604020202090204"/>
+              <a:ea typeface="Arial" panose="020B0604020202090204"/>
+              <a:cs typeface="Arial" panose="020B0604020202090204"/>
+            </a:endParaRPr>
           </a:p>
           <a:p>
             <a:pPr algn="l">
@@ -14678,12 +16015,20 @@
                 <a:solidFill>
                   <a:srgbClr val="1D2B24"/>
                 </a:solidFill>
-                <a:latin typeface="Arial"/>
-                <a:ea typeface="Arial"/>
-                <a:cs typeface="Arial"/>
+                <a:latin typeface="Arial" panose="020B0604020202090204"/>
+                <a:ea typeface="Arial" panose="020B0604020202090204"/>
+                <a:cs typeface="Arial" panose="020B0604020202090204"/>
               </a:rPr>
               <a:t>the signal change?</a:t>
             </a:r>
+            <a:endParaRPr sz="1700" b="1" i="0">
+              <a:solidFill>
+                <a:srgbClr val="1D2B24"/>
+              </a:solidFill>
+              <a:latin typeface="Arial" panose="020B0604020202090204"/>
+              <a:ea typeface="Arial" panose="020B0604020202090204"/>
+              <a:cs typeface="Arial" panose="020B0604020202090204"/>
+            </a:endParaRPr>
           </a:p>
         </p:txBody>
       </p:sp>
@@ -14704,7 +16049,7 @@
           <a:noFill/>
         </p:spPr>
         <p:txBody>
-          <a:bodyPr wrap="square" lIns="0" rIns="0" tIns="0" bIns="0" anchor="t">
+          <a:bodyPr wrap="square" lIns="0" tIns="0" rIns="0" bIns="0" anchor="t">
             <a:spAutoFit/>
           </a:bodyPr>
           <a:lstStyle/>
@@ -14722,12 +16067,20 @@
                 <a:solidFill>
                   <a:srgbClr val="657269"/>
                 </a:solidFill>
-                <a:latin typeface="Arial"/>
-                <a:ea typeface="Arial"/>
-                <a:cs typeface="Arial"/>
+                <a:latin typeface="Arial" panose="020B0604020202090204"/>
+                <a:ea typeface="Arial" panose="020B0604020202090204"/>
+                <a:cs typeface="Arial" panose="020B0604020202090204"/>
               </a:rPr>
               <a:t>Inspect response intervals, peaks,</a:t>
             </a:r>
+            <a:endParaRPr sz="1120" b="0" i="0">
+              <a:solidFill>
+                <a:srgbClr val="657269"/>
+              </a:solidFill>
+              <a:latin typeface="Arial" panose="020B0604020202090204"/>
+              <a:ea typeface="Arial" panose="020B0604020202090204"/>
+              <a:cs typeface="Arial" panose="020B0604020202090204"/>
+            </a:endParaRPr>
           </a:p>
           <a:p>
             <a:pPr algn="l">
@@ -14743,12 +16096,20 @@
                 <a:solidFill>
                   <a:srgbClr val="657269"/>
                 </a:solidFill>
-                <a:latin typeface="Arial"/>
-                <a:ea typeface="Arial"/>
-                <a:cs typeface="Arial"/>
+                <a:latin typeface="Arial" panose="020B0604020202090204"/>
+                <a:ea typeface="Arial" panose="020B0604020202090204"/>
+                <a:cs typeface="Arial" panose="020B0604020202090204"/>
               </a:rPr>
               <a:t>and the distribution across taxels.</a:t>
             </a:r>
+            <a:endParaRPr sz="1120" b="0" i="0">
+              <a:solidFill>
+                <a:srgbClr val="657269"/>
+              </a:solidFill>
+              <a:latin typeface="Arial" panose="020B0604020202090204"/>
+              <a:ea typeface="Arial" panose="020B0604020202090204"/>
+              <a:cs typeface="Arial" panose="020B0604020202090204"/>
+            </a:endParaRPr>
           </a:p>
         </p:txBody>
       </p:sp>
@@ -14804,7 +16165,7 @@
           <a:noFill/>
         </p:spPr>
         <p:txBody>
-          <a:bodyPr wrap="square" lIns="0" rIns="0" tIns="0" bIns="0" anchor="t">
+          <a:bodyPr wrap="square" lIns="0" tIns="0" rIns="0" bIns="0" anchor="t">
             <a:spAutoFit/>
           </a:bodyPr>
           <a:lstStyle/>
@@ -14822,12 +16183,20 @@
                 <a:solidFill>
                   <a:srgbClr val="52765A"/>
                 </a:solidFill>
-                <a:latin typeface="Arial"/>
-                <a:ea typeface="Arial"/>
-                <a:cs typeface="Arial"/>
+                <a:latin typeface="Arial" panose="020B0604020202090204"/>
+                <a:ea typeface="Arial" panose="020B0604020202090204"/>
+                <a:cs typeface="Arial" panose="020B0604020202090204"/>
               </a:rPr>
               <a:t>After validation</a:t>
             </a:r>
+            <a:endParaRPr sz="1120" b="1" i="0">
+              <a:solidFill>
+                <a:srgbClr val="52765A"/>
+              </a:solidFill>
+              <a:latin typeface="Arial" panose="020B0604020202090204"/>
+              <a:ea typeface="Arial" panose="020B0604020202090204"/>
+              <a:cs typeface="Arial" panose="020B0604020202090204"/>
+            </a:endParaRPr>
           </a:p>
         </p:txBody>
       </p:sp>
@@ -14848,7 +16217,7 @@
           <a:noFill/>
         </p:spPr>
         <p:txBody>
-          <a:bodyPr wrap="square" lIns="0" rIns="0" tIns="0" bIns="0" anchor="t">
+          <a:bodyPr wrap="square" lIns="0" tIns="0" rIns="0" bIns="0" anchor="t">
             <a:spAutoFit/>
           </a:bodyPr>
           <a:lstStyle/>
@@ -14866,12 +16235,20 @@
                 <a:solidFill>
                   <a:srgbClr val="657269"/>
                 </a:solidFill>
-                <a:latin typeface="Arial"/>
-                <a:ea typeface="Arial"/>
-                <a:cs typeface="Arial"/>
+                <a:latin typeface="Arial" panose="020B0604020202090204"/>
+                <a:ea typeface="Arial" panose="020B0604020202090204"/>
+                <a:cs typeface="Arial" panose="020B0604020202090204"/>
               </a:rPr>
               <a:t>Relate measured force and pressure</a:t>
             </a:r>
+            <a:endParaRPr sz="1120" b="0" i="0">
+              <a:solidFill>
+                <a:srgbClr val="657269"/>
+              </a:solidFill>
+              <a:latin typeface="Arial" panose="020B0604020202090204"/>
+              <a:ea typeface="Arial" panose="020B0604020202090204"/>
+              <a:cs typeface="Arial" panose="020B0604020202090204"/>
+            </a:endParaRPr>
           </a:p>
           <a:p>
             <a:pPr algn="l">
@@ -14887,12 +16264,20 @@
                 <a:solidFill>
                   <a:srgbClr val="657269"/>
                 </a:solidFill>
-                <a:latin typeface="Arial"/>
-                <a:ea typeface="Arial"/>
-                <a:cs typeface="Arial"/>
+                <a:latin typeface="Arial" panose="020B0604020202090204"/>
+                <a:ea typeface="Arial" panose="020B0604020202090204"/>
+                <a:cs typeface="Arial" panose="020B0604020202090204"/>
               </a:rPr>
               <a:t>to contact phases in a task.</a:t>
             </a:r>
+            <a:endParaRPr sz="1120" b="0" i="0">
+              <a:solidFill>
+                <a:srgbClr val="657269"/>
+              </a:solidFill>
+              <a:latin typeface="Arial" panose="020B0604020202090204"/>
+              <a:ea typeface="Arial" panose="020B0604020202090204"/>
+              <a:cs typeface="Arial" panose="020B0604020202090204"/>
+            </a:endParaRPr>
           </a:p>
         </p:txBody>
       </p:sp>
@@ -15003,7 +16388,7 @@
           <a:noFill/>
         </p:spPr>
         <p:txBody>
-          <a:bodyPr wrap="square" lIns="0" rIns="0" tIns="0" bIns="0" anchor="t">
+          <a:bodyPr wrap="square" lIns="0" tIns="0" rIns="0" bIns="0" anchor="t">
             <a:spAutoFit/>
           </a:bodyPr>
           <a:lstStyle/>
@@ -15021,12 +16406,20 @@
                 <a:solidFill>
                   <a:srgbClr val="52765A"/>
                 </a:solidFill>
-                <a:latin typeface="Arial"/>
-                <a:ea typeface="Arial"/>
-                <a:cs typeface="Arial"/>
+                <a:latin typeface="Arial" panose="020B0604020202090204"/>
+                <a:ea typeface="Arial" panose="020B0604020202090204"/>
+                <a:cs typeface="Arial" panose="020B0604020202090204"/>
               </a:rPr>
               <a:t>IMPROVE EXPERIMENTS</a:t>
             </a:r>
+            <a:endParaRPr sz="900" b="1" i="0">
+              <a:solidFill>
+                <a:srgbClr val="52765A"/>
+              </a:solidFill>
+              <a:latin typeface="Arial" panose="020B0604020202090204"/>
+              <a:ea typeface="Arial" panose="020B0604020202090204"/>
+              <a:cs typeface="Arial" panose="020B0604020202090204"/>
+            </a:endParaRPr>
           </a:p>
         </p:txBody>
       </p:sp>
@@ -15047,7 +16440,7 @@
           <a:noFill/>
         </p:spPr>
         <p:txBody>
-          <a:bodyPr wrap="square" lIns="0" rIns="0" tIns="0" bIns="0" anchor="t">
+          <a:bodyPr wrap="square" lIns="0" tIns="0" rIns="0" bIns="0" anchor="t">
             <a:spAutoFit/>
           </a:bodyPr>
           <a:lstStyle/>
@@ -15065,12 +16458,20 @@
                 <a:solidFill>
                   <a:srgbClr val="1D2B24"/>
                 </a:solidFill>
-                <a:latin typeface="Arial"/>
-                <a:ea typeface="Arial"/>
-                <a:cs typeface="Arial"/>
+                <a:latin typeface="Arial" panose="020B0604020202090204"/>
+                <a:ea typeface="Arial" panose="020B0604020202090204"/>
+                <a:cs typeface="Arial" panose="020B0604020202090204"/>
               </a:rPr>
               <a:t>Can we trust</a:t>
             </a:r>
+            <a:endParaRPr sz="1700" b="1" i="0">
+              <a:solidFill>
+                <a:srgbClr val="1D2B24"/>
+              </a:solidFill>
+              <a:latin typeface="Arial" panose="020B0604020202090204"/>
+              <a:ea typeface="Arial" panose="020B0604020202090204"/>
+              <a:cs typeface="Arial" panose="020B0604020202090204"/>
+            </a:endParaRPr>
           </a:p>
           <a:p>
             <a:pPr algn="l">
@@ -15086,12 +16487,20 @@
                 <a:solidFill>
                   <a:srgbClr val="1D2B24"/>
                 </a:solidFill>
-                <a:latin typeface="Arial"/>
-                <a:ea typeface="Arial"/>
-                <a:cs typeface="Arial"/>
+                <a:latin typeface="Arial" panose="020B0604020202090204"/>
+                <a:ea typeface="Arial" panose="020B0604020202090204"/>
+                <a:cs typeface="Arial" panose="020B0604020202090204"/>
               </a:rPr>
               <a:t>the recording?</a:t>
             </a:r>
+            <a:endParaRPr sz="1700" b="1" i="0">
+              <a:solidFill>
+                <a:srgbClr val="1D2B24"/>
+              </a:solidFill>
+              <a:latin typeface="Arial" panose="020B0604020202090204"/>
+              <a:ea typeface="Arial" panose="020B0604020202090204"/>
+              <a:cs typeface="Arial" panose="020B0604020202090204"/>
+            </a:endParaRPr>
           </a:p>
         </p:txBody>
       </p:sp>
@@ -15112,7 +16521,7 @@
           <a:noFill/>
         </p:spPr>
         <p:txBody>
-          <a:bodyPr wrap="square" lIns="0" rIns="0" tIns="0" bIns="0" anchor="t">
+          <a:bodyPr wrap="square" lIns="0" tIns="0" rIns="0" bIns="0" anchor="t">
             <a:spAutoFit/>
           </a:bodyPr>
           <a:lstStyle/>
@@ -15130,12 +16539,20 @@
                 <a:solidFill>
                   <a:srgbClr val="657269"/>
                 </a:solidFill>
-                <a:latin typeface="Arial"/>
-                <a:ea typeface="Arial"/>
-                <a:cs typeface="Arial"/>
+                <a:latin typeface="Arial" panose="020B0604020202090204"/>
+                <a:ea typeface="Arial" panose="020B0604020202090204"/>
+                <a:cs typeface="Arial" panose="020B0604020202090204"/>
               </a:rPr>
               <a:t>Check masks, packet status, timing,</a:t>
             </a:r>
+            <a:endParaRPr sz="1120" b="0" i="0">
+              <a:solidFill>
+                <a:srgbClr val="657269"/>
+              </a:solidFill>
+              <a:latin typeface="Arial" panose="020B0604020202090204"/>
+              <a:ea typeface="Arial" panose="020B0604020202090204"/>
+              <a:cs typeface="Arial" panose="020B0604020202090204"/>
+            </a:endParaRPr>
           </a:p>
           <a:p>
             <a:pPr algn="l">
@@ -15151,12 +16568,20 @@
                 <a:solidFill>
                   <a:srgbClr val="657269"/>
                 </a:solidFill>
-                <a:latin typeface="Arial"/>
-                <a:ea typeface="Arial"/>
-                <a:cs typeface="Arial"/>
+                <a:latin typeface="Arial" panose="020B0604020202090204"/>
+                <a:ea typeface="Arial" panose="020B0604020202090204"/>
+                <a:cs typeface="Arial" panose="020B0604020202090204"/>
               </a:rPr>
               <a:t>zero / repeated values, and temperature.</a:t>
             </a:r>
+            <a:endParaRPr sz="1120" b="0" i="0">
+              <a:solidFill>
+                <a:srgbClr val="657269"/>
+              </a:solidFill>
+              <a:latin typeface="Arial" panose="020B0604020202090204"/>
+              <a:ea typeface="Arial" panose="020B0604020202090204"/>
+              <a:cs typeface="Arial" panose="020B0604020202090204"/>
+            </a:endParaRPr>
           </a:p>
         </p:txBody>
       </p:sp>
@@ -15212,7 +16637,7 @@
           <a:noFill/>
         </p:spPr>
         <p:txBody>
-          <a:bodyPr wrap="square" lIns="0" rIns="0" tIns="0" bIns="0" anchor="t">
+          <a:bodyPr wrap="square" lIns="0" tIns="0" rIns="0" bIns="0" anchor="t">
             <a:spAutoFit/>
           </a:bodyPr>
           <a:lstStyle/>
@@ -15230,12 +16655,20 @@
                 <a:solidFill>
                   <a:srgbClr val="52765A"/>
                 </a:solidFill>
-                <a:latin typeface="Arial"/>
-                <a:ea typeface="Arial"/>
-                <a:cs typeface="Arial"/>
+                <a:latin typeface="Arial" panose="020B0604020202090204"/>
+                <a:ea typeface="Arial" panose="020B0604020202090204"/>
+                <a:cs typeface="Arial" panose="020B0604020202090204"/>
               </a:rPr>
               <a:t>Practical value</a:t>
             </a:r>
+            <a:endParaRPr sz="1120" b="1" i="0">
+              <a:solidFill>
+                <a:srgbClr val="52765A"/>
+              </a:solidFill>
+              <a:latin typeface="Arial" panose="020B0604020202090204"/>
+              <a:ea typeface="Arial" panose="020B0604020202090204"/>
+              <a:cs typeface="Arial" panose="020B0604020202090204"/>
+            </a:endParaRPr>
           </a:p>
         </p:txBody>
       </p:sp>
@@ -15256,7 +16689,7 @@
           <a:noFill/>
         </p:spPr>
         <p:txBody>
-          <a:bodyPr wrap="square" lIns="0" rIns="0" tIns="0" bIns="0" anchor="t">
+          <a:bodyPr wrap="square" lIns="0" tIns="0" rIns="0" bIns="0" anchor="t">
             <a:spAutoFit/>
           </a:bodyPr>
           <a:lstStyle/>
@@ -15274,12 +16707,20 @@
                 <a:solidFill>
                   <a:srgbClr val="657269"/>
                 </a:solidFill>
-                <a:latin typeface="Arial"/>
-                <a:ea typeface="Arial"/>
-                <a:cs typeface="Arial"/>
+                <a:latin typeface="Arial" panose="020B0604020202090204"/>
+                <a:ea typeface="Arial" panose="020B0604020202090204"/>
+                <a:cs typeface="Arial" panose="020B0604020202090204"/>
               </a:rPr>
               <a:t>Find questionable intervals and</a:t>
             </a:r>
+            <a:endParaRPr sz="1120" b="0" i="0">
+              <a:solidFill>
+                <a:srgbClr val="657269"/>
+              </a:solidFill>
+              <a:latin typeface="Arial" panose="020B0604020202090204"/>
+              <a:ea typeface="Arial" panose="020B0604020202090204"/>
+              <a:cs typeface="Arial" panose="020B0604020202090204"/>
+            </a:endParaRPr>
           </a:p>
           <a:p>
             <a:pPr algn="l">
@@ -15295,12 +16736,20 @@
                 <a:solidFill>
                   <a:srgbClr val="657269"/>
                 </a:solidFill>
-                <a:latin typeface="Arial"/>
-                <a:ea typeface="Arial"/>
-                <a:cs typeface="Arial"/>
+                <a:latin typeface="Arial" panose="020B0604020202090204"/>
+                <a:ea typeface="Arial" panose="020B0604020202090204"/>
+                <a:cs typeface="Arial" panose="020B0604020202090204"/>
               </a:rPr>
               <a:t>plan controlled follow-up measurements.</a:t>
             </a:r>
+            <a:endParaRPr sz="1120" b="0" i="0">
+              <a:solidFill>
+                <a:srgbClr val="657269"/>
+              </a:solidFill>
+              <a:latin typeface="Arial" panose="020B0604020202090204"/>
+              <a:ea typeface="Arial" panose="020B0604020202090204"/>
+              <a:cs typeface="Arial" panose="020B0604020202090204"/>
+            </a:endParaRPr>
           </a:p>
         </p:txBody>
       </p:sp>
@@ -15411,7 +16860,7 @@
           <a:noFill/>
         </p:spPr>
         <p:txBody>
-          <a:bodyPr wrap="square" lIns="0" rIns="0" tIns="0" bIns="0" anchor="t">
+          <a:bodyPr wrap="square" lIns="0" tIns="0" rIns="0" bIns="0" anchor="t">
             <a:spAutoFit/>
           </a:bodyPr>
           <a:lstStyle/>
@@ -15429,12 +16878,20 @@
                 <a:solidFill>
                   <a:srgbClr val="52765A"/>
                 </a:solidFill>
-                <a:latin typeface="Arial"/>
-                <a:ea typeface="Arial"/>
-                <a:cs typeface="Arial"/>
+                <a:latin typeface="Arial" panose="020B0604020202090204"/>
+                <a:ea typeface="Arial" panose="020B0604020202090204"/>
+                <a:cs typeface="Arial" panose="020B0604020202090204"/>
               </a:rPr>
               <a:t>PREPARE LEARNING DATA</a:t>
             </a:r>
+            <a:endParaRPr sz="900" b="1" i="0">
+              <a:solidFill>
+                <a:srgbClr val="52765A"/>
+              </a:solidFill>
+              <a:latin typeface="Arial" panose="020B0604020202090204"/>
+              <a:ea typeface="Arial" panose="020B0604020202090204"/>
+              <a:cs typeface="Arial" panose="020B0604020202090204"/>
+            </a:endParaRPr>
           </a:p>
         </p:txBody>
       </p:sp>
@@ -15455,7 +16912,7 @@
           <a:noFill/>
         </p:spPr>
         <p:txBody>
-          <a:bodyPr wrap="square" lIns="0" rIns="0" tIns="0" bIns="0" anchor="t">
+          <a:bodyPr wrap="square" lIns="0" tIns="0" rIns="0" bIns="0" anchor="t">
             <a:spAutoFit/>
           </a:bodyPr>
           <a:lstStyle/>
@@ -15473,12 +16930,20 @@
                 <a:solidFill>
                   <a:srgbClr val="1D2B24"/>
                 </a:solidFill>
-                <a:latin typeface="Arial"/>
-                <a:ea typeface="Arial"/>
-                <a:cs typeface="Arial"/>
+                <a:latin typeface="Arial" panose="020B0604020202090204"/>
+                <a:ea typeface="Arial" panose="020B0604020202090204"/>
+                <a:cs typeface="Arial" panose="020B0604020202090204"/>
               </a:rPr>
               <a:t>What can become</a:t>
             </a:r>
+            <a:endParaRPr sz="1700" b="1" i="0">
+              <a:solidFill>
+                <a:srgbClr val="1D2B24"/>
+              </a:solidFill>
+              <a:latin typeface="Arial" panose="020B0604020202090204"/>
+              <a:ea typeface="Arial" panose="020B0604020202090204"/>
+              <a:cs typeface="Arial" panose="020B0604020202090204"/>
+            </a:endParaRPr>
           </a:p>
           <a:p>
             <a:pPr algn="l">
@@ -15494,12 +16959,20 @@
                 <a:solidFill>
                   <a:srgbClr val="1D2B24"/>
                 </a:solidFill>
-                <a:latin typeface="Arial"/>
-                <a:ea typeface="Arial"/>
-                <a:cs typeface="Arial"/>
+                <a:latin typeface="Arial" panose="020B0604020202090204"/>
+                <a:ea typeface="Arial" panose="020B0604020202090204"/>
+                <a:cs typeface="Arial" panose="020B0604020202090204"/>
               </a:rPr>
               <a:t>a useful training signal?</a:t>
             </a:r>
+            <a:endParaRPr sz="1700" b="1" i="0">
+              <a:solidFill>
+                <a:srgbClr val="1D2B24"/>
+              </a:solidFill>
+              <a:latin typeface="Arial" panose="020B0604020202090204"/>
+              <a:ea typeface="Arial" panose="020B0604020202090204"/>
+              <a:cs typeface="Arial" panose="020B0604020202090204"/>
+            </a:endParaRPr>
           </a:p>
         </p:txBody>
       </p:sp>
@@ -15520,7 +16993,7 @@
           <a:noFill/>
         </p:spPr>
         <p:txBody>
-          <a:bodyPr wrap="square" lIns="0" rIns="0" tIns="0" bIns="0" anchor="t">
+          <a:bodyPr wrap="square" lIns="0" tIns="0" rIns="0" bIns="0" anchor="t">
             <a:spAutoFit/>
           </a:bodyPr>
           <a:lstStyle/>
@@ -15538,12 +17011,20 @@
                 <a:solidFill>
                   <a:srgbClr val="657269"/>
                 </a:solidFill>
-                <a:latin typeface="Arial"/>
-                <a:ea typeface="Arial"/>
-                <a:cs typeface="Arial"/>
+                <a:latin typeface="Arial" panose="020B0604020202090204"/>
+                <a:ea typeface="Arial" panose="020B0604020202090204"/>
+                <a:cs typeface="Arial" panose="020B0604020202090204"/>
               </a:rPr>
               <a:t>Use quality reports to review samples</a:t>
             </a:r>
+            <a:endParaRPr sz="1120" b="0" i="0">
+              <a:solidFill>
+                <a:srgbClr val="657269"/>
+              </a:solidFill>
+              <a:latin typeface="Arial" panose="020B0604020202090204"/>
+              <a:ea typeface="Arial" panose="020B0604020202090204"/>
+              <a:cs typeface="Arial" panose="020B0604020202090204"/>
+            </a:endParaRPr>
           </a:p>
           <a:p>
             <a:pPr algn="l">
@@ -15559,12 +17040,20 @@
                 <a:solidFill>
                   <a:srgbClr val="657269"/>
                 </a:solidFill>
-                <a:latin typeface="Arial"/>
-                <a:ea typeface="Arial"/>
-                <a:cs typeface="Arial"/>
+                <a:latin typeface="Arial" panose="020B0604020202090204"/>
+                <a:ea typeface="Arial" panose="020B0604020202090204"/>
+                <a:cs typeface="Arial" panose="020B0604020202090204"/>
               </a:rPr>
               <a:t>and compare repeated trials.</a:t>
             </a:r>
+            <a:endParaRPr sz="1120" b="0" i="0">
+              <a:solidFill>
+                <a:srgbClr val="657269"/>
+              </a:solidFill>
+              <a:latin typeface="Arial" panose="020B0604020202090204"/>
+              <a:ea typeface="Arial" panose="020B0604020202090204"/>
+              <a:cs typeface="Arial" panose="020B0604020202090204"/>
+            </a:endParaRPr>
           </a:p>
         </p:txBody>
       </p:sp>
@@ -15620,7 +17109,7 @@
           <a:noFill/>
         </p:spPr>
         <p:txBody>
-          <a:bodyPr wrap="square" lIns="0" rIns="0" tIns="0" bIns="0" anchor="t">
+          <a:bodyPr wrap="square" lIns="0" tIns="0" rIns="0" bIns="0" anchor="t">
             <a:spAutoFit/>
           </a:bodyPr>
           <a:lstStyle/>
@@ -15638,12 +17127,20 @@
                 <a:solidFill>
                   <a:srgbClr val="52765A"/>
                 </a:solidFill>
-                <a:latin typeface="Arial"/>
-                <a:ea typeface="Arial"/>
-                <a:cs typeface="Arial"/>
+                <a:latin typeface="Arial" panose="020B0604020202090204"/>
+                <a:ea typeface="Arial" panose="020B0604020202090204"/>
+                <a:cs typeface="Arial" panose="020B0604020202090204"/>
               </a:rPr>
               <a:t>After calibration</a:t>
             </a:r>
+            <a:endParaRPr sz="1120" b="1" i="0">
+              <a:solidFill>
+                <a:srgbClr val="52765A"/>
+              </a:solidFill>
+              <a:latin typeface="Arial" panose="020B0604020202090204"/>
+              <a:ea typeface="Arial" panose="020B0604020202090204"/>
+              <a:cs typeface="Arial" panose="020B0604020202090204"/>
+            </a:endParaRPr>
           </a:p>
         </p:txBody>
       </p:sp>
@@ -15664,7 +17161,7 @@
           <a:noFill/>
         </p:spPr>
         <p:txBody>
-          <a:bodyPr wrap="square" lIns="0" rIns="0" tIns="0" bIns="0" anchor="t">
+          <a:bodyPr wrap="square" lIns="0" tIns="0" rIns="0" bIns="0" anchor="t">
             <a:spAutoFit/>
           </a:bodyPr>
           <a:lstStyle/>
@@ -15682,12 +17179,20 @@
                 <a:solidFill>
                   <a:srgbClr val="657269"/>
                 </a:solidFill>
-                <a:latin typeface="Arial"/>
-                <a:ea typeface="Arial"/>
-                <a:cs typeface="Arial"/>
+                <a:latin typeface="Arial" panose="020B0604020202090204"/>
+                <a:ea typeface="Arial" panose="020B0604020202090204"/>
+                <a:cs typeface="Arial" panose="020B0604020202090204"/>
               </a:rPr>
               <a:t>Build traceable force / area / pressure</a:t>
             </a:r>
+            <a:endParaRPr sz="1120" b="0" i="0">
+              <a:solidFill>
+                <a:srgbClr val="657269"/>
+              </a:solidFill>
+              <a:latin typeface="Arial" panose="020B0604020202090204"/>
+              <a:ea typeface="Arial" panose="020B0604020202090204"/>
+              <a:cs typeface="Arial" panose="020B0604020202090204"/>
+            </a:endParaRPr>
           </a:p>
           <a:p>
             <a:pPr algn="l">
@@ -15703,12 +17208,20 @@
                 <a:solidFill>
                   <a:srgbClr val="657269"/>
                 </a:solidFill>
-                <a:latin typeface="Arial"/>
-                <a:ea typeface="Arial"/>
-                <a:cs typeface="Arial"/>
+                <a:latin typeface="Arial" panose="020B0604020202090204"/>
+                <a:ea typeface="Arial" panose="020B0604020202090204"/>
+                <a:cs typeface="Arial" panose="020B0604020202090204"/>
               </a:rPr>
               <a:t>targets for later learning experiments.</a:t>
             </a:r>
+            <a:endParaRPr sz="1120" b="0" i="0">
+              <a:solidFill>
+                <a:srgbClr val="657269"/>
+              </a:solidFill>
+              <a:latin typeface="Arial" panose="020B0604020202090204"/>
+              <a:ea typeface="Arial" panose="020B0604020202090204"/>
+              <a:cs typeface="Arial" panose="020B0604020202090204"/>
+            </a:endParaRPr>
           </a:p>
         </p:txBody>
       </p:sp>
@@ -15774,7 +17287,7 @@
           <a:noFill/>
         </p:spPr>
         <p:txBody>
-          <a:bodyPr wrap="square" lIns="0" rIns="0" tIns="0" bIns="0" anchor="t">
+          <a:bodyPr wrap="square" lIns="0" tIns="0" rIns="0" bIns="0" anchor="t">
             <a:spAutoFit/>
           </a:bodyPr>
           <a:lstStyle/>
@@ -15792,20 +17305,25 @@
                 <a:solidFill>
                   <a:srgbClr val="52765A"/>
                 </a:solidFill>
-                <a:latin typeface="Arial"/>
-                <a:ea typeface="Arial"/>
-                <a:cs typeface="Arial"/>
+                <a:latin typeface="Arial" panose="020B0604020202090204"/>
+                <a:ea typeface="Arial" panose="020B0604020202090204"/>
+                <a:cs typeface="Arial" panose="020B0604020202090204"/>
               </a:rPr>
               <a:t>Current module: offline analysis. Using tactile feedback in control is a separate future integration.</a:t>
             </a:r>
+            <a:endParaRPr sz="1050" b="0" i="0">
+              <a:solidFill>
+                <a:srgbClr val="52765A"/>
+              </a:solidFill>
+              <a:latin typeface="Arial" panose="020B0604020202090204"/>
+              <a:ea typeface="Arial" panose="020B0604020202090204"/>
+              <a:cs typeface="Arial" panose="020B0604020202090204"/>
+            </a:endParaRPr>
           </a:p>
         </p:txBody>
       </p:sp>
     </p:spTree>
   </p:cSld>
-  <p:transition xmlns:p="http://schemas.openxmlformats.org/presentationml/2006/main" spd="slow">
-    <p:fade/>
-  </p:transition>
   <p:clrMapOvr>
     <a:masterClrMapping/>
   </p:clrMapOvr>
@@ -15813,7 +17331,7 @@
 </file>
 
 <file path=ppt/slides/slide7.xml><?xml version="1.0" encoding="utf-8"?>
-<p:sld xmlns:a="http://schemas.openxmlformats.org/drawingml/2006/main" xmlns:p="http://schemas.openxmlformats.org/presentationml/2006/main" xmlns:r="http://schemas.openxmlformats.org/officeDocument/2006/relationships">
+<p:sld xmlns:a="http://schemas.openxmlformats.org/drawingml/2006/main" xmlns:r="http://schemas.openxmlformats.org/officeDocument/2006/relationships" xmlns:p="http://schemas.openxmlformats.org/presentationml/2006/main">
   <p:cSld>
     <p:bg>
       <p:bgPr>
@@ -15847,7 +17365,7 @@
           <a:noFill/>
         </p:spPr>
         <p:txBody>
-          <a:bodyPr wrap="square" lIns="0" rIns="0" tIns="0" bIns="0" anchor="t">
+          <a:bodyPr wrap="square" lIns="0" tIns="0" rIns="0" bIns="0" anchor="t">
             <a:spAutoFit/>
           </a:bodyPr>
           <a:lstStyle/>
@@ -15865,12 +17383,20 @@
                 <a:solidFill>
                   <a:srgbClr val="52765A"/>
                 </a:solidFill>
-                <a:latin typeface="Arial"/>
-                <a:ea typeface="Arial"/>
-                <a:cs typeface="Arial"/>
+                <a:latin typeface="Arial" panose="020B0604020202090204"/>
+                <a:ea typeface="Arial" panose="020B0604020202090204"/>
+                <a:cs typeface="Arial" panose="020B0604020202090204"/>
               </a:rPr>
               <a:t>07 / DATA &amp; VALIDITY</a:t>
             </a:r>
+            <a:endParaRPr sz="900" b="1" i="0">
+              <a:solidFill>
+                <a:srgbClr val="52765A"/>
+              </a:solidFill>
+              <a:latin typeface="Arial" panose="020B0604020202090204"/>
+              <a:ea typeface="Arial" panose="020B0604020202090204"/>
+              <a:cs typeface="Arial" panose="020B0604020202090204"/>
+            </a:endParaRPr>
           </a:p>
         </p:txBody>
       </p:sp>
@@ -15891,7 +17417,7 @@
           <a:noFill/>
         </p:spPr>
         <p:txBody>
-          <a:bodyPr wrap="square" lIns="0" rIns="0" tIns="0" bIns="0" anchor="t">
+          <a:bodyPr wrap="square" lIns="0" tIns="0" rIns="0" bIns="0" anchor="t">
             <a:spAutoFit/>
           </a:bodyPr>
           <a:lstStyle/>
@@ -15909,12 +17435,20 @@
                 <a:solidFill>
                   <a:srgbClr val="1D2B24"/>
                 </a:solidFill>
-                <a:latin typeface="Arial"/>
-                <a:ea typeface="Arial"/>
-                <a:cs typeface="Arial"/>
+                <a:latin typeface="Arial" panose="020B0604020202090204"/>
+                <a:ea typeface="Arial" panose="020B0604020202090204"/>
+                <a:cs typeface="Arial" panose="020B0604020202090204"/>
               </a:rPr>
               <a:t>Check data validity before interpreting the signal</a:t>
             </a:r>
+            <a:endParaRPr sz="2250" b="1" i="0">
+              <a:solidFill>
+                <a:srgbClr val="1D2B24"/>
+              </a:solidFill>
+              <a:latin typeface="Arial" panose="020B0604020202090204"/>
+              <a:ea typeface="Arial" panose="020B0604020202090204"/>
+              <a:cs typeface="Arial" panose="020B0604020202090204"/>
+            </a:endParaRPr>
           </a:p>
         </p:txBody>
       </p:sp>
@@ -15935,7 +17469,7 @@
           <a:noFill/>
         </p:spPr>
         <p:txBody>
-          <a:bodyPr wrap="square" lIns="0" rIns="0" tIns="0" bIns="0" anchor="t">
+          <a:bodyPr wrap="square" lIns="0" tIns="0" rIns="0" bIns="0" anchor="t">
             <a:spAutoFit/>
           </a:bodyPr>
           <a:lstStyle/>
@@ -15953,12 +17487,20 @@
                 <a:solidFill>
                   <a:srgbClr val="657269"/>
                 </a:solidFill>
-                <a:latin typeface="Arial"/>
-                <a:ea typeface="Arial"/>
-                <a:cs typeface="Arial"/>
+                <a:latin typeface="Arial" panose="020B0604020202090204"/>
+                <a:ea typeface="Arial" panose="020B0604020202090204"/>
+                <a:cs typeface="Arial" panose="020B0604020202090204"/>
               </a:rPr>
               <a:t>One hand provides 1,140 signed three-axis taxels per frame, plus 11 SDK summary vectors.</a:t>
             </a:r>
+            <a:endParaRPr sz="1200" b="0" i="0">
+              <a:solidFill>
+                <a:srgbClr val="657269"/>
+              </a:solidFill>
+              <a:latin typeface="Arial" panose="020B0604020202090204"/>
+              <a:ea typeface="Arial" panose="020B0604020202090204"/>
+              <a:cs typeface="Arial" panose="020B0604020202090204"/>
+            </a:endParaRPr>
           </a:p>
         </p:txBody>
       </p:sp>
@@ -16014,7 +17556,7 @@
           <a:noFill/>
         </p:spPr>
         <p:txBody>
-          <a:bodyPr wrap="square" lIns="0" rIns="0" tIns="0" bIns="0" anchor="t">
+          <a:bodyPr wrap="square" lIns="0" tIns="0" rIns="0" bIns="0" anchor="t">
             <a:spAutoFit/>
           </a:bodyPr>
           <a:lstStyle/>
@@ -16032,12 +17574,20 @@
                 <a:solidFill>
                   <a:srgbClr val="657269"/>
                 </a:solidFill>
-                <a:latin typeface="Arial"/>
-                <a:ea typeface="Arial"/>
-                <a:cs typeface="Arial"/>
+                <a:latin typeface="Arial" panose="020B0604020202090204"/>
+                <a:ea typeface="Arial" panose="020B0604020202090204"/>
+                <a:cs typeface="Arial" panose="020B0604020202090204"/>
               </a:rPr>
               <a:t>DEXMAN_LEROBOT / VR TELEOPERATION SYSTEM</a:t>
             </a:r>
+            <a:endParaRPr sz="750" b="1" i="0">
+              <a:solidFill>
+                <a:srgbClr val="657269"/>
+              </a:solidFill>
+              <a:latin typeface="Arial" panose="020B0604020202090204"/>
+              <a:ea typeface="Arial" panose="020B0604020202090204"/>
+              <a:cs typeface="Arial" panose="020B0604020202090204"/>
+            </a:endParaRPr>
           </a:p>
         </p:txBody>
       </p:sp>
@@ -16058,7 +17608,7 @@
           <a:noFill/>
         </p:spPr>
         <p:txBody>
-          <a:bodyPr wrap="square" lIns="0" rIns="0" tIns="0" bIns="0" anchor="t">
+          <a:bodyPr wrap="square" lIns="0" tIns="0" rIns="0" bIns="0" anchor="t">
             <a:spAutoFit/>
           </a:bodyPr>
           <a:lstStyle/>
@@ -16076,12 +17626,20 @@
                 <a:solidFill>
                   <a:srgbClr val="657269"/>
                 </a:solidFill>
-                <a:latin typeface="Arial"/>
-                <a:ea typeface="Arial"/>
-                <a:cs typeface="Arial"/>
+                <a:latin typeface="Arial" panose="020B0604020202090204"/>
+                <a:ea typeface="Arial" panose="020B0604020202090204"/>
+                <a:cs typeface="Arial" panose="020B0604020202090204"/>
               </a:rPr>
               <a:t>07 / 10</a:t>
             </a:r>
+            <a:endParaRPr sz="750" b="1" i="0">
+              <a:solidFill>
+                <a:srgbClr val="657269"/>
+              </a:solidFill>
+              <a:latin typeface="Arial" panose="020B0604020202090204"/>
+              <a:ea typeface="Arial" panose="020B0604020202090204"/>
+              <a:cs typeface="Arial" panose="020B0604020202090204"/>
+            </a:endParaRPr>
           </a:p>
         </p:txBody>
       </p:sp>
@@ -16149,7 +17707,7 @@
           <a:noFill/>
         </p:spPr>
         <p:txBody>
-          <a:bodyPr wrap="square" lIns="0" rIns="0" tIns="0" bIns="0" anchor="t">
+          <a:bodyPr wrap="square" lIns="0" tIns="0" rIns="0" bIns="0" anchor="t">
             <a:spAutoFit/>
           </a:bodyPr>
           <a:lstStyle/>
@@ -16167,12 +17725,20 @@
                 <a:solidFill>
                   <a:srgbClr val="52765A"/>
                 </a:solidFill>
-                <a:latin typeface="Arial"/>
-                <a:ea typeface="Arial"/>
-                <a:cs typeface="Arial"/>
+                <a:latin typeface="Arial" panose="020B0604020202090204"/>
+                <a:ea typeface="Arial" panose="020B0604020202090204"/>
+                <a:cs typeface="Arial" panose="020B0604020202090204"/>
               </a:rPr>
               <a:t>WHAT IS RECORDED</a:t>
             </a:r>
+            <a:endParaRPr sz="1050" b="1" i="0">
+              <a:solidFill>
+                <a:srgbClr val="52765A"/>
+              </a:solidFill>
+              <a:latin typeface="Arial" panose="020B0604020202090204"/>
+              <a:ea typeface="Arial" panose="020B0604020202090204"/>
+              <a:cs typeface="Arial" panose="020B0604020202090204"/>
+            </a:endParaRPr>
           </a:p>
         </p:txBody>
       </p:sp>
@@ -16193,7 +17759,7 @@
           <a:noFill/>
         </p:spPr>
         <p:txBody>
-          <a:bodyPr wrap="square" lIns="0" rIns="0" tIns="0" bIns="0" anchor="t">
+          <a:bodyPr wrap="square" lIns="0" tIns="0" rIns="0" bIns="0" anchor="t">
             <a:spAutoFit/>
           </a:bodyPr>
           <a:lstStyle/>
@@ -16211,12 +17777,20 @@
                 <a:solidFill>
                   <a:srgbClr val="1D2B24"/>
                 </a:solidFill>
-                <a:latin typeface="Arial"/>
-                <a:ea typeface="Arial"/>
-                <a:cs typeface="Arial"/>
+                <a:latin typeface="Arial" panose="020B0604020202090204"/>
+                <a:ea typeface="Arial" panose="020B0604020202090204"/>
+                <a:cs typeface="Arial" panose="020B0604020202090204"/>
               </a:rPr>
               <a:t>taxel_raw</a:t>
             </a:r>
+            <a:endParaRPr sz="1120" b="1" i="0">
+              <a:solidFill>
+                <a:srgbClr val="1D2B24"/>
+              </a:solidFill>
+              <a:latin typeface="Arial" panose="020B0604020202090204"/>
+              <a:ea typeface="Arial" panose="020B0604020202090204"/>
+              <a:cs typeface="Arial" panose="020B0604020202090204"/>
+            </a:endParaRPr>
           </a:p>
         </p:txBody>
       </p:sp>
@@ -16237,7 +17811,7 @@
           <a:noFill/>
         </p:spPr>
         <p:txBody>
-          <a:bodyPr wrap="square" lIns="0" rIns="0" tIns="0" bIns="0" anchor="t">
+          <a:bodyPr wrap="square" lIns="0" tIns="0" rIns="0" bIns="0" anchor="t">
             <a:spAutoFit/>
           </a:bodyPr>
           <a:lstStyle/>
@@ -16255,12 +17829,20 @@
                 <a:solidFill>
                   <a:srgbClr val="657269"/>
                 </a:solidFill>
-                <a:latin typeface="Arial"/>
-                <a:ea typeface="Arial"/>
-                <a:cs typeface="Arial"/>
+                <a:latin typeface="Arial" panose="020B0604020202090204"/>
+                <a:ea typeface="Arial" panose="020B0604020202090204"/>
+                <a:cs typeface="Arial" panose="020B0604020202090204"/>
               </a:rPr>
               <a:t>[N, 1140, 3] int32</a:t>
             </a:r>
+            <a:endParaRPr sz="950" b="0" i="0">
+              <a:solidFill>
+                <a:srgbClr val="657269"/>
+              </a:solidFill>
+              <a:latin typeface="Arial" panose="020B0604020202090204"/>
+              <a:ea typeface="Arial" panose="020B0604020202090204"/>
+              <a:cs typeface="Arial" panose="020B0604020202090204"/>
+            </a:endParaRPr>
           </a:p>
         </p:txBody>
       </p:sp>
@@ -16281,7 +17863,7 @@
           <a:noFill/>
         </p:spPr>
         <p:txBody>
-          <a:bodyPr wrap="square" lIns="0" rIns="0" tIns="0" bIns="0" anchor="t">
+          <a:bodyPr wrap="square" lIns="0" tIns="0" rIns="0" bIns="0" anchor="t">
             <a:spAutoFit/>
           </a:bodyPr>
           <a:lstStyle/>
@@ -16299,12 +17881,20 @@
                 <a:solidFill>
                   <a:srgbClr val="657269"/>
                 </a:solidFill>
-                <a:latin typeface="Arial"/>
-                <a:ea typeface="Arial"/>
-                <a:cs typeface="Arial"/>
+                <a:latin typeface="Arial" panose="020B0604020202090204"/>
+                <a:ea typeface="Arial" panose="020B0604020202090204"/>
+                <a:cs typeface="Arial" panose="020B0604020202090204"/>
               </a:rPr>
               <a:t>Signed SDK x / y / z counts; no normalization.</a:t>
             </a:r>
+            <a:endParaRPr sz="1050" b="0" i="0">
+              <a:solidFill>
+                <a:srgbClr val="657269"/>
+              </a:solidFill>
+              <a:latin typeface="Arial" panose="020B0604020202090204"/>
+              <a:ea typeface="Arial" panose="020B0604020202090204"/>
+              <a:cs typeface="Arial" panose="020B0604020202090204"/>
+            </a:endParaRPr>
           </a:p>
         </p:txBody>
       </p:sp>
@@ -16360,7 +17950,7 @@
           <a:noFill/>
         </p:spPr>
         <p:txBody>
-          <a:bodyPr wrap="square" lIns="0" rIns="0" tIns="0" bIns="0" anchor="t">
+          <a:bodyPr wrap="square" lIns="0" tIns="0" rIns="0" bIns="0" anchor="t">
             <a:spAutoFit/>
           </a:bodyPr>
           <a:lstStyle/>
@@ -16378,12 +17968,20 @@
                 <a:solidFill>
                   <a:srgbClr val="1D2B24"/>
                 </a:solidFill>
-                <a:latin typeface="Arial"/>
-                <a:ea typeface="Arial"/>
-                <a:cs typeface="Arial"/>
+                <a:latin typeface="Arial" panose="020B0604020202090204"/>
+                <a:ea typeface="Arial" panose="020B0604020202090204"/>
+                <a:cs typeface="Arial" panose="020B0604020202090204"/>
               </a:rPr>
               <a:t>sensor_summary_raw</a:t>
             </a:r>
+            <a:endParaRPr sz="1120" b="1" i="0">
+              <a:solidFill>
+                <a:srgbClr val="1D2B24"/>
+              </a:solidFill>
+              <a:latin typeface="Arial" panose="020B0604020202090204"/>
+              <a:ea typeface="Arial" panose="020B0604020202090204"/>
+              <a:cs typeface="Arial" panose="020B0604020202090204"/>
+            </a:endParaRPr>
           </a:p>
         </p:txBody>
       </p:sp>
@@ -16404,7 +18002,7 @@
           <a:noFill/>
         </p:spPr>
         <p:txBody>
-          <a:bodyPr wrap="square" lIns="0" rIns="0" tIns="0" bIns="0" anchor="t">
+          <a:bodyPr wrap="square" lIns="0" tIns="0" rIns="0" bIns="0" anchor="t">
             <a:spAutoFit/>
           </a:bodyPr>
           <a:lstStyle/>
@@ -16422,12 +18020,20 @@
                 <a:solidFill>
                   <a:srgbClr val="657269"/>
                 </a:solidFill>
-                <a:latin typeface="Arial"/>
-                <a:ea typeface="Arial"/>
-                <a:cs typeface="Arial"/>
+                <a:latin typeface="Arial" panose="020B0604020202090204"/>
+                <a:ea typeface="Arial" panose="020B0604020202090204"/>
+                <a:cs typeface="Arial" panose="020B0604020202090204"/>
               </a:rPr>
               <a:t>[N, 11, 3] int32</a:t>
             </a:r>
+            <a:endParaRPr sz="950" b="0" i="0">
+              <a:solidFill>
+                <a:srgbClr val="657269"/>
+              </a:solidFill>
+              <a:latin typeface="Arial" panose="020B0604020202090204"/>
+              <a:ea typeface="Arial" panose="020B0604020202090204"/>
+              <a:cs typeface="Arial" panose="020B0604020202090204"/>
+            </a:endParaRPr>
           </a:p>
         </p:txBody>
       </p:sp>
@@ -16448,7 +18054,7 @@
           <a:noFill/>
         </p:spPr>
         <p:txBody>
-          <a:bodyPr wrap="square" lIns="0" rIns="0" tIns="0" bIns="0" anchor="t">
+          <a:bodyPr wrap="square" lIns="0" tIns="0" rIns="0" bIns="0" anchor="t">
             <a:spAutoFit/>
           </a:bodyPr>
           <a:lstStyle/>
@@ -16466,12 +18072,20 @@
                 <a:solidFill>
                   <a:srgbClr val="657269"/>
                 </a:solidFill>
-                <a:latin typeface="Arial"/>
-                <a:ea typeface="Arial"/>
-                <a:cs typeface="Arial"/>
+                <a:latin typeface="Arial" panose="020B0604020202090204"/>
+                <a:ea typeface="Arial" panose="020B0604020202090204"/>
+                <a:cs typeface="Arial" panose="020B0604020202090204"/>
               </a:rPr>
               <a:t>Separate SDK summaries; not a verified taxel sum.</a:t>
             </a:r>
+            <a:endParaRPr sz="1050" b="0" i="0">
+              <a:solidFill>
+                <a:srgbClr val="657269"/>
+              </a:solidFill>
+              <a:latin typeface="Arial" panose="020B0604020202090204"/>
+              <a:ea typeface="Arial" panose="020B0604020202090204"/>
+              <a:cs typeface="Arial" panose="020B0604020202090204"/>
+            </a:endParaRPr>
           </a:p>
         </p:txBody>
       </p:sp>
@@ -16527,7 +18141,7 @@
           <a:noFill/>
         </p:spPr>
         <p:txBody>
-          <a:bodyPr wrap="square" lIns="0" rIns="0" tIns="0" bIns="0" anchor="t">
+          <a:bodyPr wrap="square" lIns="0" tIns="0" rIns="0" bIns="0" anchor="t">
             <a:spAutoFit/>
           </a:bodyPr>
           <a:lstStyle/>
@@ -16545,12 +18159,20 @@
                 <a:solidFill>
                   <a:srgbClr val="1D2B24"/>
                 </a:solidFill>
-                <a:latin typeface="Arial"/>
-                <a:ea typeface="Arial"/>
-                <a:cs typeface="Arial"/>
+                <a:latin typeface="Arial" panose="020B0604020202090204"/>
+                <a:ea typeface="Arial" panose="020B0604020202090204"/>
+                <a:cs typeface="Arial" panose="020B0604020202090204"/>
               </a:rPr>
               <a:t>Validity fields</a:t>
             </a:r>
+            <a:endParaRPr sz="1120" b="1" i="0">
+              <a:solidFill>
+                <a:srgbClr val="1D2B24"/>
+              </a:solidFill>
+              <a:latin typeface="Arial" panose="020B0604020202090204"/>
+              <a:ea typeface="Arial" panose="020B0604020202090204"/>
+              <a:cs typeface="Arial" panose="020B0604020202090204"/>
+            </a:endParaRPr>
           </a:p>
         </p:txBody>
       </p:sp>
@@ -16571,7 +18193,7 @@
           <a:noFill/>
         </p:spPr>
         <p:txBody>
-          <a:bodyPr wrap="square" lIns="0" rIns="0" tIns="0" bIns="0" anchor="t">
+          <a:bodyPr wrap="square" lIns="0" tIns="0" rIns="0" bIns="0" anchor="t">
             <a:spAutoFit/>
           </a:bodyPr>
           <a:lstStyle/>
@@ -16589,12 +18211,20 @@
                 <a:solidFill>
                   <a:srgbClr val="657269"/>
                 </a:solidFill>
-                <a:latin typeface="Arial"/>
-                <a:ea typeface="Arial"/>
-                <a:cs typeface="Arial"/>
+                <a:latin typeface="Arial" panose="020B0604020202090204"/>
+                <a:ea typeface="Arial" panose="020B0604020202090204"/>
+                <a:cs typeface="Arial" panose="020B0604020202090204"/>
               </a:rPr>
               <a:t>mask + packet + sample</a:t>
             </a:r>
+            <a:endParaRPr sz="950" b="0" i="0">
+              <a:solidFill>
+                <a:srgbClr val="657269"/>
+              </a:solidFill>
+              <a:latin typeface="Arial" panose="020B0604020202090204"/>
+              <a:ea typeface="Arial" panose="020B0604020202090204"/>
+              <a:cs typeface="Arial" panose="020B0604020202090204"/>
+            </a:endParaRPr>
           </a:p>
         </p:txBody>
       </p:sp>
@@ -16615,7 +18245,7 @@
           <a:noFill/>
         </p:spPr>
         <p:txBody>
-          <a:bodyPr wrap="square" lIns="0" rIns="0" tIns="0" bIns="0" anchor="t">
+          <a:bodyPr wrap="square" lIns="0" tIns="0" rIns="0" bIns="0" anchor="t">
             <a:spAutoFit/>
           </a:bodyPr>
           <a:lstStyle/>
@@ -16633,12 +18263,20 @@
                 <a:solidFill>
                   <a:srgbClr val="657269"/>
                 </a:solidFill>
-                <a:latin typeface="Arial"/>
-                <a:ea typeface="Arial"/>
-                <a:cs typeface="Arial"/>
+                <a:latin typeface="Arial" panose="020B0604020202090204"/>
+                <a:ea typeface="Arial" panose="020B0604020202090204"/>
+                <a:cs typeface="Arial" panose="020B0604020202090204"/>
               </a:rPr>
               <a:t>Nonzero values alone do not establish valid contact.</a:t>
             </a:r>
+            <a:endParaRPr sz="1050" b="0" i="0">
+              <a:solidFill>
+                <a:srgbClr val="657269"/>
+              </a:solidFill>
+              <a:latin typeface="Arial" panose="020B0604020202090204"/>
+              <a:ea typeface="Arial" panose="020B0604020202090204"/>
+              <a:cs typeface="Arial" panose="020B0604020202090204"/>
+            </a:endParaRPr>
           </a:p>
         </p:txBody>
       </p:sp>
@@ -16694,7 +18332,7 @@
           <a:noFill/>
         </p:spPr>
         <p:txBody>
-          <a:bodyPr wrap="square" lIns="0" rIns="0" tIns="0" bIns="0" anchor="t">
+          <a:bodyPr wrap="square" lIns="0" tIns="0" rIns="0" bIns="0" anchor="t">
             <a:spAutoFit/>
           </a:bodyPr>
           <a:lstStyle/>
@@ -16712,12 +18350,20 @@
                 <a:solidFill>
                   <a:srgbClr val="1D2B24"/>
                 </a:solidFill>
-                <a:latin typeface="Arial"/>
-                <a:ea typeface="Arial"/>
-                <a:cs typeface="Arial"/>
+                <a:latin typeface="Arial" panose="020B0604020202090204"/>
+                <a:ea typeface="Arial" panose="020B0604020202090204"/>
+                <a:cs typeface="Arial" panose="020B0604020202090204"/>
               </a:rPr>
               <a:t>Time + temperature</a:t>
             </a:r>
+            <a:endParaRPr sz="1120" b="1" i="0">
+              <a:solidFill>
+                <a:srgbClr val="1D2B24"/>
+              </a:solidFill>
+              <a:latin typeface="Arial" panose="020B0604020202090204"/>
+              <a:ea typeface="Arial" panose="020B0604020202090204"/>
+              <a:cs typeface="Arial" panose="020B0604020202090204"/>
+            </a:endParaRPr>
           </a:p>
         </p:txBody>
       </p:sp>
@@ -16738,7 +18384,7 @@
           <a:noFill/>
         </p:spPr>
         <p:txBody>
-          <a:bodyPr wrap="square" lIns="0" rIns="0" tIns="0" bIns="0" anchor="t">
+          <a:bodyPr wrap="square" lIns="0" tIns="0" rIns="0" bIns="0" anchor="t">
             <a:spAutoFit/>
           </a:bodyPr>
           <a:lstStyle/>
@@ -16756,12 +18402,20 @@
                 <a:solidFill>
                   <a:srgbClr val="657269"/>
                 </a:solidFill>
-                <a:latin typeface="Arial"/>
-                <a:ea typeface="Arial"/>
-                <a:cs typeface="Arial"/>
+                <a:latin typeface="Arial" panose="020B0604020202090204"/>
+                <a:ea typeface="Arial" panose="020B0604020202090204"/>
+                <a:cs typeface="Arial" panose="020B0604020202090204"/>
               </a:rPr>
               <a:t>host ns + events.jsonl</a:t>
             </a:r>
+            <a:endParaRPr sz="950" b="0" i="0">
+              <a:solidFill>
+                <a:srgbClr val="657269"/>
+              </a:solidFill>
+              <a:latin typeface="Arial" panose="020B0604020202090204"/>
+              <a:ea typeface="Arial" panose="020B0604020202090204"/>
+              <a:cs typeface="Arial" panose="020B0604020202090204"/>
+            </a:endParaRPr>
           </a:p>
         </p:txBody>
       </p:sp>
@@ -16782,7 +18436,7 @@
           <a:noFill/>
         </p:spPr>
         <p:txBody>
-          <a:bodyPr wrap="square" lIns="0" rIns="0" tIns="0" bIns="0" anchor="t">
+          <a:bodyPr wrap="square" lIns="0" tIns="0" rIns="0" bIns="0" anchor="t">
             <a:spAutoFit/>
           </a:bodyPr>
           <a:lstStyle/>
@@ -16800,12 +18454,20 @@
                 <a:solidFill>
                   <a:srgbClr val="657269"/>
                 </a:solidFill>
-                <a:latin typeface="Arial"/>
-                <a:ea typeface="Arial"/>
-                <a:cs typeface="Arial"/>
+                <a:latin typeface="Arial" panose="020B0604020202090204"/>
+                <a:ea typeface="Arial" panose="020B0604020202090204"/>
+                <a:cs typeface="Arial" panose="020B0604020202090204"/>
               </a:rPr>
               <a:t>Each hand keeps its own time; row numbers do not sync.</a:t>
             </a:r>
+            <a:endParaRPr sz="1050" b="0" i="0">
+              <a:solidFill>
+                <a:srgbClr val="657269"/>
+              </a:solidFill>
+              <a:latin typeface="Arial" panose="020B0604020202090204"/>
+              <a:ea typeface="Arial" panose="020B0604020202090204"/>
+              <a:cs typeface="Arial" panose="020B0604020202090204"/>
+            </a:endParaRPr>
           </a:p>
         </p:txBody>
       </p:sp>
@@ -16826,7 +18488,7 @@
           <a:noFill/>
         </p:spPr>
         <p:txBody>
-          <a:bodyPr wrap="square" lIns="0" rIns="0" tIns="0" bIns="0" anchor="t">
+          <a:bodyPr wrap="square" lIns="0" tIns="0" rIns="0" bIns="0" anchor="t">
             <a:spAutoFit/>
           </a:bodyPr>
           <a:lstStyle/>
@@ -16844,12 +18506,20 @@
                 <a:solidFill>
                   <a:srgbClr val="52765A"/>
                 </a:solidFill>
-                <a:latin typeface="Arial"/>
-                <a:ea typeface="Arial"/>
-                <a:cs typeface="Arial"/>
+                <a:latin typeface="Arial" panose="020B0604020202090204"/>
+                <a:ea typeface="Arial" panose="020B0604020202090204"/>
+                <a:cs typeface="Arial" panose="020B0604020202090204"/>
               </a:rPr>
               <a:t>ACTUAL RECORDING / 2026-10-21</a:t>
             </a:r>
+            <a:endParaRPr sz="1050" b="1" i="0">
+              <a:solidFill>
+                <a:srgbClr val="52765A"/>
+              </a:solidFill>
+              <a:latin typeface="Arial" panose="020B0604020202090204"/>
+              <a:ea typeface="Arial" panose="020B0604020202090204"/>
+              <a:cs typeface="Arial" panose="020B0604020202090204"/>
+            </a:endParaRPr>
           </a:p>
         </p:txBody>
       </p:sp>
@@ -16870,7 +18540,7 @@
           <a:noFill/>
         </p:spPr>
         <p:txBody>
-          <a:bodyPr wrap="square" lIns="0" rIns="0" tIns="0" bIns="0" anchor="t">
+          <a:bodyPr wrap="square" lIns="0" tIns="0" rIns="0" bIns="0" anchor="t">
             <a:spAutoFit/>
           </a:bodyPr>
           <a:lstStyle/>
@@ -16888,12 +18558,20 @@
                 <a:solidFill>
                   <a:srgbClr val="52765A"/>
                 </a:solidFill>
-                <a:latin typeface="Arial"/>
-                <a:ea typeface="Arial"/>
-                <a:cs typeface="Arial"/>
+                <a:latin typeface="Arial" panose="020B0604020202090204"/>
+                <a:ea typeface="Arial" panose="020B0604020202090204"/>
+                <a:cs typeface="Arial" panose="020B0604020202090204"/>
               </a:rPr>
               <a:t>407 / 408</a:t>
             </a:r>
+            <a:endParaRPr sz="2500" b="1" i="0">
+              <a:solidFill>
+                <a:srgbClr val="52765A"/>
+              </a:solidFill>
+              <a:latin typeface="Arial" panose="020B0604020202090204"/>
+              <a:ea typeface="Arial" panose="020B0604020202090204"/>
+              <a:cs typeface="Arial" panose="020B0604020202090204"/>
+            </a:endParaRPr>
           </a:p>
         </p:txBody>
       </p:sp>
@@ -16914,7 +18592,7 @@
           <a:noFill/>
         </p:spPr>
         <p:txBody>
-          <a:bodyPr wrap="square" lIns="0" rIns="0" tIns="0" bIns="0" anchor="t">
+          <a:bodyPr wrap="square" lIns="0" tIns="0" rIns="0" bIns="0" anchor="t">
             <a:spAutoFit/>
           </a:bodyPr>
           <a:lstStyle/>
@@ -16932,12 +18610,20 @@
                 <a:solidFill>
                   <a:srgbClr val="657269"/>
                 </a:solidFill>
-                <a:latin typeface="Arial"/>
-                <a:ea typeface="Arial"/>
-                <a:cs typeface="Arial"/>
+                <a:latin typeface="Arial" panose="020B0604020202090204"/>
+                <a:ea typeface="Arial" panose="020B0604020202090204"/>
+                <a:cs typeface="Arial" panose="020B0604020202090204"/>
               </a:rPr>
               <a:t>frames, left / right</a:t>
             </a:r>
+            <a:endParaRPr sz="1050" b="0" i="0">
+              <a:solidFill>
+                <a:srgbClr val="657269"/>
+              </a:solidFill>
+              <a:latin typeface="Arial" panose="020B0604020202090204"/>
+              <a:ea typeface="Arial" panose="020B0604020202090204"/>
+              <a:cs typeface="Arial" panose="020B0604020202090204"/>
+            </a:endParaRPr>
           </a:p>
         </p:txBody>
       </p:sp>
@@ -16958,7 +18644,7 @@
           <a:noFill/>
         </p:spPr>
         <p:txBody>
-          <a:bodyPr wrap="square" lIns="0" rIns="0" tIns="0" bIns="0" anchor="t">
+          <a:bodyPr wrap="square" lIns="0" tIns="0" rIns="0" bIns="0" anchor="t">
             <a:spAutoFit/>
           </a:bodyPr>
           <a:lstStyle/>
@@ -16976,12 +18662,20 @@
                 <a:solidFill>
                   <a:srgbClr val="52765A"/>
                 </a:solidFill>
-                <a:latin typeface="Arial"/>
-                <a:ea typeface="Arial"/>
-                <a:cs typeface="Arial"/>
+                <a:latin typeface="Arial" panose="020B0604020202090204"/>
+                <a:ea typeface="Arial" panose="020B0604020202090204"/>
+                <a:cs typeface="Arial" panose="020B0604020202090204"/>
               </a:rPr>
               <a:t>~8.75 Hz</a:t>
             </a:r>
+            <a:endParaRPr sz="2500" b="1" i="0">
+              <a:solidFill>
+                <a:srgbClr val="52765A"/>
+              </a:solidFill>
+              <a:latin typeface="Arial" panose="020B0604020202090204"/>
+              <a:ea typeface="Arial" panose="020B0604020202090204"/>
+              <a:cs typeface="Arial" panose="020B0604020202090204"/>
+            </a:endParaRPr>
           </a:p>
         </p:txBody>
       </p:sp>
@@ -17002,7 +18696,7 @@
           <a:noFill/>
         </p:spPr>
         <p:txBody>
-          <a:bodyPr wrap="square" lIns="0" rIns="0" tIns="0" bIns="0" anchor="t">
+          <a:bodyPr wrap="square" lIns="0" tIns="0" rIns="0" bIns="0" anchor="t">
             <a:spAutoFit/>
           </a:bodyPr>
           <a:lstStyle/>
@@ -17020,12 +18714,20 @@
                 <a:solidFill>
                   <a:srgbClr val="657269"/>
                 </a:solidFill>
-                <a:latin typeface="Arial"/>
-                <a:ea typeface="Arial"/>
-                <a:cs typeface="Arial"/>
+                <a:latin typeface="Arial" panose="020B0604020202090204"/>
+                <a:ea typeface="Arial" panose="020B0604020202090204"/>
+                <a:cs typeface="Arial" panose="020B0604020202090204"/>
               </a:rPr>
               <a:t>host sampling rate</a:t>
             </a:r>
+            <a:endParaRPr sz="1050" b="0" i="0">
+              <a:solidFill>
+                <a:srgbClr val="657269"/>
+              </a:solidFill>
+              <a:latin typeface="Arial" panose="020B0604020202090204"/>
+              <a:ea typeface="Arial" panose="020B0604020202090204"/>
+              <a:cs typeface="Arial" panose="020B0604020202090204"/>
+            </a:endParaRPr>
           </a:p>
         </p:txBody>
       </p:sp>
@@ -17046,7 +18748,7 @@
           <a:noFill/>
         </p:spPr>
         <p:txBody>
-          <a:bodyPr wrap="square" lIns="0" rIns="0" tIns="0" bIns="0" anchor="t">
+          <a:bodyPr wrap="square" lIns="0" tIns="0" rIns="0" bIns="0" anchor="t">
             <a:spAutoFit/>
           </a:bodyPr>
           <a:lstStyle/>
@@ -17064,12 +18766,20 @@
                 <a:solidFill>
                   <a:srgbClr val="52765A"/>
                 </a:solidFill>
-                <a:latin typeface="Arial"/>
-                <a:ea typeface="Arial"/>
-                <a:cs typeface="Arial"/>
+                <a:latin typeface="Arial" panose="020B0604020202090204"/>
+                <a:ea typeface="Arial" panose="020B0604020202090204"/>
+                <a:cs typeface="Arial" panose="020B0604020202090204"/>
               </a:rPr>
               <a:t>100%</a:t>
             </a:r>
+            <a:endParaRPr sz="2500" b="1" i="0">
+              <a:solidFill>
+                <a:srgbClr val="52765A"/>
+              </a:solidFill>
+              <a:latin typeface="Arial" panose="020B0604020202090204"/>
+              <a:ea typeface="Arial" panose="020B0604020202090204"/>
+              <a:cs typeface="Arial" panose="020B0604020202090204"/>
+            </a:endParaRPr>
           </a:p>
         </p:txBody>
       </p:sp>
@@ -17090,7 +18800,7 @@
           <a:noFill/>
         </p:spPr>
         <p:txBody>
-          <a:bodyPr wrap="square" lIns="0" rIns="0" tIns="0" bIns="0" anchor="t">
+          <a:bodyPr wrap="square" lIns="0" tIns="0" rIns="0" bIns="0" anchor="t">
             <a:spAutoFit/>
           </a:bodyPr>
           <a:lstStyle/>
@@ -17108,12 +18818,20 @@
                 <a:solidFill>
                   <a:srgbClr val="657269"/>
                 </a:solidFill>
-                <a:latin typeface="Arial"/>
-                <a:ea typeface="Arial"/>
-                <a:cs typeface="Arial"/>
+                <a:latin typeface="Arial" panose="020B0604020202090204"/>
+                <a:ea typeface="Arial" panose="020B0604020202090204"/>
+                <a:cs typeface="Arial" panose="020B0604020202090204"/>
               </a:rPr>
               <a:t>packet_valid, both hands</a:t>
             </a:r>
+            <a:endParaRPr sz="1050" b="0" i="0">
+              <a:solidFill>
+                <a:srgbClr val="657269"/>
+              </a:solidFill>
+              <a:latin typeface="Arial" panose="020B0604020202090204"/>
+              <a:ea typeface="Arial" panose="020B0604020202090204"/>
+              <a:cs typeface="Arial" panose="020B0604020202090204"/>
+            </a:endParaRPr>
           </a:p>
         </p:txBody>
       </p:sp>
@@ -17134,7 +18852,7 @@
           <a:noFill/>
         </p:spPr>
         <p:txBody>
-          <a:bodyPr wrap="square" lIns="0" rIns="0" tIns="0" bIns="0" anchor="t">
+          <a:bodyPr wrap="square" lIns="0" tIns="0" rIns="0" bIns="0" anchor="t">
             <a:spAutoFit/>
           </a:bodyPr>
           <a:lstStyle/>
@@ -17152,12 +18870,20 @@
                 <a:solidFill>
                   <a:srgbClr val="8C6031"/>
                 </a:solidFill>
-                <a:latin typeface="Arial"/>
-                <a:ea typeface="Arial"/>
-                <a:cs typeface="Arial"/>
+                <a:latin typeface="Arial" panose="020B0604020202090204"/>
+                <a:ea typeface="Arial" panose="020B0604020202090204"/>
+                <a:cs typeface="Arial" panose="020B0604020202090204"/>
               </a:rPr>
               <a:t>0 / 1140</a:t>
             </a:r>
+            <a:endParaRPr sz="2500" b="1" i="0">
+              <a:solidFill>
+                <a:srgbClr val="8C6031"/>
+              </a:solidFill>
+              <a:latin typeface="Arial" panose="020B0604020202090204"/>
+              <a:ea typeface="Arial" panose="020B0604020202090204"/>
+              <a:cs typeface="Arial" panose="020B0604020202090204"/>
+            </a:endParaRPr>
           </a:p>
         </p:txBody>
       </p:sp>
@@ -17178,7 +18904,7 @@
           <a:noFill/>
         </p:spPr>
         <p:txBody>
-          <a:bodyPr wrap="square" lIns="0" rIns="0" tIns="0" bIns="0" anchor="t">
+          <a:bodyPr wrap="square" lIns="0" tIns="0" rIns="0" bIns="0" anchor="t">
             <a:spAutoFit/>
           </a:bodyPr>
           <a:lstStyle/>
@@ -17196,12 +18922,20 @@
                 <a:solidFill>
                   <a:srgbClr val="657269"/>
                 </a:solidFill>
-                <a:latin typeface="Arial"/>
-                <a:ea typeface="Arial"/>
-                <a:cs typeface="Arial"/>
+                <a:latin typeface="Arial" panose="020B0604020202090204"/>
+                <a:ea typeface="Arial" panose="020B0604020202090204"/>
+                <a:cs typeface="Arial" panose="020B0604020202090204"/>
               </a:rPr>
               <a:t>verified taxels, both hands</a:t>
             </a:r>
+            <a:endParaRPr sz="1050" b="0" i="0">
+              <a:solidFill>
+                <a:srgbClr val="657269"/>
+              </a:solidFill>
+              <a:latin typeface="Arial" panose="020B0604020202090204"/>
+              <a:ea typeface="Arial" panose="020B0604020202090204"/>
+              <a:cs typeface="Arial" panose="020B0604020202090204"/>
+            </a:endParaRPr>
           </a:p>
         </p:txBody>
       </p:sp>
@@ -17267,7 +19001,7 @@
           <a:noFill/>
         </p:spPr>
         <p:txBody>
-          <a:bodyPr wrap="square" lIns="0" rIns="0" tIns="0" bIns="0" anchor="t">
+          <a:bodyPr wrap="square" lIns="0" tIns="0" rIns="0" bIns="0" anchor="t">
             <a:spAutoFit/>
           </a:bodyPr>
           <a:lstStyle/>
@@ -17285,12 +19019,20 @@
                 <a:solidFill>
                   <a:srgbClr val="8C6031"/>
                 </a:solidFill>
-                <a:latin typeface="Arial"/>
-                <a:ea typeface="Arial"/>
-                <a:cs typeface="Arial"/>
+                <a:latin typeface="Arial" panose="020B0604020202090204"/>
+                <a:ea typeface="Arial" panose="020B0604020202090204"/>
+                <a:cs typeface="Arial" panose="020B0604020202090204"/>
               </a:rPr>
               <a:t>sample_valid = false for every frame</a:t>
             </a:r>
+            <a:endParaRPr sz="1200" b="1" i="0">
+              <a:solidFill>
+                <a:srgbClr val="8C6031"/>
+              </a:solidFill>
+              <a:latin typeface="Arial" panose="020B0604020202090204"/>
+              <a:ea typeface="Arial" panose="020B0604020202090204"/>
+              <a:cs typeface="Arial" panose="020B0604020202090204"/>
+            </a:endParaRPr>
           </a:p>
         </p:txBody>
       </p:sp>
@@ -17311,7 +19053,7 @@
           <a:noFill/>
         </p:spPr>
         <p:txBody>
-          <a:bodyPr wrap="square" lIns="0" rIns="0" tIns="0" bIns="0" anchor="t">
+          <a:bodyPr wrap="square" lIns="0" tIns="0" rIns="0" bIns="0" anchor="t">
             <a:spAutoFit/>
           </a:bodyPr>
           <a:lstStyle/>
@@ -17329,12 +19071,20 @@
                 <a:solidFill>
                   <a:srgbClr val="8C6031"/>
                 </a:solidFill>
-                <a:latin typeface="Arial"/>
-                <a:ea typeface="Arial"/>
-                <a:cs typeface="Arial"/>
+                <a:latin typeface="Arial" panose="020B0604020202090204"/>
+                <a:ea typeface="Arial" panose="020B0604020202090204"/>
+                <a:cs typeface="Arial" panose="020B0604020202090204"/>
               </a:rPr>
               <a:t>Raw diagnostics are possible; verified physical contact is not established.</a:t>
             </a:r>
+            <a:endParaRPr sz="1050" b="0" i="0">
+              <a:solidFill>
+                <a:srgbClr val="8C6031"/>
+              </a:solidFill>
+              <a:latin typeface="Arial" panose="020B0604020202090204"/>
+              <a:ea typeface="Arial" panose="020B0604020202090204"/>
+              <a:cs typeface="Arial" panose="020B0604020202090204"/>
+            </a:endParaRPr>
           </a:p>
         </p:txBody>
       </p:sp>
@@ -17400,7 +19150,7 @@
           <a:noFill/>
         </p:spPr>
         <p:txBody>
-          <a:bodyPr wrap="square" lIns="0" rIns="0" tIns="0" bIns="0" anchor="t">
+          <a:bodyPr wrap="square" lIns="0" tIns="0" rIns="0" bIns="0" anchor="t">
             <a:spAutoFit/>
           </a:bodyPr>
           <a:lstStyle/>
@@ -17418,28 +19168,36 @@
                 <a:solidFill>
                   <a:srgbClr val="52765A"/>
                 </a:solidFill>
-                <a:latin typeface="Arial"/>
-                <a:ea typeface="Arial"/>
-                <a:cs typeface="Arial"/>
+                <a:latin typeface="Arial" panose="020B0604020202090204"/>
+                <a:ea typeface="Arial" panose="020B0604020202090204"/>
+                <a:cs typeface="Arial" panose="020B0604020202090204"/>
               </a:rPr>
               <a:t>Keep signed raw values and original timestamps. HDF5 conversion does not add calibration or synchronize streams.</a:t>
             </a:r>
+            <a:endParaRPr sz="1050" b="0" i="0">
+              <a:solidFill>
+                <a:srgbClr val="52765A"/>
+              </a:solidFill>
+              <a:latin typeface="Arial" panose="020B0604020202090204"/>
+              <a:ea typeface="Arial" panose="020B0604020202090204"/>
+              <a:cs typeface="Arial" panose="020B0604020202090204"/>
+            </a:endParaRPr>
           </a:p>
         </p:txBody>
       </p:sp>
     </p:spTree>
   </p:cSld>
-  <p:transition xmlns:p="http://schemas.openxmlformats.org/presentationml/2006/main" spd="slow">
-    <p:fade/>
-  </p:transition>
   <p:clrMapOvr>
     <a:masterClrMapping/>
   </p:clrMapOvr>
+  <p:transition spd="slow">
+    <p:fade/>
+  </p:transition>
 </p:sld>
 </file>
 
 <file path=ppt/slides/slide8.xml><?xml version="1.0" encoding="utf-8"?>
-<p:sld xmlns:a="http://schemas.openxmlformats.org/drawingml/2006/main" xmlns:p="http://schemas.openxmlformats.org/presentationml/2006/main" xmlns:r="http://schemas.openxmlformats.org/officeDocument/2006/relationships">
+<p:sld xmlns:a="http://schemas.openxmlformats.org/drawingml/2006/main" xmlns:r="http://schemas.openxmlformats.org/officeDocument/2006/relationships" xmlns:p="http://schemas.openxmlformats.org/presentationml/2006/main">
   <p:cSld>
     <p:bg>
       <p:bgPr>
@@ -17473,7 +19231,7 @@
           <a:noFill/>
         </p:spPr>
         <p:txBody>
-          <a:bodyPr wrap="square" lIns="0" rIns="0" tIns="0" bIns="0" anchor="t">
+          <a:bodyPr wrap="square" lIns="0" tIns="0" rIns="0" bIns="0" anchor="t">
             <a:spAutoFit/>
           </a:bodyPr>
           <a:lstStyle/>
@@ -17491,12 +19249,20 @@
                 <a:solidFill>
                   <a:srgbClr val="52765A"/>
                 </a:solidFill>
-                <a:latin typeface="Arial"/>
-                <a:ea typeface="Arial"/>
-                <a:cs typeface="Arial"/>
+                <a:latin typeface="Arial" panose="020B0604020202090204"/>
+                <a:ea typeface="Arial" panose="020B0604020202090204"/>
+                <a:cs typeface="Arial" panose="020B0604020202090204"/>
               </a:rPr>
               <a:t>08 / ANALYSIS ATTRIBUTES</a:t>
             </a:r>
+            <a:endParaRPr sz="900" b="1" i="0">
+              <a:solidFill>
+                <a:srgbClr val="52765A"/>
+              </a:solidFill>
+              <a:latin typeface="Arial" panose="020B0604020202090204"/>
+              <a:ea typeface="Arial" panose="020B0604020202090204"/>
+              <a:cs typeface="Arial" panose="020B0604020202090204"/>
+            </a:endParaRPr>
           </a:p>
         </p:txBody>
       </p:sp>
@@ -17517,7 +19283,7 @@
           <a:noFill/>
         </p:spPr>
         <p:txBody>
-          <a:bodyPr wrap="square" lIns="0" rIns="0" tIns="0" bIns="0" anchor="t">
+          <a:bodyPr wrap="square" lIns="0" tIns="0" rIns="0" bIns="0" anchor="t">
             <a:spAutoFit/>
           </a:bodyPr>
           <a:lstStyle/>
@@ -17535,12 +19301,20 @@
                 <a:solidFill>
                   <a:srgbClr val="1D2B24"/>
                 </a:solidFill>
-                <a:latin typeface="Arial"/>
-                <a:ea typeface="Arial"/>
-                <a:cs typeface="Arial"/>
+                <a:latin typeface="Arial" panose="020B0604020202090204"/>
+                <a:ea typeface="Arial" panose="020B0604020202090204"/>
+                <a:cs typeface="Arial" panose="020B0604020202090204"/>
               </a:rPr>
               <a:t>Analyze signal strength, distribution, and timing</a:t>
             </a:r>
+            <a:endParaRPr sz="2250" b="1" i="0">
+              <a:solidFill>
+                <a:srgbClr val="1D2B24"/>
+              </a:solidFill>
+              <a:latin typeface="Arial" panose="020B0604020202090204"/>
+              <a:ea typeface="Arial" panose="020B0604020202090204"/>
+              <a:cs typeface="Arial" panose="020B0604020202090204"/>
+            </a:endParaRPr>
           </a:p>
         </p:txBody>
       </p:sp>
@@ -17561,7 +19335,7 @@
           <a:noFill/>
         </p:spPr>
         <p:txBody>
-          <a:bodyPr wrap="square" lIns="0" rIns="0" tIns="0" bIns="0" anchor="t">
+          <a:bodyPr wrap="square" lIns="0" tIns="0" rIns="0" bIns="0" anchor="t">
             <a:spAutoFit/>
           </a:bodyPr>
           <a:lstStyle/>
@@ -17579,12 +19353,20 @@
                 <a:solidFill>
                   <a:srgbClr val="657269"/>
                 </a:solidFill>
-                <a:latin typeface="Arial"/>
-                <a:ea typeface="Arial"/>
-                <a:cs typeface="Arial"/>
+                <a:latin typeface="Arial" panose="020B0604020202090204"/>
+                <a:ea typeface="Arial" panose="020B0604020202090204"/>
+                <a:cs typeface="Arial" panose="020B0604020202090204"/>
               </a:rPr>
               <a:t>Start with raw diagnostics; compare thresholds and inspect the plots before drawing task-level conclusions.</a:t>
             </a:r>
+            <a:endParaRPr sz="1200" b="0" i="0">
+              <a:solidFill>
+                <a:srgbClr val="657269"/>
+              </a:solidFill>
+              <a:latin typeface="Arial" panose="020B0604020202090204"/>
+              <a:ea typeface="Arial" panose="020B0604020202090204"/>
+              <a:cs typeface="Arial" panose="020B0604020202090204"/>
+            </a:endParaRPr>
           </a:p>
         </p:txBody>
       </p:sp>
@@ -17640,7 +19422,7 @@
           <a:noFill/>
         </p:spPr>
         <p:txBody>
-          <a:bodyPr wrap="square" lIns="0" rIns="0" tIns="0" bIns="0" anchor="t">
+          <a:bodyPr wrap="square" lIns="0" tIns="0" rIns="0" bIns="0" anchor="t">
             <a:spAutoFit/>
           </a:bodyPr>
           <a:lstStyle/>
@@ -17658,12 +19440,20 @@
                 <a:solidFill>
                   <a:srgbClr val="657269"/>
                 </a:solidFill>
-                <a:latin typeface="Arial"/>
-                <a:ea typeface="Arial"/>
-                <a:cs typeface="Arial"/>
+                <a:latin typeface="Arial" panose="020B0604020202090204"/>
+                <a:ea typeface="Arial" panose="020B0604020202090204"/>
+                <a:cs typeface="Arial" panose="020B0604020202090204"/>
               </a:rPr>
               <a:t>DEXMAN_LEROBOT / VR TELEOPERATION SYSTEM</a:t>
             </a:r>
+            <a:endParaRPr sz="750" b="1" i="0">
+              <a:solidFill>
+                <a:srgbClr val="657269"/>
+              </a:solidFill>
+              <a:latin typeface="Arial" panose="020B0604020202090204"/>
+              <a:ea typeface="Arial" panose="020B0604020202090204"/>
+              <a:cs typeface="Arial" panose="020B0604020202090204"/>
+            </a:endParaRPr>
           </a:p>
         </p:txBody>
       </p:sp>
@@ -17684,7 +19474,7 @@
           <a:noFill/>
         </p:spPr>
         <p:txBody>
-          <a:bodyPr wrap="square" lIns="0" rIns="0" tIns="0" bIns="0" anchor="t">
+          <a:bodyPr wrap="square" lIns="0" tIns="0" rIns="0" bIns="0" anchor="t">
             <a:spAutoFit/>
           </a:bodyPr>
           <a:lstStyle/>
@@ -17702,12 +19492,20 @@
                 <a:solidFill>
                   <a:srgbClr val="657269"/>
                 </a:solidFill>
-                <a:latin typeface="Arial"/>
-                <a:ea typeface="Arial"/>
-                <a:cs typeface="Arial"/>
+                <a:latin typeface="Arial" panose="020B0604020202090204"/>
+                <a:ea typeface="Arial" panose="020B0604020202090204"/>
+                <a:cs typeface="Arial" panose="020B0604020202090204"/>
               </a:rPr>
               <a:t>08 / 10</a:t>
             </a:r>
+            <a:endParaRPr sz="750" b="1" i="0">
+              <a:solidFill>
+                <a:srgbClr val="657269"/>
+              </a:solidFill>
+              <a:latin typeface="Arial" panose="020B0604020202090204"/>
+              <a:ea typeface="Arial" panose="020B0604020202090204"/>
+              <a:cs typeface="Arial" panose="020B0604020202090204"/>
+            </a:endParaRPr>
           </a:p>
         </p:txBody>
       </p:sp>
@@ -17775,7 +19573,7 @@
           <a:noFill/>
         </p:spPr>
         <p:txBody>
-          <a:bodyPr wrap="square" lIns="0" rIns="0" tIns="0" bIns="0" anchor="t">
+          <a:bodyPr wrap="square" lIns="0" tIns="0" rIns="0" bIns="0" anchor="t">
             <a:spAutoFit/>
           </a:bodyPr>
           <a:lstStyle/>
@@ -17793,12 +19591,20 @@
                 <a:solidFill>
                   <a:srgbClr val="52765A"/>
                 </a:solidFill>
-                <a:latin typeface="Arial"/>
-                <a:ea typeface="Arial"/>
-                <a:cs typeface="Arial"/>
+                <a:latin typeface="Arial" panose="020B0604020202090204"/>
+                <a:ea typeface="Arial" panose="020B0604020202090204"/>
+                <a:cs typeface="Arial" panose="020B0604020202090204"/>
               </a:rPr>
               <a:t>ACTUAL DATA / UNVERIFIED RAW SIGNAL</a:t>
             </a:r>
+            <a:endParaRPr sz="950" b="1" i="0">
+              <a:solidFill>
+                <a:srgbClr val="52765A"/>
+              </a:solidFill>
+              <a:latin typeface="Arial" panose="020B0604020202090204"/>
+              <a:ea typeface="Arial" panose="020B0604020202090204"/>
+              <a:cs typeface="Arial" panose="020B0604020202090204"/>
+            </a:endParaRPr>
           </a:p>
         </p:txBody>
       </p:sp>
@@ -17811,7 +19617,7 @@
           <p:nvPr/>
         </p:nvPicPr>
         <p:blipFill>
-          <a:blip r:embed="rId2"/>
+          <a:blip r:embed="rId1"/>
           <a:stretch>
             <a:fillRect/>
           </a:stretch>
@@ -17843,7 +19649,7 @@
           <a:noFill/>
         </p:spPr>
         <p:txBody>
-          <a:bodyPr wrap="square" lIns="0" rIns="0" tIns="0" bIns="0" anchor="t">
+          <a:bodyPr wrap="square" lIns="0" tIns="0" rIns="0" bIns="0" anchor="t">
             <a:spAutoFit/>
           </a:bodyPr>
           <a:lstStyle/>
@@ -17861,12 +19667,20 @@
                 <a:solidFill>
                   <a:srgbClr val="52765A"/>
                 </a:solidFill>
-                <a:latin typeface="Arial"/>
-                <a:ea typeface="Arial"/>
-                <a:cs typeface="Arial"/>
+                <a:latin typeface="Arial" panose="020B0604020202090204"/>
+                <a:ea typeface="Arial" panose="020B0604020202090204"/>
+                <a:cs typeface="Arial" panose="020B0604020202090204"/>
               </a:rPr>
               <a:t>01  AMPLITUDE</a:t>
             </a:r>
+            <a:endParaRPr sz="1050" b="1" i="0">
+              <a:solidFill>
+                <a:srgbClr val="52765A"/>
+              </a:solidFill>
+              <a:latin typeface="Arial" panose="020B0604020202090204"/>
+              <a:ea typeface="Arial" panose="020B0604020202090204"/>
+              <a:cs typeface="Arial" panose="020B0604020202090204"/>
+            </a:endParaRPr>
           </a:p>
         </p:txBody>
       </p:sp>
@@ -17887,7 +19701,7 @@
           <a:noFill/>
         </p:spPr>
         <p:txBody>
-          <a:bodyPr wrap="square" lIns="0" rIns="0" tIns="0" bIns="0" anchor="t">
+          <a:bodyPr wrap="square" lIns="0" tIns="0" rIns="0" bIns="0" anchor="t">
             <a:spAutoFit/>
           </a:bodyPr>
           <a:lstStyle/>
@@ -17905,12 +19719,20 @@
                 <a:solidFill>
                   <a:srgbClr val="657269"/>
                 </a:solidFill>
-                <a:latin typeface="Arial"/>
-                <a:ea typeface="Arial"/>
-                <a:cs typeface="Arial"/>
+                <a:latin typeface="Arial" panose="020B0604020202090204"/>
+                <a:ea typeface="Arial" panose="020B0604020202090204"/>
+                <a:cs typeface="Arial" panose="020B0604020202090204"/>
               </a:rPr>
               <a:t>Signed x/y/z; q = sqrt(x² + y² + z²).</a:t>
             </a:r>
+            <a:endParaRPr sz="1120" b="0" i="0">
+              <a:solidFill>
+                <a:srgbClr val="657269"/>
+              </a:solidFill>
+              <a:latin typeface="Arial" panose="020B0604020202090204"/>
+              <a:ea typeface="Arial" panose="020B0604020202090204"/>
+              <a:cs typeface="Arial" panose="020B0604020202090204"/>
+            </a:endParaRPr>
           </a:p>
           <a:p>
             <a:pPr algn="l">
@@ -17926,12 +19748,20 @@
                 <a:solidFill>
                   <a:srgbClr val="657269"/>
                 </a:solidFill>
-                <a:latin typeface="Arial"/>
-                <a:ea typeface="Arial"/>
-                <a:cs typeface="Arial"/>
+                <a:latin typeface="Arial" panose="020B0604020202090204"/>
+                <a:ea typeface="Arial" panose="020B0604020202090204"/>
+                <a:cs typeface="Arial" panose="020B0604020202090204"/>
               </a:rPr>
               <a:t>Peaks, means, and thresholded magnitude sums.</a:t>
             </a:r>
+            <a:endParaRPr sz="1120" b="0" i="0">
+              <a:solidFill>
+                <a:srgbClr val="657269"/>
+              </a:solidFill>
+              <a:latin typeface="Arial" panose="020B0604020202090204"/>
+              <a:ea typeface="Arial" panose="020B0604020202090204"/>
+              <a:cs typeface="Arial" panose="020B0604020202090204"/>
+            </a:endParaRPr>
           </a:p>
         </p:txBody>
       </p:sp>
@@ -17987,7 +19817,7 @@
           <a:noFill/>
         </p:spPr>
         <p:txBody>
-          <a:bodyPr wrap="square" lIns="0" rIns="0" tIns="0" bIns="0" anchor="t">
+          <a:bodyPr wrap="square" lIns="0" tIns="0" rIns="0" bIns="0" anchor="t">
             <a:spAutoFit/>
           </a:bodyPr>
           <a:lstStyle/>
@@ -18005,12 +19835,20 @@
                 <a:solidFill>
                   <a:srgbClr val="52765A"/>
                 </a:solidFill>
-                <a:latin typeface="Arial"/>
-                <a:ea typeface="Arial"/>
-                <a:cs typeface="Arial"/>
+                <a:latin typeface="Arial" panose="020B0604020202090204"/>
+                <a:ea typeface="Arial" panose="020B0604020202090204"/>
+                <a:cs typeface="Arial" panose="020B0604020202090204"/>
               </a:rPr>
               <a:t>02  RESPONSE OVER TIME</a:t>
             </a:r>
+            <a:endParaRPr sz="1050" b="1" i="0">
+              <a:solidFill>
+                <a:srgbClr val="52765A"/>
+              </a:solidFill>
+              <a:latin typeface="Arial" panose="020B0604020202090204"/>
+              <a:ea typeface="Arial" panose="020B0604020202090204"/>
+              <a:cs typeface="Arial" panose="020B0604020202090204"/>
+            </a:endParaRPr>
           </a:p>
         </p:txBody>
       </p:sp>
@@ -18031,7 +19869,7 @@
           <a:noFill/>
         </p:spPr>
         <p:txBody>
-          <a:bodyPr wrap="square" lIns="0" rIns="0" tIns="0" bIns="0" anchor="t">
+          <a:bodyPr wrap="square" lIns="0" tIns="0" rIns="0" bIns="0" anchor="t">
             <a:spAutoFit/>
           </a:bodyPr>
           <a:lstStyle/>
@@ -18049,12 +19887,20 @@
                 <a:solidFill>
                   <a:srgbClr val="657269"/>
                 </a:solidFill>
-                <a:latin typeface="Arial"/>
-                <a:ea typeface="Arial"/>
-                <a:cs typeface="Arial"/>
+                <a:latin typeface="Arial" panose="020B0604020202090204"/>
+                <a:ea typeface="Arial" panose="020B0604020202090204"/>
+                <a:cs typeface="Arial" panose="020B0604020202090204"/>
               </a:rPr>
               <a:t>Above-threshold counts, approximate duration,</a:t>
             </a:r>
+            <a:endParaRPr sz="1120" b="0" i="0">
+              <a:solidFill>
+                <a:srgbClr val="657269"/>
+              </a:solidFill>
+              <a:latin typeface="Arial" panose="020B0604020202090204"/>
+              <a:ea typeface="Arial" panose="020B0604020202090204"/>
+              <a:cs typeface="Arial" panose="020B0604020202090204"/>
+            </a:endParaRPr>
           </a:p>
           <a:p>
             <a:pPr algn="l">
@@ -18070,12 +19916,20 @@
                 <a:solidFill>
                   <a:srgbClr val="657269"/>
                 </a:solidFill>
-                <a:latin typeface="Arial"/>
-                <a:ea typeface="Arial"/>
-                <a:cs typeface="Arial"/>
+                <a:latin typeface="Arial" panose="020B0604020202090204"/>
+                <a:ea typeface="Arial" panose="020B0604020202090204"/>
+                <a:cs typeface="Arial" panose="020B0604020202090204"/>
               </a:rPr>
               <a:t>and raw·s integral; compare threshold 10 vs 20.</a:t>
             </a:r>
+            <a:endParaRPr sz="1120" b="0" i="0">
+              <a:solidFill>
+                <a:srgbClr val="657269"/>
+              </a:solidFill>
+              <a:latin typeface="Arial" panose="020B0604020202090204"/>
+              <a:ea typeface="Arial" panose="020B0604020202090204"/>
+              <a:cs typeface="Arial" panose="020B0604020202090204"/>
+            </a:endParaRPr>
           </a:p>
         </p:txBody>
       </p:sp>
@@ -18131,7 +19985,7 @@
           <a:noFill/>
         </p:spPr>
         <p:txBody>
-          <a:bodyPr wrap="square" lIns="0" rIns="0" tIns="0" bIns="0" anchor="t">
+          <a:bodyPr wrap="square" lIns="0" tIns="0" rIns="0" bIns="0" anchor="t">
             <a:spAutoFit/>
           </a:bodyPr>
           <a:lstStyle/>
@@ -18149,12 +20003,20 @@
                 <a:solidFill>
                   <a:srgbClr val="52765A"/>
                 </a:solidFill>
-                <a:latin typeface="Arial"/>
-                <a:ea typeface="Arial"/>
-                <a:cs typeface="Arial"/>
+                <a:latin typeface="Arial" panose="020B0604020202090204"/>
+                <a:ea typeface="Arial" panose="020B0604020202090204"/>
+                <a:cs typeface="Arial" panose="020B0604020202090204"/>
               </a:rPr>
               <a:t>03  DISTRIBUTION</a:t>
             </a:r>
+            <a:endParaRPr sz="1050" b="1" i="0">
+              <a:solidFill>
+                <a:srgbClr val="52765A"/>
+              </a:solidFill>
+              <a:latin typeface="Arial" panose="020B0604020202090204"/>
+              <a:ea typeface="Arial" panose="020B0604020202090204"/>
+              <a:cs typeface="Arial" panose="020B0604020202090204"/>
+            </a:endParaRPr>
           </a:p>
         </p:txBody>
       </p:sp>
@@ -18175,7 +20037,7 @@
           <a:noFill/>
         </p:spPr>
         <p:txBody>
-          <a:bodyPr wrap="square" lIns="0" rIns="0" tIns="0" bIns="0" anchor="t">
+          <a:bodyPr wrap="square" lIns="0" tIns="0" rIns="0" bIns="0" anchor="t">
             <a:spAutoFit/>
           </a:bodyPr>
           <a:lstStyle/>
@@ -18193,12 +20055,20 @@
                 <a:solidFill>
                   <a:srgbClr val="657269"/>
                 </a:solidFill>
-                <a:latin typeface="Arial"/>
-                <a:ea typeface="Arial"/>
-                <a:cs typeface="Arial"/>
+                <a:latin typeface="Arial" panose="020B0604020202090204"/>
+                <a:ea typeface="Arial" panose="020B0604020202090204"/>
+                <a:cs typeface="Arial" panose="020B0604020202090204"/>
               </a:rPr>
               <a:t>Time × SDK-index heatmap; per-taxel mean / max.</a:t>
             </a:r>
+            <a:endParaRPr sz="1120" b="0" i="0">
+              <a:solidFill>
+                <a:srgbClr val="657269"/>
+              </a:solidFill>
+              <a:latin typeface="Arial" panose="020B0604020202090204"/>
+              <a:ea typeface="Arial" panose="020B0604020202090204"/>
+              <a:cs typeface="Arial" panose="020B0604020202090204"/>
+            </a:endParaRPr>
           </a:p>
           <a:p>
             <a:pPr algn="l">
@@ -18214,12 +20084,20 @@
                 <a:solidFill>
                   <a:srgbClr val="657269"/>
                 </a:solidFill>
-                <a:latin typeface="Arial"/>
-                <a:ea typeface="Arial"/>
-                <a:cs typeface="Arial"/>
+                <a:latin typeface="Arial" panose="020B0604020202090204"/>
+                <a:ea typeface="Arial" panose="020B0604020202090204"/>
+                <a:cs typeface="Arial" panose="020B0604020202090204"/>
               </a:rPr>
               <a:t>A spatial hand map needs a verified point layout.</a:t>
             </a:r>
+            <a:endParaRPr sz="1120" b="0" i="0">
+              <a:solidFill>
+                <a:srgbClr val="657269"/>
+              </a:solidFill>
+              <a:latin typeface="Arial" panose="020B0604020202090204"/>
+              <a:ea typeface="Arial" panose="020B0604020202090204"/>
+              <a:cs typeface="Arial" panose="020B0604020202090204"/>
+            </a:endParaRPr>
           </a:p>
         </p:txBody>
       </p:sp>
@@ -18275,7 +20153,7 @@
           <a:noFill/>
         </p:spPr>
         <p:txBody>
-          <a:bodyPr wrap="square" lIns="0" rIns="0" tIns="0" bIns="0" anchor="t">
+          <a:bodyPr wrap="square" lIns="0" tIns="0" rIns="0" bIns="0" anchor="t">
             <a:spAutoFit/>
           </a:bodyPr>
           <a:lstStyle/>
@@ -18293,12 +20171,20 @@
                 <a:solidFill>
                   <a:srgbClr val="52765A"/>
                 </a:solidFill>
-                <a:latin typeface="Arial"/>
-                <a:ea typeface="Arial"/>
-                <a:cs typeface="Arial"/>
+                <a:latin typeface="Arial" panose="020B0604020202090204"/>
+                <a:ea typeface="Arial" panose="020B0604020202090204"/>
+                <a:cs typeface="Arial" panose="020B0604020202090204"/>
               </a:rPr>
               <a:t>04  CONTEXT &amp; QUALITY</a:t>
             </a:r>
+            <a:endParaRPr sz="1050" b="1" i="0">
+              <a:solidFill>
+                <a:srgbClr val="52765A"/>
+              </a:solidFill>
+              <a:latin typeface="Arial" panose="020B0604020202090204"/>
+              <a:ea typeface="Arial" panose="020B0604020202090204"/>
+              <a:cs typeface="Arial" panose="020B0604020202090204"/>
+            </a:endParaRPr>
           </a:p>
         </p:txBody>
       </p:sp>
@@ -18319,7 +20205,7 @@
           <a:noFill/>
         </p:spPr>
         <p:txBody>
-          <a:bodyPr wrap="square" lIns="0" rIns="0" tIns="0" bIns="0" anchor="t">
+          <a:bodyPr wrap="square" lIns="0" tIns="0" rIns="0" bIns="0" anchor="t">
             <a:spAutoFit/>
           </a:bodyPr>
           <a:lstStyle/>
@@ -18337,12 +20223,20 @@
                 <a:solidFill>
                   <a:srgbClr val="657269"/>
                 </a:solidFill>
-                <a:latin typeface="Arial"/>
-                <a:ea typeface="Arial"/>
-                <a:cs typeface="Arial"/>
+                <a:latin typeface="Arial" panose="020B0604020202090204"/>
+                <a:ea typeface="Arial" panose="020B0604020202090204"/>
+                <a:cs typeface="Arial" panose="020B0604020202090204"/>
               </a:rPr>
               <a:t>11 SDK summaries, sensor temperatures,</a:t>
             </a:r>
+            <a:endParaRPr sz="1120" b="0" i="0">
+              <a:solidFill>
+                <a:srgbClr val="657269"/>
+              </a:solidFill>
+              <a:latin typeface="Arial" panose="020B0604020202090204"/>
+              <a:ea typeface="Arial" panose="020B0604020202090204"/>
+              <a:cs typeface="Arial" panose="020B0604020202090204"/>
+            </a:endParaRPr>
           </a:p>
           <a:p>
             <a:pPr algn="l">
@@ -18358,12 +20252,20 @@
                 <a:solidFill>
                   <a:srgbClr val="657269"/>
                 </a:solidFill>
-                <a:latin typeface="Arial"/>
-                <a:ea typeface="Arial"/>
-                <a:cs typeface="Arial"/>
+                <a:latin typeface="Arial" panose="020B0604020202090204"/>
+                <a:ea typeface="Arial" panose="020B0604020202090204"/>
+                <a:cs typeface="Arial" panose="020B0604020202090204"/>
               </a:rPr>
               <a:t>frame intervals, and host query latency.</a:t>
             </a:r>
+            <a:endParaRPr sz="1120" b="0" i="0">
+              <a:solidFill>
+                <a:srgbClr val="657269"/>
+              </a:solidFill>
+              <a:latin typeface="Arial" panose="020B0604020202090204"/>
+              <a:ea typeface="Arial" panose="020B0604020202090204"/>
+              <a:cs typeface="Arial" panose="020B0604020202090204"/>
+            </a:endParaRPr>
           </a:p>
         </p:txBody>
       </p:sp>
@@ -18384,7 +20286,7 @@
           <a:noFill/>
         </p:spPr>
         <p:txBody>
-          <a:bodyPr wrap="square" lIns="0" rIns="0" tIns="0" bIns="0" anchor="t">
+          <a:bodyPr wrap="square" lIns="0" tIns="0" rIns="0" bIns="0" anchor="t">
             <a:spAutoFit/>
           </a:bodyPr>
           <a:lstStyle/>
@@ -18402,12 +20304,20 @@
                 <a:solidFill>
                   <a:srgbClr val="657269"/>
                 </a:solidFill>
-                <a:latin typeface="Arial"/>
-                <a:ea typeface="Arial"/>
-                <a:cs typeface="Arial"/>
+                <a:latin typeface="Arial" panose="020B0604020202090204"/>
+                <a:ea typeface="Arial" panose="020B0604020202090204"/>
+                <a:cs typeface="Arial" panose="020B0604020202090204"/>
               </a:rPr>
               <a:t>Heatmap: host time on x; SDK taxel index on y; shared raw-magnitude color scale with square-root mapping.</a:t>
             </a:r>
+            <a:endParaRPr sz="900" b="0" i="0">
+              <a:solidFill>
+                <a:srgbClr val="657269"/>
+              </a:solidFill>
+              <a:latin typeface="Arial" panose="020B0604020202090204"/>
+              <a:ea typeface="Arial" panose="020B0604020202090204"/>
+              <a:cs typeface="Arial" panose="020B0604020202090204"/>
+            </a:endParaRPr>
           </a:p>
         </p:txBody>
       </p:sp>
@@ -18473,7 +20383,7 @@
           <a:noFill/>
         </p:spPr>
         <p:txBody>
-          <a:bodyPr wrap="square" lIns="0" rIns="0" tIns="0" bIns="0" anchor="t">
+          <a:bodyPr wrap="square" lIns="0" tIns="0" rIns="0" bIns="0" anchor="t">
             <a:spAutoFit/>
           </a:bodyPr>
           <a:lstStyle/>
@@ -18491,28 +20401,36 @@
                 <a:solidFill>
                   <a:srgbClr val="8C6031"/>
                 </a:solidFill>
-                <a:latin typeface="Arial"/>
-                <a:ea typeface="Arial"/>
-                <a:cs typeface="Arial"/>
+                <a:latin typeface="Arial" panose="020B0604020202090204"/>
+                <a:ea typeface="Arial" panose="020B0604020202090204"/>
+                <a:cs typeface="Arial" panose="020B0604020202090204"/>
               </a:rPr>
               <a:t>Above-threshold count is not contact area. A raw magnitude sum is not a calibrated force or pressure.</a:t>
             </a:r>
+            <a:endParaRPr sz="1050" b="0" i="0">
+              <a:solidFill>
+                <a:srgbClr val="8C6031"/>
+              </a:solidFill>
+              <a:latin typeface="Arial" panose="020B0604020202090204"/>
+              <a:ea typeface="Arial" panose="020B0604020202090204"/>
+              <a:cs typeface="Arial" panose="020B0604020202090204"/>
+            </a:endParaRPr>
           </a:p>
         </p:txBody>
       </p:sp>
     </p:spTree>
   </p:cSld>
-  <p:transition xmlns:p="http://schemas.openxmlformats.org/presentationml/2006/main" spd="slow">
-    <p:fade/>
-  </p:transition>
   <p:clrMapOvr>
     <a:masterClrMapping/>
   </p:clrMapOvr>
+  <p:transition spd="slow">
+    <p:fade/>
+  </p:transition>
 </p:sld>
 </file>
 
 <file path=ppt/slides/slide9.xml><?xml version="1.0" encoding="utf-8"?>
-<p:sld xmlns:a="http://schemas.openxmlformats.org/drawingml/2006/main" xmlns:p="http://schemas.openxmlformats.org/presentationml/2006/main" xmlns:r="http://schemas.openxmlformats.org/officeDocument/2006/relationships">
+<p:sld xmlns:a="http://schemas.openxmlformats.org/drawingml/2006/main" xmlns:r="http://schemas.openxmlformats.org/officeDocument/2006/relationships" xmlns:p="http://schemas.openxmlformats.org/presentationml/2006/main">
   <p:cSld>
     <p:bg>
       <p:bgPr>
@@ -18546,7 +20464,7 @@
           <a:noFill/>
         </p:spPr>
         <p:txBody>
-          <a:bodyPr wrap="square" lIns="0" rIns="0" tIns="0" bIns="0" anchor="t">
+          <a:bodyPr wrap="square" lIns="0" tIns="0" rIns="0" bIns="0" anchor="t">
             <a:spAutoFit/>
           </a:bodyPr>
           <a:lstStyle/>
@@ -18564,12 +20482,20 @@
                 <a:solidFill>
                   <a:srgbClr val="52765A"/>
                 </a:solidFill>
-                <a:latin typeface="Arial"/>
-                <a:ea typeface="Arial"/>
-                <a:cs typeface="Arial"/>
+                <a:latin typeface="Arial" panose="020B0604020202090204"/>
+                <a:ea typeface="Arial" panose="020B0604020202090204"/>
+                <a:cs typeface="Arial" panose="020B0604020202090204"/>
               </a:rPr>
               <a:t>09 / AREA &amp; PRESSURE</a:t>
             </a:r>
+            <a:endParaRPr sz="900" b="1" i="0">
+              <a:solidFill>
+                <a:srgbClr val="52765A"/>
+              </a:solidFill>
+              <a:latin typeface="Arial" panose="020B0604020202090204"/>
+              <a:ea typeface="Arial" panose="020B0604020202090204"/>
+              <a:cs typeface="Arial" panose="020B0604020202090204"/>
+            </a:endParaRPr>
           </a:p>
         </p:txBody>
       </p:sp>
@@ -18590,7 +20516,7 @@
           <a:noFill/>
         </p:spPr>
         <p:txBody>
-          <a:bodyPr wrap="square" lIns="0" rIns="0" tIns="0" bIns="0" anchor="t">
+          <a:bodyPr wrap="square" lIns="0" tIns="0" rIns="0" bIns="0" anchor="t">
             <a:spAutoFit/>
           </a:bodyPr>
           <a:lstStyle/>
@@ -18608,12 +20534,20 @@
                 <a:solidFill>
                   <a:srgbClr val="1D2B24"/>
                 </a:solidFill>
-                <a:latin typeface="Arial"/>
-                <a:ea typeface="Arial"/>
-                <a:cs typeface="Arial"/>
+                <a:latin typeface="Arial" panose="020B0604020202090204"/>
+                <a:ea typeface="Arial" panose="020B0604020202090204"/>
+                <a:cs typeface="Arial" panose="020B0604020202090204"/>
               </a:rPr>
               <a:t>Contact area and pressure require measured calibration</a:t>
             </a:r>
+            <a:endParaRPr sz="2250" b="1" i="0">
+              <a:solidFill>
+                <a:srgbClr val="1D2B24"/>
+              </a:solidFill>
+              <a:latin typeface="Arial" panose="020B0604020202090204"/>
+              <a:ea typeface="Arial" panose="020B0604020202090204"/>
+              <a:cs typeface="Arial" panose="020B0604020202090204"/>
+            </a:endParaRPr>
           </a:p>
         </p:txBody>
       </p:sp>
@@ -18634,7 +20568,7 @@
           <a:noFill/>
         </p:spPr>
         <p:txBody>
-          <a:bodyPr wrap="square" lIns="0" rIns="0" tIns="0" bIns="0" anchor="t">
+          <a:bodyPr wrap="square" lIns="0" tIns="0" rIns="0" bIns="0" anchor="t">
             <a:spAutoFit/>
           </a:bodyPr>
           <a:lstStyle/>
@@ -18652,12 +20586,20 @@
                 <a:solidFill>
                   <a:srgbClr val="657269"/>
                 </a:solidFill>
-                <a:latin typeface="Arial"/>
-                <a:ea typeface="Arial"/>
-                <a:cs typeface="Arial"/>
+                <a:latin typeface="Arial" panose="020B0604020202090204"/>
+                <a:ea typeface="Arial" panose="020B0604020202090204"/>
+                <a:cs typeface="Arial" panose="020B0604020202090204"/>
               </a:rPr>
               <a:t>Physical analysis is implemented, but the current all-false-mask recording cannot produce valid physical results.</a:t>
             </a:r>
+            <a:endParaRPr sz="1200" b="0" i="0">
+              <a:solidFill>
+                <a:srgbClr val="657269"/>
+              </a:solidFill>
+              <a:latin typeface="Arial" panose="020B0604020202090204"/>
+              <a:ea typeface="Arial" panose="020B0604020202090204"/>
+              <a:cs typeface="Arial" panose="020B0604020202090204"/>
+            </a:endParaRPr>
           </a:p>
         </p:txBody>
       </p:sp>
@@ -18713,7 +20655,7 @@
           <a:noFill/>
         </p:spPr>
         <p:txBody>
-          <a:bodyPr wrap="square" lIns="0" rIns="0" tIns="0" bIns="0" anchor="t">
+          <a:bodyPr wrap="square" lIns="0" tIns="0" rIns="0" bIns="0" anchor="t">
             <a:spAutoFit/>
           </a:bodyPr>
           <a:lstStyle/>
@@ -18731,12 +20673,20 @@
                 <a:solidFill>
                   <a:srgbClr val="657269"/>
                 </a:solidFill>
-                <a:latin typeface="Arial"/>
-                <a:ea typeface="Arial"/>
-                <a:cs typeface="Arial"/>
+                <a:latin typeface="Arial" panose="020B0604020202090204"/>
+                <a:ea typeface="Arial" panose="020B0604020202090204"/>
+                <a:cs typeface="Arial" panose="020B0604020202090204"/>
               </a:rPr>
               <a:t>DEXMAN_LEROBOT / VR TELEOPERATION SYSTEM</a:t>
             </a:r>
+            <a:endParaRPr sz="750" b="1" i="0">
+              <a:solidFill>
+                <a:srgbClr val="657269"/>
+              </a:solidFill>
+              <a:latin typeface="Arial" panose="020B0604020202090204"/>
+              <a:ea typeface="Arial" panose="020B0604020202090204"/>
+              <a:cs typeface="Arial" panose="020B0604020202090204"/>
+            </a:endParaRPr>
           </a:p>
         </p:txBody>
       </p:sp>
@@ -18757,7 +20707,7 @@
           <a:noFill/>
         </p:spPr>
         <p:txBody>
-          <a:bodyPr wrap="square" lIns="0" rIns="0" tIns="0" bIns="0" anchor="t">
+          <a:bodyPr wrap="square" lIns="0" tIns="0" rIns="0" bIns="0" anchor="t">
             <a:spAutoFit/>
           </a:bodyPr>
           <a:lstStyle/>
@@ -18775,12 +20725,20 @@
                 <a:solidFill>
                   <a:srgbClr val="657269"/>
                 </a:solidFill>
-                <a:latin typeface="Arial"/>
-                <a:ea typeface="Arial"/>
-                <a:cs typeface="Arial"/>
+                <a:latin typeface="Arial" panose="020B0604020202090204"/>
+                <a:ea typeface="Arial" panose="020B0604020202090204"/>
+                <a:cs typeface="Arial" panose="020B0604020202090204"/>
               </a:rPr>
               <a:t>09 / 10</a:t>
             </a:r>
+            <a:endParaRPr sz="750" b="1" i="0">
+              <a:solidFill>
+                <a:srgbClr val="657269"/>
+              </a:solidFill>
+              <a:latin typeface="Arial" panose="020B0604020202090204"/>
+              <a:ea typeface="Arial" panose="020B0604020202090204"/>
+              <a:cs typeface="Arial" panose="020B0604020202090204"/>
+            </a:endParaRPr>
           </a:p>
         </p:txBody>
       </p:sp>
@@ -18848,7 +20806,7 @@
           <a:noFill/>
         </p:spPr>
         <p:txBody>
-          <a:bodyPr wrap="square" lIns="0" rIns="0" tIns="0" bIns="0" anchor="t">
+          <a:bodyPr wrap="square" lIns="0" tIns="0" rIns="0" bIns="0" anchor="t">
             <a:spAutoFit/>
           </a:bodyPr>
           <a:lstStyle/>
@@ -18866,12 +20824,20 @@
                 <a:solidFill>
                   <a:srgbClr val="52765A"/>
                 </a:solidFill>
-                <a:latin typeface="Arial"/>
-                <a:ea typeface="Arial"/>
-                <a:cs typeface="Arial"/>
+                <a:latin typeface="Arial" panose="020B0604020202090204"/>
+                <a:ea typeface="Arial" panose="020B0604020202090204"/>
+                <a:cs typeface="Arial" panose="020B0604020202090204"/>
               </a:rPr>
               <a:t>1 / CALIBRATE FORCE</a:t>
             </a:r>
+            <a:endParaRPr sz="1000" b="1" i="0">
+              <a:solidFill>
+                <a:srgbClr val="52765A"/>
+              </a:solidFill>
+              <a:latin typeface="Arial" panose="020B0604020202090204"/>
+              <a:ea typeface="Arial" panose="020B0604020202090204"/>
+              <a:cs typeface="Arial" panose="020B0604020202090204"/>
+            </a:endParaRPr>
           </a:p>
         </p:txBody>
       </p:sp>
@@ -18892,7 +20858,7 @@
           <a:noFill/>
         </p:spPr>
         <p:txBody>
-          <a:bodyPr wrap="square" lIns="0" rIns="0" tIns="0" bIns="0" anchor="t">
+          <a:bodyPr wrap="square" lIns="0" tIns="0" rIns="0" bIns="0" anchor="t">
             <a:spAutoFit/>
           </a:bodyPr>
           <a:lstStyle/>
@@ -18910,12 +20876,20 @@
                 <a:solidFill>
                   <a:srgbClr val="1D2B24"/>
                 </a:solidFill>
-                <a:latin typeface="Arial"/>
-                <a:ea typeface="Arial"/>
-                <a:cs typeface="Arial"/>
+                <a:latin typeface="Arial" panose="020B0604020202090204"/>
+                <a:ea typeface="Arial" panose="020B0604020202090204"/>
+                <a:cs typeface="Arial" panose="020B0604020202090204"/>
               </a:rPr>
               <a:t>F_i = M_i (raw_i − bias_i)</a:t>
             </a:r>
+            <a:endParaRPr sz="1550" b="1" i="0">
+              <a:solidFill>
+                <a:srgbClr val="1D2B24"/>
+              </a:solidFill>
+              <a:latin typeface="Arial" panose="020B0604020202090204"/>
+              <a:ea typeface="Arial" panose="020B0604020202090204"/>
+              <a:cs typeface="Arial" panose="020B0604020202090204"/>
+            </a:endParaRPr>
           </a:p>
         </p:txBody>
       </p:sp>
@@ -18936,7 +20910,7 @@
           <a:noFill/>
         </p:spPr>
         <p:txBody>
-          <a:bodyPr wrap="square" lIns="0" rIns="0" tIns="0" bIns="0" anchor="t">
+          <a:bodyPr wrap="square" lIns="0" tIns="0" rIns="0" bIns="0" anchor="t">
             <a:spAutoFit/>
           </a:bodyPr>
           <a:lstStyle/>
@@ -18954,12 +20928,20 @@
                 <a:solidFill>
                   <a:srgbClr val="1D2B24"/>
                 </a:solidFill>
-                <a:latin typeface="Arial"/>
-                <a:ea typeface="Arial"/>
-                <a:cs typeface="Arial"/>
+                <a:latin typeface="Arial" panose="020B0604020202090204"/>
+                <a:ea typeface="Arial" panose="020B0604020202090204"/>
+                <a:cs typeface="Arial" panose="020B0604020202090204"/>
               </a:rPr>
               <a:t>Fn_i = max(F_i · n_i, 0)</a:t>
             </a:r>
+            <a:endParaRPr sz="1550" b="1" i="0">
+              <a:solidFill>
+                <a:srgbClr val="1D2B24"/>
+              </a:solidFill>
+              <a:latin typeface="Arial" panose="020B0604020202090204"/>
+              <a:ea typeface="Arial" panose="020B0604020202090204"/>
+              <a:cs typeface="Arial" panose="020B0604020202090204"/>
+            </a:endParaRPr>
           </a:p>
         </p:txBody>
       </p:sp>
@@ -18980,7 +20962,7 @@
           <a:noFill/>
         </p:spPr>
         <p:txBody>
-          <a:bodyPr wrap="square" lIns="0" rIns="0" tIns="0" bIns="0" anchor="t">
+          <a:bodyPr wrap="square" lIns="0" tIns="0" rIns="0" bIns="0" anchor="t">
             <a:spAutoFit/>
           </a:bodyPr>
           <a:lstStyle/>
@@ -18998,12 +20980,20 @@
                 <a:solidFill>
                   <a:srgbClr val="657269"/>
                 </a:solidFill>
-                <a:latin typeface="Arial"/>
-                <a:ea typeface="Arial"/>
-                <a:cs typeface="Arial"/>
+                <a:latin typeface="Arial" panose="020B0604020202090204"/>
+                <a:ea typeface="Arial" panose="020B0604020202090204"/>
+                <a:cs typeface="Arial" panose="020B0604020202090204"/>
               </a:rPr>
               <a:t>Measured matrix + unloaded bias.</a:t>
             </a:r>
+            <a:endParaRPr sz="1050" b="0" i="0">
+              <a:solidFill>
+                <a:srgbClr val="657269"/>
+              </a:solidFill>
+              <a:latin typeface="Arial" panose="020B0604020202090204"/>
+              <a:ea typeface="Arial" panose="020B0604020202090204"/>
+              <a:cs typeface="Arial" panose="020B0604020202090204"/>
+            </a:endParaRPr>
           </a:p>
           <a:p>
             <a:pPr algn="l">
@@ -19019,12 +21009,20 @@
                 <a:solidFill>
                   <a:srgbClr val="657269"/>
                 </a:solidFill>
-                <a:latin typeface="Arial"/>
-                <a:ea typeface="Arial"/>
-                <a:cs typeface="Arial"/>
+                <a:latin typeface="Arial" panose="020B0604020202090204"/>
+                <a:ea typeface="Arial" panose="020B0604020202090204"/>
+                <a:cs typeface="Arial" panose="020B0604020202090204"/>
               </a:rPr>
               <a:t>Unit surface normal in the force frame;</a:t>
             </a:r>
+            <a:endParaRPr sz="1050" b="0" i="0">
+              <a:solidFill>
+                <a:srgbClr val="657269"/>
+              </a:solidFill>
+              <a:latin typeface="Arial" panose="020B0604020202090204"/>
+              <a:ea typeface="Arial" panose="020B0604020202090204"/>
+              <a:cs typeface="Arial" panose="020B0604020202090204"/>
+            </a:endParaRPr>
           </a:p>
           <a:p>
             <a:pPr algn="l">
@@ -19040,12 +21038,20 @@
                 <a:solidFill>
                   <a:srgbClr val="657269"/>
                 </a:solidFill>
-                <a:latin typeface="Arial"/>
-                <a:ea typeface="Arial"/>
-                <a:cs typeface="Arial"/>
+                <a:latin typeface="Arial" panose="020B0604020202090204"/>
+                <a:ea typeface="Arial" panose="020B0604020202090204"/>
+                <a:cs typeface="Arial" panose="020B0604020202090204"/>
               </a:rPr>
               <a:t>positive projection means compression.</a:t>
             </a:r>
+            <a:endParaRPr sz="1050" b="0" i="0">
+              <a:solidFill>
+                <a:srgbClr val="657269"/>
+              </a:solidFill>
+              <a:latin typeface="Arial" panose="020B0604020202090204"/>
+              <a:ea typeface="Arial" panose="020B0604020202090204"/>
+              <a:cs typeface="Arial" panose="020B0604020202090204"/>
+            </a:endParaRPr>
           </a:p>
         </p:txBody>
       </p:sp>
@@ -19066,7 +21072,7 @@
           <a:noFill/>
         </p:spPr>
         <p:txBody>
-          <a:bodyPr wrap="square" lIns="0" rIns="0" tIns="0" bIns="0" anchor="t">
+          <a:bodyPr wrap="square" lIns="0" tIns="0" rIns="0" bIns="0" anchor="t">
             <a:spAutoFit/>
           </a:bodyPr>
           <a:lstStyle/>
@@ -19084,12 +21090,20 @@
                 <a:solidFill>
                   <a:srgbClr val="52765A"/>
                 </a:solidFill>
-                <a:latin typeface="Arial"/>
-                <a:ea typeface="Arial"/>
-                <a:cs typeface="Arial"/>
+                <a:latin typeface="Arial" panose="020B0604020202090204"/>
+                <a:ea typeface="Arial" panose="020B0604020202090204"/>
+                <a:cs typeface="Arial" panose="020B0604020202090204"/>
               </a:rPr>
               <a:t>Output: normal force in N</a:t>
             </a:r>
+            <a:endParaRPr sz="1120" b="1" i="0">
+              <a:solidFill>
+                <a:srgbClr val="52765A"/>
+              </a:solidFill>
+              <a:latin typeface="Arial" panose="020B0604020202090204"/>
+              <a:ea typeface="Arial" panose="020B0604020202090204"/>
+              <a:cs typeface="Arial" panose="020B0604020202090204"/>
+            </a:endParaRPr>
           </a:p>
         </p:txBody>
       </p:sp>
@@ -19157,7 +21171,7 @@
           <a:noFill/>
         </p:spPr>
         <p:txBody>
-          <a:bodyPr wrap="square" lIns="0" rIns="0" tIns="0" bIns="0" anchor="t">
+          <a:bodyPr wrap="square" lIns="0" tIns="0" rIns="0" bIns="0" anchor="t">
             <a:spAutoFit/>
           </a:bodyPr>
           <a:lstStyle/>
@@ -19175,12 +21189,20 @@
                 <a:solidFill>
                   <a:srgbClr val="52765A"/>
                 </a:solidFill>
-                <a:latin typeface="Arial"/>
-                <a:ea typeface="Arial"/>
-                <a:cs typeface="Arial"/>
+                <a:latin typeface="Arial" panose="020B0604020202090204"/>
+                <a:ea typeface="Arial" panose="020B0604020202090204"/>
+                <a:cs typeface="Arial" panose="020B0604020202090204"/>
               </a:rPr>
               <a:t>2 / ESTIMATE AREA</a:t>
             </a:r>
+            <a:endParaRPr sz="1000" b="1" i="0">
+              <a:solidFill>
+                <a:srgbClr val="52765A"/>
+              </a:solidFill>
+              <a:latin typeface="Arial" panose="020B0604020202090204"/>
+              <a:ea typeface="Arial" panose="020B0604020202090204"/>
+              <a:cs typeface="Arial" panose="020B0604020202090204"/>
+            </a:endParaRPr>
           </a:p>
         </p:txBody>
       </p:sp>
@@ -19201,7 +21223,7 @@
           <a:noFill/>
         </p:spPr>
         <p:txBody>
-          <a:bodyPr wrap="square" lIns="0" rIns="0" tIns="0" bIns="0" anchor="t">
+          <a:bodyPr wrap="square" lIns="0" tIns="0" rIns="0" bIns="0" anchor="t">
             <a:spAutoFit/>
           </a:bodyPr>
           <a:lstStyle/>
@@ -19219,12 +21241,20 @@
                 <a:solidFill>
                   <a:srgbClr val="1D2B24"/>
                 </a:solidFill>
-                <a:latin typeface="Arial"/>
-                <a:ea typeface="Arial"/>
-                <a:cs typeface="Arial"/>
+                <a:latin typeface="Arial" panose="020B0604020202090204"/>
+                <a:ea typeface="Arial" panose="020B0604020202090204"/>
+                <a:cs typeface="Arial" panose="020B0604020202090204"/>
               </a:rPr>
               <a:t>Contact: valid i AND Fn_i ≥ τ</a:t>
             </a:r>
+            <a:endParaRPr sz="1550" b="1" i="0">
+              <a:solidFill>
+                <a:srgbClr val="1D2B24"/>
+              </a:solidFill>
+              <a:latin typeface="Arial" panose="020B0604020202090204"/>
+              <a:ea typeface="Arial" panose="020B0604020202090204"/>
+              <a:cs typeface="Arial" panose="020B0604020202090204"/>
+            </a:endParaRPr>
           </a:p>
         </p:txBody>
       </p:sp>
@@ -19245,7 +21275,7 @@
           <a:noFill/>
         </p:spPr>
         <p:txBody>
-          <a:bodyPr wrap="square" lIns="0" rIns="0" tIns="0" bIns="0" anchor="t">
+          <a:bodyPr wrap="square" lIns="0" tIns="0" rIns="0" bIns="0" anchor="t">
             <a:spAutoFit/>
           </a:bodyPr>
           <a:lstStyle/>
@@ -19263,12 +21293,20 @@
                 <a:solidFill>
                   <a:srgbClr val="1D2B24"/>
                 </a:solidFill>
-                <a:latin typeface="Arial"/>
-                <a:ea typeface="Arial"/>
-                <a:cs typeface="Arial"/>
+                <a:latin typeface="Arial" panose="020B0604020202090204"/>
+                <a:ea typeface="Arial" panose="020B0604020202090204"/>
+                <a:cs typeface="Arial" panose="020B0604020202090204"/>
               </a:rPr>
               <a:t>A = Σ A_i  (i in contact)</a:t>
             </a:r>
+            <a:endParaRPr sz="1550" b="1" i="0">
+              <a:solidFill>
+                <a:srgbClr val="1D2B24"/>
+              </a:solidFill>
+              <a:latin typeface="Arial" panose="020B0604020202090204"/>
+              <a:ea typeface="Arial" panose="020B0604020202090204"/>
+              <a:cs typeface="Arial" panose="020B0604020202090204"/>
+            </a:endParaRPr>
           </a:p>
         </p:txBody>
       </p:sp>
@@ -19289,7 +21327,7 @@
           <a:noFill/>
         </p:spPr>
         <p:txBody>
-          <a:bodyPr wrap="square" lIns="0" rIns="0" tIns="0" bIns="0" anchor="t">
+          <a:bodyPr wrap="square" lIns="0" tIns="0" rIns="0" bIns="0" anchor="t">
             <a:spAutoFit/>
           </a:bodyPr>
           <a:lstStyle/>
@@ -19307,12 +21345,20 @@
                 <a:solidFill>
                   <a:srgbClr val="657269"/>
                 </a:solidFill>
-                <a:latin typeface="Arial"/>
-                <a:ea typeface="Arial"/>
-                <a:cs typeface="Arial"/>
+                <a:latin typeface="Arial" panose="020B0604020202090204"/>
+                <a:ea typeface="Arial" panose="020B0604020202090204"/>
+                <a:cs typeface="Arial" panose="020B0604020202090204"/>
               </a:rPr>
               <a:t>Apply source + calibration masks, plus</a:t>
             </a:r>
+            <a:endParaRPr sz="1050" b="0" i="0">
+              <a:solidFill>
+                <a:srgbClr val="657269"/>
+              </a:solidFill>
+              <a:latin typeface="Arial" panose="020B0604020202090204"/>
+              <a:ea typeface="Arial" panose="020B0604020202090204"/>
+              <a:cs typeface="Arial" panose="020B0604020202090204"/>
+            </a:endParaRPr>
           </a:p>
           <a:p>
             <a:pPr algn="l">
@@ -19328,12 +21374,20 @@
                 <a:solidFill>
                   <a:srgbClr val="657269"/>
                 </a:solidFill>
-                <a:latin typeface="Arial"/>
-                <a:ea typeface="Arial"/>
-                <a:cs typeface="Arial"/>
+                <a:latin typeface="Arial" panose="020B0604020202090204"/>
+                <a:ea typeface="Arial" panose="020B0604020202090204"/>
+                <a:cs typeface="Arial" panose="020B0604020202090204"/>
               </a:rPr>
               <a:t>packet_valid and sample_valid.</a:t>
             </a:r>
+            <a:endParaRPr sz="1050" b="0" i="0">
+              <a:solidFill>
+                <a:srgbClr val="657269"/>
+              </a:solidFill>
+              <a:latin typeface="Arial" panose="020B0604020202090204"/>
+              <a:ea typeface="Arial" panose="020B0604020202090204"/>
+              <a:cs typeface="Arial" panose="020B0604020202090204"/>
+            </a:endParaRPr>
           </a:p>
           <a:p>
             <a:pPr algn="l">
@@ -19349,12 +21403,20 @@
                 <a:solidFill>
                   <a:srgbClr val="657269"/>
                 </a:solidFill>
-                <a:latin typeface="Arial"/>
-                <a:ea typeface="Arial"/>
-                <a:cs typeface="Arial"/>
+                <a:latin typeface="Arial" panose="020B0604020202090204"/>
+                <a:ea typeface="Arial" panose="020B0604020202090204"/>
+                <a:cs typeface="Arial" panose="020B0604020202090204"/>
               </a:rPr>
               <a:t>τ is a normal-force threshold in N;</a:t>
             </a:r>
+            <a:endParaRPr sz="1050" b="0" i="0">
+              <a:solidFill>
+                <a:srgbClr val="657269"/>
+              </a:solidFill>
+              <a:latin typeface="Arial" panose="020B0604020202090204"/>
+              <a:ea typeface="Arial" panose="020B0604020202090204"/>
+              <a:cs typeface="Arial" panose="020B0604020202090204"/>
+            </a:endParaRPr>
           </a:p>
           <a:p>
             <a:pPr algn="l">
@@ -19370,12 +21432,20 @@
                 <a:solidFill>
                   <a:srgbClr val="657269"/>
                 </a:solidFill>
-                <a:latin typeface="Arial"/>
-                <a:ea typeface="Arial"/>
-                <a:cs typeface="Arial"/>
+                <a:latin typeface="Arial" panose="020B0604020202090204"/>
+                <a:ea typeface="Arial" panose="020B0604020202090204"/>
+                <a:cs typeface="Arial" panose="020B0604020202090204"/>
               </a:rPr>
               <a:t>each contact taxel adds its full area.</a:t>
             </a:r>
+            <a:endParaRPr sz="1050" b="0" i="0">
+              <a:solidFill>
+                <a:srgbClr val="657269"/>
+              </a:solidFill>
+              <a:latin typeface="Arial" panose="020B0604020202090204"/>
+              <a:ea typeface="Arial" panose="020B0604020202090204"/>
+              <a:cs typeface="Arial" panose="020B0604020202090204"/>
+            </a:endParaRPr>
           </a:p>
         </p:txBody>
       </p:sp>
@@ -19396,7 +21466,7 @@
           <a:noFill/>
         </p:spPr>
         <p:txBody>
-          <a:bodyPr wrap="square" lIns="0" rIns="0" tIns="0" bIns="0" anchor="t">
+          <a:bodyPr wrap="square" lIns="0" tIns="0" rIns="0" bIns="0" anchor="t">
             <a:spAutoFit/>
           </a:bodyPr>
           <a:lstStyle/>
@@ -19414,12 +21484,20 @@
                 <a:solidFill>
                   <a:srgbClr val="52765A"/>
                 </a:solidFill>
-                <a:latin typeface="Arial"/>
-                <a:ea typeface="Arial"/>
-                <a:cs typeface="Arial"/>
+                <a:latin typeface="Arial" panose="020B0604020202090204"/>
+                <a:ea typeface="Arial" panose="020B0604020202090204"/>
+                <a:cs typeface="Arial" panose="020B0604020202090204"/>
               </a:rPr>
               <a:t>Output: discrete area in mm²</a:t>
             </a:r>
+            <a:endParaRPr sz="1120" b="1" i="0">
+              <a:solidFill>
+                <a:srgbClr val="52765A"/>
+              </a:solidFill>
+              <a:latin typeface="Arial" panose="020B0604020202090204"/>
+              <a:ea typeface="Arial" panose="020B0604020202090204"/>
+              <a:cs typeface="Arial" panose="020B0604020202090204"/>
+            </a:endParaRPr>
           </a:p>
         </p:txBody>
       </p:sp>
@@ -19487,7 +21565,7 @@
           <a:noFill/>
         </p:spPr>
         <p:txBody>
-          <a:bodyPr wrap="square" lIns="0" rIns="0" tIns="0" bIns="0" anchor="t">
+          <a:bodyPr wrap="square" lIns="0" tIns="0" rIns="0" bIns="0" anchor="t">
             <a:spAutoFit/>
           </a:bodyPr>
           <a:lstStyle/>
@@ -19505,12 +21583,20 @@
                 <a:solidFill>
                   <a:srgbClr val="52765A"/>
                 </a:solidFill>
-                <a:latin typeface="Arial"/>
-                <a:ea typeface="Arial"/>
-                <a:cs typeface="Arial"/>
+                <a:latin typeface="Arial" panose="020B0604020202090204"/>
+                <a:ea typeface="Arial" panose="020B0604020202090204"/>
+                <a:cs typeface="Arial" panose="020B0604020202090204"/>
               </a:rPr>
               <a:t>3 / COMPUTE PRESSURE</a:t>
             </a:r>
+            <a:endParaRPr sz="1000" b="1" i="0">
+              <a:solidFill>
+                <a:srgbClr val="52765A"/>
+              </a:solidFill>
+              <a:latin typeface="Arial" panose="020B0604020202090204"/>
+              <a:ea typeface="Arial" panose="020B0604020202090204"/>
+              <a:cs typeface="Arial" panose="020B0604020202090204"/>
+            </a:endParaRPr>
           </a:p>
         </p:txBody>
       </p:sp>
@@ -19531,7 +21617,7 @@
           <a:noFill/>
         </p:spPr>
         <p:txBody>
-          <a:bodyPr wrap="square" lIns="0" rIns="0" tIns="0" bIns="0" anchor="t">
+          <a:bodyPr wrap="square" lIns="0" tIns="0" rIns="0" bIns="0" anchor="t">
             <a:spAutoFit/>
           </a:bodyPr>
           <a:lstStyle/>
@@ -19549,12 +21635,20 @@
                 <a:solidFill>
                   <a:srgbClr val="1D2B24"/>
                 </a:solidFill>
-                <a:latin typeface="Arial"/>
-                <a:ea typeface="Arial"/>
-                <a:cs typeface="Arial"/>
+                <a:latin typeface="Arial" panose="020B0604020202090204"/>
+                <a:ea typeface="Arial" panose="020B0604020202090204"/>
+                <a:cs typeface="Arial" panose="020B0604020202090204"/>
               </a:rPr>
               <a:t>p_i = Fn_i / A_i × 10⁶</a:t>
             </a:r>
+            <a:endParaRPr sz="1550" b="1" i="0">
+              <a:solidFill>
+                <a:srgbClr val="1D2B24"/>
+              </a:solidFill>
+              <a:latin typeface="Arial" panose="020B0604020202090204"/>
+              <a:ea typeface="Arial" panose="020B0604020202090204"/>
+              <a:cs typeface="Arial" panose="020B0604020202090204"/>
+            </a:endParaRPr>
           </a:p>
         </p:txBody>
       </p:sp>
@@ -19575,7 +21669,7 @@
           <a:noFill/>
         </p:spPr>
         <p:txBody>
-          <a:bodyPr wrap="square" lIns="0" rIns="0" tIns="0" bIns="0" anchor="t">
+          <a:bodyPr wrap="square" lIns="0" tIns="0" rIns="0" bIns="0" anchor="t">
             <a:spAutoFit/>
           </a:bodyPr>
           <a:lstStyle/>
@@ -19593,12 +21687,20 @@
                 <a:solidFill>
                   <a:srgbClr val="1D2B24"/>
                 </a:solidFill>
-                <a:latin typeface="Arial"/>
-                <a:ea typeface="Arial"/>
-                <a:cs typeface="Arial"/>
+                <a:latin typeface="Arial" panose="020B0604020202090204"/>
+                <a:ea typeface="Arial" panose="020B0604020202090204"/>
+                <a:cs typeface="Arial" panose="020B0604020202090204"/>
               </a:rPr>
               <a:t>Mean p = Σ Fn_i / A × 10⁶</a:t>
             </a:r>
+            <a:endParaRPr sz="1550" b="1" i="0">
+              <a:solidFill>
+                <a:srgbClr val="1D2B24"/>
+              </a:solidFill>
+              <a:latin typeface="Arial" panose="020B0604020202090204"/>
+              <a:ea typeface="Arial" panose="020B0604020202090204"/>
+              <a:cs typeface="Arial" panose="020B0604020202090204"/>
+            </a:endParaRPr>
           </a:p>
         </p:txBody>
       </p:sp>
@@ -19619,7 +21721,7 @@
           <a:noFill/>
         </p:spPr>
         <p:txBody>
-          <a:bodyPr wrap="square" lIns="0" rIns="0" tIns="0" bIns="0" anchor="t">
+          <a:bodyPr wrap="square" lIns="0" tIns="0" rIns="0" bIns="0" anchor="t">
             <a:spAutoFit/>
           </a:bodyPr>
           <a:lstStyle/>
@@ -19637,12 +21739,20 @@
                 <a:solidFill>
                   <a:srgbClr val="657269"/>
                 </a:solidFill>
-                <a:latin typeface="Arial"/>
-                <a:ea typeface="Arial"/>
-                <a:cs typeface="Arial"/>
+                <a:latin typeface="Arial" panose="020B0604020202090204"/>
+                <a:ea typeface="Arial" panose="020B0604020202090204"/>
+                <a:cs typeface="Arial" panose="020B0604020202090204"/>
               </a:rPr>
               <a:t>Sum over selected contact taxels only.</a:t>
             </a:r>
+            <a:endParaRPr sz="1050" b="0" i="0">
+              <a:solidFill>
+                <a:srgbClr val="657269"/>
+              </a:solidFill>
+              <a:latin typeface="Arial" panose="020B0604020202090204"/>
+              <a:ea typeface="Arial" panose="020B0604020202090204"/>
+              <a:cs typeface="Arial" panose="020B0604020202090204"/>
+            </a:endParaRPr>
           </a:p>
           <a:p>
             <a:pPr algn="l">
@@ -19658,12 +21768,20 @@
                 <a:solidFill>
                   <a:srgbClr val="657269"/>
                 </a:solidFill>
-                <a:latin typeface="Arial"/>
-                <a:ea typeface="Arial"/>
-                <a:cs typeface="Arial"/>
+                <a:latin typeface="Arial" panose="020B0604020202090204"/>
+                <a:ea typeface="Arial" panose="020B0604020202090204"/>
+                <a:cs typeface="Arial" panose="020B0604020202090204"/>
               </a:rPr>
               <a:t>Areas are in mm²; pressures are in Pa.</a:t>
             </a:r>
+            <a:endParaRPr sz="1050" b="0" i="0">
+              <a:solidFill>
+                <a:srgbClr val="657269"/>
+              </a:solidFill>
+              <a:latin typeface="Arial" panose="020B0604020202090204"/>
+              <a:ea typeface="Arial" panose="020B0604020202090204"/>
+              <a:cs typeface="Arial" panose="020B0604020202090204"/>
+            </a:endParaRPr>
           </a:p>
           <a:p>
             <a:pPr algn="l">
@@ -19679,12 +21797,20 @@
                 <a:solidFill>
                   <a:srgbClr val="657269"/>
                 </a:solidFill>
-                <a:latin typeface="Arial"/>
-                <a:ea typeface="Arial"/>
-                <a:cs typeface="Arial"/>
+                <a:latin typeface="Arial" panose="020B0604020202090204"/>
+                <a:ea typeface="Arial" panose="020B0604020202090204"/>
+                <a:cs typeface="Arial" panose="020B0604020202090204"/>
               </a:rPr>
               <a:t>Mean pressure is area weighted.</a:t>
             </a:r>
+            <a:endParaRPr sz="1050" b="0" i="0">
+              <a:solidFill>
+                <a:srgbClr val="657269"/>
+              </a:solidFill>
+              <a:latin typeface="Arial" panose="020B0604020202090204"/>
+              <a:ea typeface="Arial" panose="020B0604020202090204"/>
+              <a:cs typeface="Arial" panose="020B0604020202090204"/>
+            </a:endParaRPr>
           </a:p>
           <a:p>
             <a:pPr algn="l">
@@ -19700,12 +21826,20 @@
                 <a:solidFill>
                   <a:srgbClr val="657269"/>
                 </a:solidFill>
-                <a:latin typeface="Arial"/>
-                <a:ea typeface="Arial"/>
-                <a:cs typeface="Arial"/>
+                <a:latin typeface="Arial" panose="020B0604020202090204"/>
+                <a:ea typeface="Arial" panose="020B0604020202090204"/>
+                <a:cs typeface="Arial" panose="020B0604020202090204"/>
               </a:rPr>
               <a:t>Divide Pa by 1,000 to report kPa.</a:t>
             </a:r>
+            <a:endParaRPr sz="1050" b="0" i="0">
+              <a:solidFill>
+                <a:srgbClr val="657269"/>
+              </a:solidFill>
+              <a:latin typeface="Arial" panose="020B0604020202090204"/>
+              <a:ea typeface="Arial" panose="020B0604020202090204"/>
+              <a:cs typeface="Arial" panose="020B0604020202090204"/>
+            </a:endParaRPr>
           </a:p>
         </p:txBody>
       </p:sp>
@@ -19726,7 +21860,7 @@
           <a:noFill/>
         </p:spPr>
         <p:txBody>
-          <a:bodyPr wrap="square" lIns="0" rIns="0" tIns="0" bIns="0" anchor="t">
+          <a:bodyPr wrap="square" lIns="0" tIns="0" rIns="0" bIns="0" anchor="t">
             <a:spAutoFit/>
           </a:bodyPr>
           <a:lstStyle/>
@@ -19744,12 +21878,20 @@
                 <a:solidFill>
                   <a:srgbClr val="52765A"/>
                 </a:solidFill>
-                <a:latin typeface="Arial"/>
-                <a:ea typeface="Arial"/>
-                <a:cs typeface="Arial"/>
+                <a:latin typeface="Arial" panose="020B0604020202090204"/>
+                <a:ea typeface="Arial" panose="020B0604020202090204"/>
+                <a:cs typeface="Arial" panose="020B0604020202090204"/>
               </a:rPr>
               <a:t>Output: mean / peak pressure</a:t>
             </a:r>
+            <a:endParaRPr sz="1120" b="1" i="0">
+              <a:solidFill>
+                <a:srgbClr val="52765A"/>
+              </a:solidFill>
+              <a:latin typeface="Arial" panose="020B0604020202090204"/>
+              <a:ea typeface="Arial" panose="020B0604020202090204"/>
+              <a:cs typeface="Arial" panose="020B0604020202090204"/>
+            </a:endParaRPr>
           </a:p>
         </p:txBody>
       </p:sp>
@@ -19815,7 +21957,7 @@
           <a:noFill/>
         </p:spPr>
         <p:txBody>
-          <a:bodyPr wrap="square" lIns="0" rIns="0" tIns="0" bIns="0" anchor="t">
+          <a:bodyPr wrap="square" lIns="0" tIns="0" rIns="0" bIns="0" anchor="t">
             <a:spAutoFit/>
           </a:bodyPr>
           <a:lstStyle/>
@@ -19833,12 +21975,20 @@
                 <a:solidFill>
                   <a:srgbClr val="52765A"/>
                 </a:solidFill>
-                <a:latin typeface="Arial"/>
-                <a:ea typeface="Arial"/>
-                <a:cs typeface="Arial"/>
+                <a:latin typeface="Arial" panose="020B0604020202090204"/>
+                <a:ea typeface="Arial" panose="020B0604020202090204"/>
+                <a:cs typeface="Arial" panose="020B0604020202090204"/>
               </a:rPr>
               <a:t>BEFORE REAL MEASUREMENTS</a:t>
             </a:r>
+            <a:endParaRPr sz="950" b="1" i="0">
+              <a:solidFill>
+                <a:srgbClr val="52765A"/>
+              </a:solidFill>
+              <a:latin typeface="Arial" panose="020B0604020202090204"/>
+              <a:ea typeface="Arial" panose="020B0604020202090204"/>
+              <a:cs typeface="Arial" panose="020B0604020202090204"/>
+            </a:endParaRPr>
           </a:p>
         </p:txBody>
       </p:sp>
@@ -19859,7 +22009,7 @@
           <a:noFill/>
         </p:spPr>
         <p:txBody>
-          <a:bodyPr wrap="square" lIns="0" rIns="0" tIns="0" bIns="0" anchor="t">
+          <a:bodyPr wrap="square" lIns="0" tIns="0" rIns="0" bIns="0" anchor="t">
             <a:spAutoFit/>
           </a:bodyPr>
           <a:lstStyle/>
@@ -19877,12 +22027,20 @@
                 <a:solidFill>
                   <a:srgbClr val="657269"/>
                 </a:solidFill>
-                <a:latin typeface="Arial"/>
-                <a:ea typeface="Arial"/>
-                <a:cs typeface="Arial"/>
+                <a:latin typeface="Arial" panose="020B0604020202090204"/>
+                <a:ea typeface="Arial" panose="020B0604020202090204"/>
+                <a:cs typeface="Arial" panose="020B0604020202090204"/>
               </a:rPr>
               <a:t>Verify taxels, unloaded bias, force calibration, compressive normals, and taxel areas separately for each hand.</a:t>
             </a:r>
+            <a:endParaRPr sz="1120" b="0" i="0">
+              <a:solidFill>
+                <a:srgbClr val="657269"/>
+              </a:solidFill>
+              <a:latin typeface="Arial" panose="020B0604020202090204"/>
+              <a:ea typeface="Arial" panose="020B0604020202090204"/>
+              <a:cs typeface="Arial" panose="020B0604020202090204"/>
+            </a:endParaRPr>
           </a:p>
         </p:txBody>
       </p:sp>
@@ -19948,7 +22106,7 @@
           <a:noFill/>
         </p:spPr>
         <p:txBody>
-          <a:bodyPr wrap="square" lIns="0" rIns="0" tIns="0" bIns="0" anchor="t">
+          <a:bodyPr wrap="square" lIns="0" tIns="0" rIns="0" bIns="0" anchor="t">
             <a:spAutoFit/>
           </a:bodyPr>
           <a:lstStyle/>
@@ -19966,23 +22124,31 @@
                 <a:solidFill>
                   <a:srgbClr val="8C6031"/>
                 </a:solidFill>
-                <a:latin typeface="Arial"/>
-                <a:ea typeface="Arial"/>
-                <a:cs typeface="Arial"/>
+                <a:latin typeface="Arial" panose="020B0604020202090204"/>
+                <a:ea typeface="Arial" panose="020B0604020202090204"/>
+                <a:cs typeface="Arial" panose="020B0604020202090204"/>
               </a:rPr>
               <a:t>Practice first with the README synthetic demo (§8). Its toy calibration must not be applied to the real recording.</a:t>
             </a:r>
+            <a:endParaRPr sz="1050" b="0" i="0">
+              <a:solidFill>
+                <a:srgbClr val="8C6031"/>
+              </a:solidFill>
+              <a:latin typeface="Arial" panose="020B0604020202090204"/>
+              <a:ea typeface="Arial" panose="020B0604020202090204"/>
+              <a:cs typeface="Arial" panose="020B0604020202090204"/>
+            </a:endParaRPr>
           </a:p>
         </p:txBody>
       </p:sp>
     </p:spTree>
   </p:cSld>
-  <p:transition xmlns:p="http://schemas.openxmlformats.org/presentationml/2006/main" spd="slow">
-    <p:fade/>
-  </p:transition>
   <p:clrMapOvr>
     <a:masterClrMapping/>
   </p:clrMapOvr>
+  <p:transition spd="slow">
+    <p:fade/>
+  </p:transition>
 </p:sld>
 </file>
 
@@ -20302,7 +22468,11 @@
       </a:style>
     </a:lnDef>
   </a:objectDefaults>
-  <a:extraClrSchemeLst/>
+  <a:extLst>
+    <a:ext uri="{05A4C25C-085E-4340-85A3-A5531E510DB2}">
+      <thm15:themeFamily xmlns:thm15="http://schemas.microsoft.com/office/thememl/2012/main" name="Office Theme" id="{62F939B6-93AF-4DB8-9C6B-D6C7DFDC589F}" vid="{4A3C46E8-61CC-4603-A589-7422A47A8E4A}"/>
+    </a:ext>
+  </a:extLst>
 </a:theme>
 </file>
 
@@ -20622,6 +22792,10 @@
       </a:style>
     </a:lnDef>
   </a:objectDefaults>
-  <a:extraClrSchemeLst/>
+  <a:extLst>
+    <a:ext uri="{05A4C25C-085E-4340-85A3-A5531E510DB2}">
+      <thm15:themeFamily xmlns:thm15="http://schemas.microsoft.com/office/thememl/2012/main" name="Office Theme" id="{62F939B6-93AF-4DB8-9C6B-D6C7DFDC589F}" vid="{4A3C46E8-61CC-4603-A589-7422A47A8E4A}"/>
+    </a:ext>
+  </a:extLst>
 </a:theme>
 </file>